--- a/output/분리/중3_Lesson7_so-that-can_객관식_수업PPT.pptx
+++ b/output/분리/중3_Lesson7_so-that-can_객관식_수업PPT.pptx
@@ -3530,7 +3530,7 @@
         <p:spPr>
           <a:xfrm>
             <a:off x="457200" y="868680"/>
-            <a:ext cx="11277295" cy="3593591"/>
+            <a:ext cx="11277295" cy="3275837"/>
           </a:xfrm>
           <a:prstGeom prst="rect">
             <a:avLst/>
@@ -3767,7 +3767,7 @@
         <p:spPr>
           <a:xfrm>
             <a:off x="457200" y="868680"/>
-            <a:ext cx="11277295" cy="3593591"/>
+            <a:ext cx="11277295" cy="3275837"/>
           </a:xfrm>
           <a:prstGeom prst="rect">
             <a:avLst/>
@@ -4008,7 +4008,7 @@
         </p:nvCxnSpPr>
         <p:spPr>
           <a:xfrm>
-            <a:off x="457200" y="4507991"/>
+            <a:off x="457200" y="4190237"/>
             <a:ext cx="11277295" cy="0"/>
           </a:xfrm>
           <a:prstGeom prst="line">
@@ -4043,8 +4043,8 @@
         </p:nvSpPr>
         <p:spPr>
           <a:xfrm>
-            <a:off x="457200" y="4645151"/>
-            <a:ext cx="11277295" cy="685800"/>
+            <a:off x="457200" y="4327397"/>
+            <a:ext cx="11277295" cy="1003553"/>
           </a:xfrm>
           <a:prstGeom prst="roundRect">
             <a:avLst>
@@ -4095,6 +4095,25 @@
                 <a:latin typeface="맑은 고딕"/>
               </a:rPr>
               <a:t>정답:  ① so</a:t>
+            </a:r>
+          </a:p>
+          <a:p>
+            <a:pPr algn="ctr">
+              <a:lnSpc>
+                <a:spcPct val="105000"/>
+              </a:lnSpc>
+              <a:spcBef>
+                <a:spcPts val="0"/>
+              </a:spcBef>
+            </a:pPr>
+            <a:r>
+              <a:rPr sz="1300" b="0" i="0" u="none">
+                <a:solidFill>
+                  <a:srgbClr val="1E2A4A"/>
+                </a:solidFill>
+                <a:latin typeface="맑은 고딕"/>
+              </a:rPr>
+              <a:t>• 내가 잘 수 있도록 불을 꺼 주세요.  /  • 그것은 내가 대답할 수 있을 만큼 쉬운 질문이었다.</a:t>
             </a:r>
           </a:p>
         </p:txBody>
@@ -4546,7 +4565,7 @@
         <p:spPr>
           <a:xfrm>
             <a:off x="457200" y="868680"/>
-            <a:ext cx="11277295" cy="3593591"/>
+            <a:ext cx="11277295" cy="3067811"/>
           </a:xfrm>
           <a:prstGeom prst="rect">
             <a:avLst/>
@@ -4571,7 +4590,7 @@
               </a:spcAft>
             </a:pPr>
             <a:r>
-              <a:rPr sz="2100" b="1" i="0" u="none">
+              <a:rPr sz="1900" b="1" i="0" u="none">
                 <a:solidFill>
                   <a:srgbClr val="1E2A4A"/>
                 </a:solidFill>
@@ -4612,7 +4631,7 @@
               </a:spcAft>
             </a:pPr>
             <a:r>
-              <a:rPr sz="2000" b="0" i="0" u="none">
+              <a:rPr sz="1800" b="0" i="0" u="none">
                 <a:solidFill>
                   <a:srgbClr val="222222"/>
                 </a:solidFill>
@@ -4634,7 +4653,7 @@
               </a:spcAft>
             </a:pPr>
             <a:r>
-              <a:rPr sz="2000" b="0" i="0" u="none">
+              <a:rPr sz="1800" b="0" i="0" u="none">
                 <a:solidFill>
                   <a:srgbClr val="222222"/>
                 </a:solidFill>
@@ -4675,7 +4694,7 @@
               </a:spcAft>
             </a:pPr>
             <a:r>
-              <a:rPr sz="2000" b="0" i="0" u="none">
+              <a:rPr sz="1800" b="0" i="0" u="none">
                 <a:solidFill>
                   <a:srgbClr val="222222"/>
                 </a:solidFill>
@@ -4697,7 +4716,7 @@
               </a:spcAft>
             </a:pPr>
             <a:r>
-              <a:rPr sz="2000" b="0" i="0" u="none">
+              <a:rPr sz="1800" b="0" i="0" u="none">
                 <a:solidFill>
                   <a:srgbClr val="222222"/>
                 </a:solidFill>
@@ -4719,7 +4738,7 @@
               </a:spcAft>
             </a:pPr>
             <a:r>
-              <a:rPr sz="2000" b="0" i="0" u="none">
+              <a:rPr sz="1800" b="0" i="0" u="none">
                 <a:solidFill>
                   <a:srgbClr val="222222"/>
                 </a:solidFill>
@@ -4741,7 +4760,7 @@
               </a:spcAft>
             </a:pPr>
             <a:r>
-              <a:rPr sz="2000" b="0" i="0" u="none">
+              <a:rPr sz="1800" b="0" i="0" u="none">
                 <a:solidFill>
                   <a:srgbClr val="222222"/>
                 </a:solidFill>
@@ -4763,7 +4782,7 @@
               </a:spcAft>
             </a:pPr>
             <a:r>
-              <a:rPr sz="2000" b="0" i="0" u="none">
+              <a:rPr sz="1800" b="0" i="0" u="none">
                 <a:solidFill>
                   <a:srgbClr val="222222"/>
                 </a:solidFill>
@@ -4783,7 +4802,7 @@
         <p:spPr>
           <a:xfrm>
             <a:off x="457200" y="868680"/>
-            <a:ext cx="11277295" cy="3593591"/>
+            <a:ext cx="11277295" cy="3067811"/>
           </a:xfrm>
           <a:prstGeom prst="rect">
             <a:avLst/>
@@ -4813,7 +4832,7 @@
               </a:spcAft>
             </a:pPr>
             <a:r>
-              <a:rPr sz="2100" b="1" i="0" u="none">
+              <a:rPr sz="1900" b="1" i="0" u="none">
                 <a:solidFill>
                   <a:srgbClr val="1E2A4A"/>
                 </a:solidFill>
@@ -4854,7 +4873,7 @@
               </a:spcAft>
             </a:pPr>
             <a:r>
-              <a:rPr sz="2000" b="0" i="0" u="none">
+              <a:rPr sz="1800" b="0" i="0" u="none">
                 <a:solidFill>
                   <a:srgbClr val="222222"/>
                 </a:solidFill>
@@ -4876,7 +4895,7 @@
               </a:spcAft>
             </a:pPr>
             <a:r>
-              <a:rPr sz="2000" b="0" i="0" u="none">
+              <a:rPr sz="1800" b="0" i="0" u="none">
                 <a:solidFill>
                   <a:srgbClr val="222222"/>
                 </a:solidFill>
@@ -4885,7 +4904,7 @@
               <a:t>B: Yes, he invented it so that we can </a:t>
             </a:r>
             <a:r>
-              <a:rPr sz="2000" b="1" i="0" u="sng">
+              <a:rPr sz="1800" b="1" i="0" u="sng">
                 <a:solidFill>
                   <a:srgbClr val="C03A2E"/>
                 </a:solidFill>
@@ -4894,7 +4913,7 @@
               <a:t>talk to other people in different places</a:t>
             </a:r>
             <a:r>
-              <a:rPr sz="2000" b="0" i="0" u="none">
+              <a:rPr sz="1800" b="0" i="0" u="none">
                 <a:solidFill>
                   <a:srgbClr val="222222"/>
                 </a:solidFill>
@@ -4935,7 +4954,7 @@
               </a:spcAft>
             </a:pPr>
             <a:r>
-              <a:rPr sz="2000" b="0" i="0" u="none">
+              <a:rPr sz="1800" b="0" i="0" u="none">
                 <a:solidFill>
                   <a:srgbClr val="222222"/>
                 </a:solidFill>
@@ -4957,7 +4976,7 @@
               </a:spcAft>
             </a:pPr>
             <a:r>
-              <a:rPr sz="2000" b="0" i="0" u="none">
+              <a:rPr sz="1800" b="0" i="0" u="none">
                 <a:solidFill>
                   <a:srgbClr val="222222"/>
                 </a:solidFill>
@@ -4979,7 +4998,7 @@
               </a:spcAft>
             </a:pPr>
             <a:r>
-              <a:rPr sz="2000" b="0" i="0" u="none">
+              <a:rPr sz="1800" b="0" i="0" u="none">
                 <a:solidFill>
                   <a:srgbClr val="222222"/>
                 </a:solidFill>
@@ -5001,7 +5020,7 @@
               </a:spcAft>
             </a:pPr>
             <a:r>
-              <a:rPr sz="2000" b="0" i="0" u="none">
+              <a:rPr sz="1800" b="0" i="0" u="none">
                 <a:solidFill>
                   <a:srgbClr val="222222"/>
                 </a:solidFill>
@@ -5023,7 +5042,7 @@
               </a:spcAft>
             </a:pPr>
             <a:r>
-              <a:rPr sz="2000" b="1" i="0" u="none">
+              <a:rPr sz="1800" b="1" i="0" u="none">
                 <a:solidFill>
                   <a:srgbClr val="C03A2E"/>
                 </a:solidFill>
@@ -5042,7 +5061,7 @@
         </p:nvCxnSpPr>
         <p:spPr>
           <a:xfrm>
-            <a:off x="457200" y="4507991"/>
+            <a:off x="457200" y="3982211"/>
             <a:ext cx="11277295" cy="0"/>
           </a:xfrm>
           <a:prstGeom prst="line">
@@ -5077,8 +5096,8 @@
         </p:nvSpPr>
         <p:spPr>
           <a:xfrm>
-            <a:off x="457200" y="4645151"/>
-            <a:ext cx="11277295" cy="685800"/>
+            <a:off x="457200" y="4119371"/>
+            <a:ext cx="11277295" cy="1211580"/>
           </a:xfrm>
           <a:prstGeom prst="roundRect">
             <a:avLst>
@@ -5129,6 +5148,25 @@
                 <a:latin typeface="맑은 고딕"/>
               </a:rPr>
               <a:t>정답:  ⑤ talk to other people in different places</a:t>
+            </a:r>
+          </a:p>
+          <a:p>
+            <a:pPr algn="ctr">
+              <a:lnSpc>
+                <a:spcPct val="105000"/>
+              </a:lnSpc>
+              <a:spcBef>
+                <a:spcPts val="0"/>
+              </a:spcBef>
+            </a:pPr>
+            <a:r>
+              <a:rPr sz="1300" b="0" i="0" u="none">
+                <a:solidFill>
+                  <a:srgbClr val="1E2A4A"/>
+                </a:solidFill>
+                <a:latin typeface="맑은 고딕"/>
+              </a:rPr>
+              <a:t>A: 벨이 전화기를 발명했지, 그렇지 않니? B: 응, 그는 우리가 다른 곳에 있는 사람들과 이야기할 수 있도록 그것을 발명했어.</a:t>
             </a:r>
           </a:p>
         </p:txBody>
@@ -5580,7 +5618,7 @@
         <p:spPr>
           <a:xfrm>
             <a:off x="457200" y="868680"/>
-            <a:ext cx="11277295" cy="3593591"/>
+            <a:ext cx="11277295" cy="3275837"/>
           </a:xfrm>
           <a:prstGeom prst="rect">
             <a:avLst/>
@@ -5754,7 +5792,7 @@
         <p:spPr>
           <a:xfrm>
             <a:off x="457200" y="868680"/>
-            <a:ext cx="11277295" cy="3593591"/>
+            <a:ext cx="11277295" cy="3275837"/>
           </a:xfrm>
           <a:prstGeom prst="rect">
             <a:avLst/>
@@ -5932,7 +5970,7 @@
         </p:nvCxnSpPr>
         <p:spPr>
           <a:xfrm>
-            <a:off x="457200" y="4507991"/>
+            <a:off x="457200" y="4190237"/>
             <a:ext cx="11277295" cy="0"/>
           </a:xfrm>
           <a:prstGeom prst="line">
@@ -5967,8 +6005,8 @@
         </p:nvSpPr>
         <p:spPr>
           <a:xfrm>
-            <a:off x="457200" y="4645151"/>
-            <a:ext cx="11277295" cy="685800"/>
+            <a:off x="457200" y="4327397"/>
+            <a:ext cx="11277295" cy="1003553"/>
           </a:xfrm>
           <a:prstGeom prst="roundRect">
             <a:avLst>
@@ -6019,6 +6057,25 @@
                 <a:latin typeface="맑은 고딕"/>
               </a:rPr>
               <a:t>정답:  ① I was nervous, so that I could hardly speak.</a:t>
+            </a:r>
+          </a:p>
+          <a:p>
+            <a:pPr algn="ctr">
+              <a:lnSpc>
+                <a:spcPct val="105000"/>
+              </a:lnSpc>
+              <a:spcBef>
+                <a:spcPts val="0"/>
+              </a:spcBef>
+            </a:pPr>
+            <a:r>
+              <a:rPr sz="1300" b="0" i="0" u="none">
+                <a:solidFill>
+                  <a:srgbClr val="1E2A4A"/>
+                </a:solidFill>
+                <a:latin typeface="맑은 고딕"/>
+              </a:rPr>
+              <a:t>① (다른 쓰임: 결과) 나는 긴장해서 거의 말을 할 수 없었다.</a:t>
             </a:r>
           </a:p>
         </p:txBody>
@@ -6470,7 +6527,7 @@
         <p:spPr>
           <a:xfrm>
             <a:off x="457200" y="868680"/>
-            <a:ext cx="11277295" cy="3593591"/>
+            <a:ext cx="11277295" cy="3275837"/>
           </a:xfrm>
           <a:prstGeom prst="rect">
             <a:avLst/>
@@ -6685,7 +6742,7 @@
         <p:spPr>
           <a:xfrm>
             <a:off x="457200" y="868680"/>
-            <a:ext cx="11277295" cy="3593591"/>
+            <a:ext cx="11277295" cy="3275837"/>
           </a:xfrm>
           <a:prstGeom prst="rect">
             <a:avLst/>
@@ -6904,7 +6961,7 @@
         </p:nvCxnSpPr>
         <p:spPr>
           <a:xfrm>
-            <a:off x="457200" y="4507991"/>
+            <a:off x="457200" y="4190237"/>
             <a:ext cx="11277295" cy="0"/>
           </a:xfrm>
           <a:prstGeom prst="line">
@@ -6939,8 +6996,8 @@
         </p:nvSpPr>
         <p:spPr>
           <a:xfrm>
-            <a:off x="457200" y="4645151"/>
-            <a:ext cx="11277295" cy="685800"/>
+            <a:off x="457200" y="4327397"/>
+            <a:ext cx="11277295" cy="1003553"/>
           </a:xfrm>
           <a:prstGeom prst="roundRect">
             <a:avLst>
@@ -6991,6 +7048,25 @@
                 <a:latin typeface="맑은 고딕"/>
               </a:rPr>
               <a:t>정답:  ③ I exercise hard so that I can lose weight.</a:t>
+            </a:r>
+          </a:p>
+          <a:p>
+            <a:pPr algn="ctr">
+              <a:lnSpc>
+                <a:spcPct val="105000"/>
+              </a:lnSpc>
+              <a:spcBef>
+                <a:spcPts val="0"/>
+              </a:spcBef>
+            </a:pPr>
+            <a:r>
+              <a:rPr sz="1300" b="0" i="0" u="none">
+                <a:solidFill>
+                  <a:srgbClr val="1E2A4A"/>
+                </a:solidFill>
+                <a:latin typeface="맑은 고딕"/>
+              </a:rPr>
+              <a:t>나는 살을 빼기 위해 열심히 운동한다.</a:t>
             </a:r>
           </a:p>
         </p:txBody>
@@ -7442,7 +7518,7 @@
         <p:spPr>
           <a:xfrm>
             <a:off x="457200" y="868680"/>
-            <a:ext cx="11277295" cy="3593591"/>
+            <a:ext cx="11277295" cy="3275837"/>
           </a:xfrm>
           <a:prstGeom prst="rect">
             <a:avLst/>
@@ -7657,7 +7733,7 @@
         <p:spPr>
           <a:xfrm>
             <a:off x="457200" y="868680"/>
-            <a:ext cx="11277295" cy="3593591"/>
+            <a:ext cx="11277295" cy="3275837"/>
           </a:xfrm>
           <a:prstGeom prst="rect">
             <a:avLst/>
@@ -7876,7 +7952,7 @@
         </p:nvCxnSpPr>
         <p:spPr>
           <a:xfrm>
-            <a:off x="457200" y="4507991"/>
+            <a:off x="457200" y="4190237"/>
             <a:ext cx="11277295" cy="0"/>
           </a:xfrm>
           <a:prstGeom prst="line">
@@ -7911,8 +7987,8 @@
         </p:nvSpPr>
         <p:spPr>
           <a:xfrm>
-            <a:off x="457200" y="4645151"/>
-            <a:ext cx="11277295" cy="685800"/>
+            <a:off x="457200" y="4327397"/>
+            <a:ext cx="11277295" cy="1003553"/>
           </a:xfrm>
           <a:prstGeom prst="roundRect">
             <a:avLst>
@@ -7963,6 +8039,25 @@
                 <a:latin typeface="맑은 고딕"/>
               </a:rPr>
               <a:t>정답:  ③ I studied hard so that I could pass the test.</a:t>
+            </a:r>
+          </a:p>
+          <a:p>
+            <a:pPr algn="ctr">
+              <a:lnSpc>
+                <a:spcPct val="105000"/>
+              </a:lnSpc>
+              <a:spcBef>
+                <a:spcPts val="0"/>
+              </a:spcBef>
+            </a:pPr>
+            <a:r>
+              <a:rPr sz="1300" b="0" i="0" u="none">
+                <a:solidFill>
+                  <a:srgbClr val="1E2A4A"/>
+                </a:solidFill>
+                <a:latin typeface="맑은 고딕"/>
+              </a:rPr>
+              <a:t>나는 시험에 합격하기 위해 열심히 공부했다.</a:t>
             </a:r>
           </a:p>
         </p:txBody>
@@ -8414,7 +8509,7 @@
         <p:spPr>
           <a:xfrm>
             <a:off x="457200" y="868680"/>
-            <a:ext cx="11277295" cy="3593591"/>
+            <a:ext cx="11277295" cy="3275837"/>
           </a:xfrm>
           <a:prstGeom prst="rect">
             <a:avLst/>
@@ -8629,7 +8724,7 @@
         <p:spPr>
           <a:xfrm>
             <a:off x="457200" y="868680"/>
-            <a:ext cx="11277295" cy="3593591"/>
+            <a:ext cx="11277295" cy="3275837"/>
           </a:xfrm>
           <a:prstGeom prst="rect">
             <a:avLst/>
@@ -8848,7 +8943,7 @@
         </p:nvCxnSpPr>
         <p:spPr>
           <a:xfrm>
-            <a:off x="457200" y="4507991"/>
+            <a:off x="457200" y="4190237"/>
             <a:ext cx="11277295" cy="0"/>
           </a:xfrm>
           <a:prstGeom prst="line">
@@ -8883,8 +8978,8 @@
         </p:nvSpPr>
         <p:spPr>
           <a:xfrm>
-            <a:off x="457200" y="4645151"/>
-            <a:ext cx="11277295" cy="685800"/>
+            <a:off x="457200" y="4327397"/>
+            <a:ext cx="11277295" cy="1003553"/>
           </a:xfrm>
           <a:prstGeom prst="roundRect">
             <a:avLst>
@@ -8935,6 +9030,25 @@
                 <a:latin typeface="맑은 고딕"/>
               </a:rPr>
               <a:t>정답:  ② Turn in your report so that I can comment on it.</a:t>
+            </a:r>
+          </a:p>
+          <a:p>
+            <a:pPr algn="ctr">
+              <a:lnSpc>
+                <a:spcPct val="105000"/>
+              </a:lnSpc>
+              <a:spcBef>
+                <a:spcPts val="0"/>
+              </a:spcBef>
+            </a:pPr>
+            <a:r>
+              <a:rPr sz="1300" b="0" i="0" u="none">
+                <a:solidFill>
+                  <a:srgbClr val="1E2A4A"/>
+                </a:solidFill>
+                <a:latin typeface="맑은 고딕"/>
+              </a:rPr>
+              <a:t>제가 코멘트를 할 수 있도록 보고서를 내 주세요.</a:t>
             </a:r>
           </a:p>
         </p:txBody>
@@ -9386,7 +9500,7 @@
         <p:spPr>
           <a:xfrm>
             <a:off x="457200" y="868680"/>
-            <a:ext cx="11277295" cy="3593591"/>
+            <a:ext cx="11277295" cy="3275837"/>
           </a:xfrm>
           <a:prstGeom prst="rect">
             <a:avLst/>
@@ -9601,7 +9715,7 @@
         <p:spPr>
           <a:xfrm>
             <a:off x="457200" y="868680"/>
-            <a:ext cx="11277295" cy="3593591"/>
+            <a:ext cx="11277295" cy="3275837"/>
           </a:xfrm>
           <a:prstGeom prst="rect">
             <a:avLst/>
@@ -9820,7 +9934,7 @@
         </p:nvCxnSpPr>
         <p:spPr>
           <a:xfrm>
-            <a:off x="457200" y="4507991"/>
+            <a:off x="457200" y="4190237"/>
             <a:ext cx="11277295" cy="0"/>
           </a:xfrm>
           <a:prstGeom prst="line">
@@ -9855,8 +9969,8 @@
         </p:nvSpPr>
         <p:spPr>
           <a:xfrm>
-            <a:off x="457200" y="4645151"/>
-            <a:ext cx="11277295" cy="685800"/>
+            <a:off x="457200" y="4327397"/>
+            <a:ext cx="11277295" cy="1003553"/>
           </a:xfrm>
           <a:prstGeom prst="roundRect">
             <a:avLst>
@@ -9907,6 +10021,25 @@
                 <a:latin typeface="맑은 고딕"/>
               </a:rPr>
               <a:t>정답:  ③ Sam woke up early so as not to miss the train. / ⑤ Sam woke up early so that he would not miss the train.</a:t>
+            </a:r>
+          </a:p>
+          <a:p>
+            <a:pPr algn="ctr">
+              <a:lnSpc>
+                <a:spcPct val="105000"/>
+              </a:lnSpc>
+              <a:spcBef>
+                <a:spcPts val="0"/>
+              </a:spcBef>
+            </a:pPr>
+            <a:r>
+              <a:rPr sz="1300" b="0" i="0" u="none">
+                <a:solidFill>
+                  <a:srgbClr val="1E2A4A"/>
+                </a:solidFill>
+                <a:latin typeface="맑은 고딕"/>
+              </a:rPr>
+              <a:t>③ Sam은 기차를 놓치지 않기 위해 일찍 일어났다.  /  ⑤ Sam은 기차를 놓치지 않도록 일찍 일어났다.</a:t>
             </a:r>
           </a:p>
         </p:txBody>
@@ -10358,7 +10491,7 @@
         <p:spPr>
           <a:xfrm>
             <a:off x="457200" y="868680"/>
-            <a:ext cx="11277295" cy="3593591"/>
+            <a:ext cx="11277295" cy="3275837"/>
           </a:xfrm>
           <a:prstGeom prst="rect">
             <a:avLst/>
@@ -10573,7 +10706,7 @@
         <p:spPr>
           <a:xfrm>
             <a:off x="457200" y="868680"/>
-            <a:ext cx="11277295" cy="3593591"/>
+            <a:ext cx="11277295" cy="3275837"/>
           </a:xfrm>
           <a:prstGeom prst="rect">
             <a:avLst/>
@@ -10792,7 +10925,7 @@
         </p:nvCxnSpPr>
         <p:spPr>
           <a:xfrm>
-            <a:off x="457200" y="4507991"/>
+            <a:off x="457200" y="4190237"/>
             <a:ext cx="11277295" cy="0"/>
           </a:xfrm>
           <a:prstGeom prst="line">
@@ -10827,8 +10960,8 @@
         </p:nvSpPr>
         <p:spPr>
           <a:xfrm>
-            <a:off x="457200" y="4645151"/>
-            <a:ext cx="11277295" cy="685800"/>
+            <a:off x="457200" y="4327397"/>
+            <a:ext cx="11277295" cy="1003553"/>
           </a:xfrm>
           <a:prstGeom prst="roundRect">
             <a:avLst>
@@ -10879,6 +11012,25 @@
                 <a:latin typeface="맑은 고딕"/>
               </a:rPr>
               <a:t>정답:  ③ He works hard so that he can support his family.</a:t>
+            </a:r>
+          </a:p>
+          <a:p>
+            <a:pPr algn="ctr">
+              <a:lnSpc>
+                <a:spcPct val="105000"/>
+              </a:lnSpc>
+              <a:spcBef>
+                <a:spcPts val="0"/>
+              </a:spcBef>
+            </a:pPr>
+            <a:r>
+              <a:rPr sz="1300" b="0" i="0" u="none">
+                <a:solidFill>
+                  <a:srgbClr val="1E2A4A"/>
+                </a:solidFill>
+                <a:latin typeface="맑은 고딕"/>
+              </a:rPr>
+              <a:t>그는 가족을 부양하기 위해 열심히 일한다.</a:t>
             </a:r>
           </a:p>
         </p:txBody>
@@ -11330,7 +11482,7 @@
         <p:spPr>
           <a:xfrm>
             <a:off x="457200" y="868680"/>
-            <a:ext cx="11277295" cy="3593591"/>
+            <a:ext cx="11277295" cy="3275837"/>
           </a:xfrm>
           <a:prstGeom prst="rect">
             <a:avLst/>
@@ -11545,7 +11697,7 @@
         <p:spPr>
           <a:xfrm>
             <a:off x="457200" y="868680"/>
-            <a:ext cx="11277295" cy="3593591"/>
+            <a:ext cx="11277295" cy="3275837"/>
           </a:xfrm>
           <a:prstGeom prst="rect">
             <a:avLst/>
@@ -11782,7 +11934,7 @@
         </p:nvCxnSpPr>
         <p:spPr>
           <a:xfrm>
-            <a:off x="457200" y="4507991"/>
+            <a:off x="457200" y="4190237"/>
             <a:ext cx="11277295" cy="0"/>
           </a:xfrm>
           <a:prstGeom prst="line">
@@ -11817,8 +11969,8 @@
         </p:nvSpPr>
         <p:spPr>
           <a:xfrm>
-            <a:off x="457200" y="4645151"/>
-            <a:ext cx="11277295" cy="685800"/>
+            <a:off x="457200" y="4327397"/>
+            <a:ext cx="11277295" cy="1003553"/>
           </a:xfrm>
           <a:prstGeom prst="roundRect">
             <a:avLst>
@@ -11869,6 +12021,25 @@
                 <a:latin typeface="맑은 고딕"/>
               </a:rPr>
               <a:t>정답:  ⑤ we can understand you</a:t>
+            </a:r>
+          </a:p>
+          <a:p>
+            <a:pPr algn="ctr">
+              <a:lnSpc>
+                <a:spcPct val="105000"/>
+              </a:lnSpc>
+              <a:spcBef>
+                <a:spcPts val="0"/>
+              </a:spcBef>
+            </a:pPr>
+            <a:r>
+              <a:rPr sz="1300" b="0" i="0" u="none">
+                <a:solidFill>
+                  <a:srgbClr val="1E2A4A"/>
+                </a:solidFill>
+                <a:latin typeface="맑은 고딕"/>
+              </a:rPr>
+              <a:t>우리가 당신을 이해할 수 있도록 천천히 말해 주세요.</a:t>
             </a:r>
           </a:p>
         </p:txBody>
@@ -12320,7 +12491,7 @@
         <p:spPr>
           <a:xfrm>
             <a:off x="457200" y="868680"/>
-            <a:ext cx="11277295" cy="3593591"/>
+            <a:ext cx="11277295" cy="3275837"/>
           </a:xfrm>
           <a:prstGeom prst="rect">
             <a:avLst/>
@@ -12535,7 +12706,7 @@
         <p:spPr>
           <a:xfrm>
             <a:off x="457200" y="868680"/>
-            <a:ext cx="11277295" cy="3593591"/>
+            <a:ext cx="11277295" cy="3275837"/>
           </a:xfrm>
           <a:prstGeom prst="rect">
             <a:avLst/>
@@ -12772,7 +12943,7 @@
         </p:nvCxnSpPr>
         <p:spPr>
           <a:xfrm>
-            <a:off x="457200" y="4507991"/>
+            <a:off x="457200" y="4190237"/>
             <a:ext cx="11277295" cy="0"/>
           </a:xfrm>
           <a:prstGeom prst="line">
@@ -12807,8 +12978,8 @@
         </p:nvSpPr>
         <p:spPr>
           <a:xfrm>
-            <a:off x="457200" y="4645151"/>
-            <a:ext cx="11277295" cy="685800"/>
+            <a:off x="457200" y="4327397"/>
+            <a:ext cx="11277295" cy="1003553"/>
           </a:xfrm>
           <a:prstGeom prst="roundRect">
             <a:avLst>
@@ -12859,6 +13030,25 @@
                 <a:latin typeface="맑은 고딕"/>
               </a:rPr>
               <a:t>정답:  ④ so that I can help the poor children</a:t>
+            </a:r>
+          </a:p>
+          <a:p>
+            <a:pPr algn="ctr">
+              <a:lnSpc>
+                <a:spcPct val="105000"/>
+              </a:lnSpc>
+              <a:spcBef>
+                <a:spcPts val="0"/>
+              </a:spcBef>
+            </a:pPr>
+            <a:r>
+              <a:rPr sz="1300" b="0" i="0" u="none">
+                <a:solidFill>
+                  <a:srgbClr val="1E2A4A"/>
+                </a:solidFill>
+                <a:latin typeface="맑은 고딕"/>
+              </a:rPr>
+              <a:t>(알맞지 않은 것) 나는 가난한 아이들을 도울 수 있도록 돈을 모았다. (앞 문장의 내용과 맞지 않음)</a:t>
             </a:r>
           </a:p>
         </p:txBody>
@@ -13310,7 +13500,7 @@
         <p:spPr>
           <a:xfrm>
             <a:off x="457200" y="868680"/>
-            <a:ext cx="11277295" cy="3593591"/>
+            <a:ext cx="11277295" cy="3275837"/>
           </a:xfrm>
           <a:prstGeom prst="rect">
             <a:avLst/>
@@ -13547,7 +13737,7 @@
         <p:spPr>
           <a:xfrm>
             <a:off x="457200" y="868680"/>
-            <a:ext cx="11277295" cy="3593591"/>
+            <a:ext cx="11277295" cy="3275837"/>
           </a:xfrm>
           <a:prstGeom prst="rect">
             <a:avLst/>
@@ -13806,7 +13996,7 @@
         </p:nvCxnSpPr>
         <p:spPr>
           <a:xfrm>
-            <a:off x="457200" y="4507991"/>
+            <a:off x="457200" y="4190237"/>
             <a:ext cx="11277295" cy="0"/>
           </a:xfrm>
           <a:prstGeom prst="line">
@@ -13841,8 +14031,8 @@
         </p:nvSpPr>
         <p:spPr>
           <a:xfrm>
-            <a:off x="457200" y="4645151"/>
-            <a:ext cx="11277295" cy="685800"/>
+            <a:off x="457200" y="4327397"/>
+            <a:ext cx="11277295" cy="1003553"/>
           </a:xfrm>
           <a:prstGeom prst="roundRect">
             <a:avLst>
@@ -13893,6 +14083,25 @@
                 <a:latin typeface="맑은 고딕"/>
               </a:rPr>
               <a:t>정답:  ⑤ so that</a:t>
+            </a:r>
+          </a:p>
+          <a:p>
+            <a:pPr algn="ctr">
+              <a:lnSpc>
+                <a:spcPct val="105000"/>
+              </a:lnSpc>
+              <a:spcBef>
+                <a:spcPts val="0"/>
+              </a:spcBef>
+            </a:pPr>
+            <a:r>
+              <a:rPr sz="1300" b="0" i="0" u="none">
+                <a:solidFill>
+                  <a:srgbClr val="1E2A4A"/>
+                </a:solidFill>
+                <a:latin typeface="맑은 고딕"/>
+              </a:rPr>
+              <a:t>건강을 유지하기 위해 매일 운동을 한다. = 그는 건강을 유지할 수 있도록 매일 운동한다.</a:t>
             </a:r>
           </a:p>
         </p:txBody>
@@ -14344,7 +14553,7 @@
         <p:spPr>
           <a:xfrm>
             <a:off x="457200" y="868680"/>
-            <a:ext cx="11277295" cy="3593591"/>
+            <a:ext cx="11277295" cy="3275837"/>
           </a:xfrm>
           <a:prstGeom prst="rect">
             <a:avLst/>
@@ -14559,7 +14768,7 @@
         <p:spPr>
           <a:xfrm>
             <a:off x="457200" y="868680"/>
-            <a:ext cx="11277295" cy="3593591"/>
+            <a:ext cx="11277295" cy="3275837"/>
           </a:xfrm>
           <a:prstGeom prst="rect">
             <a:avLst/>
@@ -14796,7 +15005,7 @@
         </p:nvCxnSpPr>
         <p:spPr>
           <a:xfrm>
-            <a:off x="457200" y="4507991"/>
+            <a:off x="457200" y="4190237"/>
             <a:ext cx="11277295" cy="0"/>
           </a:xfrm>
           <a:prstGeom prst="line">
@@ -14831,8 +15040,8 @@
         </p:nvSpPr>
         <p:spPr>
           <a:xfrm>
-            <a:off x="457200" y="4645151"/>
-            <a:ext cx="11277295" cy="685800"/>
+            <a:off x="457200" y="4327397"/>
+            <a:ext cx="11277295" cy="1003553"/>
           </a:xfrm>
           <a:prstGeom prst="roundRect">
             <a:avLst>
@@ -14883,6 +15092,25 @@
                 <a:latin typeface="맑은 고딕"/>
               </a:rPr>
               <a:t>정답:  ⑤ I could focus on reading</a:t>
+            </a:r>
+          </a:p>
+          <a:p>
+            <a:pPr algn="ctr">
+              <a:lnSpc>
+                <a:spcPct val="105000"/>
+              </a:lnSpc>
+              <a:spcBef>
+                <a:spcPts val="0"/>
+              </a:spcBef>
+            </a:pPr>
+            <a:r>
+              <a:rPr sz="1300" b="0" i="0" u="none">
+                <a:solidFill>
+                  <a:srgbClr val="1E2A4A"/>
+                </a:solidFill>
+                <a:latin typeface="맑은 고딕"/>
+              </a:rPr>
+              <a:t>나는 책 읽기에 집중할 수 있도록 라디오를 껐다.</a:t>
             </a:r>
           </a:p>
         </p:txBody>
@@ -15334,7 +15562,7 @@
         <p:spPr>
           <a:xfrm>
             <a:off x="457200" y="868680"/>
-            <a:ext cx="11277295" cy="3593591"/>
+            <a:ext cx="11277295" cy="3275837"/>
           </a:xfrm>
           <a:prstGeom prst="rect">
             <a:avLst/>
@@ -15571,7 +15799,7 @@
         <p:spPr>
           <a:xfrm>
             <a:off x="457200" y="868680"/>
-            <a:ext cx="11277295" cy="3593591"/>
+            <a:ext cx="11277295" cy="3275837"/>
           </a:xfrm>
           <a:prstGeom prst="rect">
             <a:avLst/>
@@ -15812,7 +16040,7 @@
         </p:nvCxnSpPr>
         <p:spPr>
           <a:xfrm>
-            <a:off x="457200" y="4507991"/>
+            <a:off x="457200" y="4190237"/>
             <a:ext cx="11277295" cy="0"/>
           </a:xfrm>
           <a:prstGeom prst="line">
@@ -15847,8 +16075,8 @@
         </p:nvSpPr>
         <p:spPr>
           <a:xfrm>
-            <a:off x="457200" y="4645151"/>
-            <a:ext cx="11277295" cy="685800"/>
+            <a:off x="457200" y="4327397"/>
+            <a:ext cx="11277295" cy="1003553"/>
           </a:xfrm>
           <a:prstGeom prst="roundRect">
             <a:avLst>
@@ -15899,6 +16127,25 @@
                 <a:latin typeface="맑은 고딕"/>
               </a:rPr>
               <a:t>정답:  ② so as to get a good seat</a:t>
+            </a:r>
+          </a:p>
+          <a:p>
+            <a:pPr algn="ctr">
+              <a:lnSpc>
+                <a:spcPct val="105000"/>
+              </a:lnSpc>
+              <a:spcBef>
+                <a:spcPts val="0"/>
+              </a:spcBef>
+            </a:pPr>
+            <a:r>
+              <a:rPr sz="1300" b="0" i="0" u="none">
+                <a:solidFill>
+                  <a:srgbClr val="1E2A4A"/>
+                </a:solidFill>
+                <a:latin typeface="맑은 고딕"/>
+              </a:rPr>
+              <a:t>그들은 좋은 자리를 잡기 위해 일찍 출발했다.</a:t>
             </a:r>
           </a:p>
         </p:txBody>
@@ -16395,7 +16642,7 @@
         <p:spPr>
           <a:xfrm>
             <a:off x="457200" y="1379982"/>
-            <a:ext cx="8214055" cy="3082289"/>
+            <a:ext cx="8214055" cy="2556509"/>
           </a:xfrm>
           <a:prstGeom prst="rect">
             <a:avLst/>
@@ -16484,7 +16731,7 @@
         <p:spPr>
           <a:xfrm>
             <a:off x="8808415" y="1379982"/>
-            <a:ext cx="2926080" cy="3082289"/>
+            <a:ext cx="2926080" cy="2556509"/>
           </a:xfrm>
           <a:prstGeom prst="roundRect">
             <a:avLst>
@@ -16639,7 +16886,7 @@
         <p:spPr>
           <a:xfrm>
             <a:off x="8808415" y="1379982"/>
-            <a:ext cx="2926080" cy="3082289"/>
+            <a:ext cx="2926080" cy="2556509"/>
           </a:xfrm>
           <a:prstGeom prst="rect">
             <a:avLst/>
@@ -16776,7 +17023,7 @@
         </p:nvCxnSpPr>
         <p:spPr>
           <a:xfrm>
-            <a:off x="457200" y="4507991"/>
+            <a:off x="457200" y="3982211"/>
             <a:ext cx="11277295" cy="0"/>
           </a:xfrm>
           <a:prstGeom prst="line">
@@ -16811,8 +17058,8 @@
         </p:nvSpPr>
         <p:spPr>
           <a:xfrm>
-            <a:off x="457200" y="4645151"/>
-            <a:ext cx="11277295" cy="685800"/>
+            <a:off x="457200" y="4119371"/>
+            <a:ext cx="11277295" cy="1211580"/>
           </a:xfrm>
           <a:prstGeom prst="roundRect">
             <a:avLst>
@@ -16863,6 +17110,25 @@
                 <a:latin typeface="맑은 고딕"/>
               </a:rPr>
               <a:t>정답:  ③ (C) could</a:t>
+            </a:r>
+          </a:p>
+          <a:p>
+            <a:pPr algn="ctr">
+              <a:lnSpc>
+                <a:spcPct val="105000"/>
+              </a:lnSpc>
+              <a:spcBef>
+                <a:spcPts val="0"/>
+              </a:spcBef>
+            </a:pPr>
+            <a:r>
+              <a:rPr sz="1300" b="0" i="0" u="none">
+                <a:solidFill>
+                  <a:srgbClr val="1E2A4A"/>
+                </a:solidFill>
+                <a:latin typeface="맑은 고딕"/>
+              </a:rPr>
+              <a:t>(C) could → can  /  Andy는 일찍 일어날 수 있도록 일찍 잤다. / 네가 나를 찾을 수 있도록 나는 여기서 기다릴게. / 벨은 사람들이 서로 다른 곳에서 대화할 수 있도록 전화기를 발명했다.</a:t>
             </a:r>
           </a:p>
         </p:txBody>
@@ -17314,7 +17580,7 @@
         <p:spPr>
           <a:xfrm>
             <a:off x="457200" y="868680"/>
-            <a:ext cx="11277295" cy="3593591"/>
+            <a:ext cx="11277295" cy="3275837"/>
           </a:xfrm>
           <a:prstGeom prst="rect">
             <a:avLst/>
@@ -17529,7 +17795,7 @@
         <p:spPr>
           <a:xfrm>
             <a:off x="457200" y="868680"/>
-            <a:ext cx="11277295" cy="3593591"/>
+            <a:ext cx="11277295" cy="3275837"/>
           </a:xfrm>
           <a:prstGeom prst="rect">
             <a:avLst/>
@@ -17748,7 +18014,7 @@
         </p:nvCxnSpPr>
         <p:spPr>
           <a:xfrm>
-            <a:off x="457200" y="4507991"/>
+            <a:off x="457200" y="4190237"/>
             <a:ext cx="11277295" cy="0"/>
           </a:xfrm>
           <a:prstGeom prst="line">
@@ -17783,8 +18049,8 @@
         </p:nvSpPr>
         <p:spPr>
           <a:xfrm>
-            <a:off x="457200" y="4645151"/>
-            <a:ext cx="11277295" cy="685800"/>
+            <a:off x="457200" y="4327397"/>
+            <a:ext cx="11277295" cy="1003553"/>
           </a:xfrm>
           <a:prstGeom prst="roundRect">
             <a:avLst>
@@ -17835,6 +18101,25 @@
                 <a:latin typeface="맑은 고딕"/>
               </a:rPr>
               <a:t>정답:  ⑤ We'll do our best so that we can win the game.</a:t>
+            </a:r>
+          </a:p>
+          <a:p>
+            <a:pPr algn="ctr">
+              <a:lnSpc>
+                <a:spcPct val="105000"/>
+              </a:lnSpc>
+              <a:spcBef>
+                <a:spcPts val="0"/>
+              </a:spcBef>
+            </a:pPr>
+            <a:r>
+              <a:rPr sz="1300" b="0" i="0" u="none">
+                <a:solidFill>
+                  <a:srgbClr val="1E2A4A"/>
+                </a:solidFill>
+                <a:latin typeface="맑은 고딕"/>
+              </a:rPr>
+              <a:t>우리는 게임에서 이기기 위해 최선을 다할 것이다.</a:t>
             </a:r>
           </a:p>
         </p:txBody>
@@ -18286,7 +18571,7 @@
         <p:spPr>
           <a:xfrm>
             <a:off x="457200" y="868680"/>
-            <a:ext cx="11277295" cy="3593591"/>
+            <a:ext cx="11277295" cy="3275837"/>
           </a:xfrm>
           <a:prstGeom prst="rect">
             <a:avLst/>
@@ -18501,7 +18786,7 @@
         <p:spPr>
           <a:xfrm>
             <a:off x="457200" y="868680"/>
-            <a:ext cx="11277295" cy="3593591"/>
+            <a:ext cx="11277295" cy="3275837"/>
           </a:xfrm>
           <a:prstGeom prst="rect">
             <a:avLst/>
@@ -18720,7 +19005,7 @@
         </p:nvCxnSpPr>
         <p:spPr>
           <a:xfrm>
-            <a:off x="457200" y="4507991"/>
+            <a:off x="457200" y="4190237"/>
             <a:ext cx="11277295" cy="0"/>
           </a:xfrm>
           <a:prstGeom prst="line">
@@ -18755,8 +19040,8 @@
         </p:nvSpPr>
         <p:spPr>
           <a:xfrm>
-            <a:off x="457200" y="4645151"/>
-            <a:ext cx="11277295" cy="685800"/>
+            <a:off x="457200" y="4327397"/>
+            <a:ext cx="11277295" cy="1003553"/>
           </a:xfrm>
           <a:prstGeom prst="roundRect">
             <a:avLst>
@@ -18807,6 +19092,25 @@
                 <a:latin typeface="맑은 고딕"/>
               </a:rPr>
               <a:t>정답:  ④ She studied hard so as to pass the exam.</a:t>
+            </a:r>
+          </a:p>
+          <a:p>
+            <a:pPr algn="ctr">
+              <a:lnSpc>
+                <a:spcPct val="105000"/>
+              </a:lnSpc>
+              <a:spcBef>
+                <a:spcPts val="0"/>
+              </a:spcBef>
+            </a:pPr>
+            <a:r>
+              <a:rPr sz="1300" b="0" i="0" u="none">
+                <a:solidFill>
+                  <a:srgbClr val="1E2A4A"/>
+                </a:solidFill>
+                <a:latin typeface="맑은 고딕"/>
+              </a:rPr>
+              <a:t>그녀는 시험에 통과하기 위해 열심히 공부했다.</a:t>
             </a:r>
           </a:p>
         </p:txBody>
@@ -19258,7 +19562,7 @@
         <p:spPr>
           <a:xfrm>
             <a:off x="457200" y="868680"/>
-            <a:ext cx="11277295" cy="3593591"/>
+            <a:ext cx="11277295" cy="3275837"/>
           </a:xfrm>
           <a:prstGeom prst="rect">
             <a:avLst/>
@@ -19495,7 +19799,7 @@
         <p:spPr>
           <a:xfrm>
             <a:off x="457200" y="868680"/>
-            <a:ext cx="11277295" cy="3593591"/>
+            <a:ext cx="11277295" cy="3275837"/>
           </a:xfrm>
           <a:prstGeom prst="rect">
             <a:avLst/>
@@ -19736,7 +20040,7 @@
         </p:nvCxnSpPr>
         <p:spPr>
           <a:xfrm>
-            <a:off x="457200" y="4507991"/>
+            <a:off x="457200" y="4190237"/>
             <a:ext cx="11277295" cy="0"/>
           </a:xfrm>
           <a:prstGeom prst="line">
@@ -19771,8 +20075,8 @@
         </p:nvSpPr>
         <p:spPr>
           <a:xfrm>
-            <a:off x="457200" y="4645151"/>
-            <a:ext cx="11277295" cy="685800"/>
+            <a:off x="457200" y="4327397"/>
+            <a:ext cx="11277295" cy="1003553"/>
           </a:xfrm>
           <a:prstGeom prst="roundRect">
             <a:avLst>
@@ -19823,6 +20127,25 @@
                 <a:latin typeface="맑은 고딕"/>
               </a:rPr>
               <a:t>정답:  ④ I go jogging every morning enough to keep healthy.</a:t>
+            </a:r>
+          </a:p>
+          <a:p>
+            <a:pPr algn="ctr">
+              <a:lnSpc>
+                <a:spcPct val="105000"/>
+              </a:lnSpc>
+              <a:spcBef>
+                <a:spcPts val="0"/>
+              </a:spcBef>
+            </a:pPr>
+            <a:r>
+              <a:rPr sz="1300" b="0" i="0" u="none">
+                <a:solidFill>
+                  <a:srgbClr val="1E2A4A"/>
+                </a:solidFill>
+                <a:latin typeface="맑은 고딕"/>
+              </a:rPr>
+              <a:t>나는 건강을 유지하기 위해 매일 아침 조깅을 한다. (④는 의미가 다름)</a:t>
             </a:r>
           </a:p>
         </p:txBody>
@@ -20274,7 +20597,7 @@
         <p:spPr>
           <a:xfrm>
             <a:off x="457200" y="868680"/>
-            <a:ext cx="11277295" cy="431292"/>
+            <a:ext cx="11277295" cy="415289"/>
           </a:xfrm>
           <a:prstGeom prst="rect">
             <a:avLst/>
@@ -20299,7 +20622,7 @@
               </a:spcAft>
             </a:pPr>
             <a:r>
-              <a:rPr sz="1600" b="1" i="0" u="none">
+              <a:rPr sz="1500" b="1" i="0" u="none">
                 <a:solidFill>
                   <a:srgbClr val="1E2A4A"/>
                 </a:solidFill>
@@ -20318,8 +20641,8 @@
         </p:nvSpPr>
         <p:spPr>
           <a:xfrm>
-            <a:off x="457200" y="1299972"/>
-            <a:ext cx="8214055" cy="3162299"/>
+            <a:off x="457200" y="1283970"/>
+            <a:ext cx="8214055" cy="2444495"/>
           </a:xfrm>
           <a:prstGeom prst="rect">
             <a:avLst/>
@@ -20344,7 +20667,7 @@
               </a:spcAft>
             </a:pPr>
             <a:r>
-              <a:rPr sz="1500" b="0" i="0" u="none">
+              <a:rPr sz="1400" b="0" i="0" u="none">
                 <a:solidFill>
                   <a:srgbClr val="222222"/>
                 </a:solidFill>
@@ -20366,7 +20689,7 @@
               </a:spcAft>
             </a:pPr>
             <a:r>
-              <a:rPr sz="1500" b="0" i="0" u="none">
+              <a:rPr sz="1400" b="0" i="0" u="none">
                 <a:solidFill>
                   <a:srgbClr val="222222"/>
                 </a:solidFill>
@@ -20388,7 +20711,7 @@
               </a:spcAft>
             </a:pPr>
             <a:r>
-              <a:rPr sz="1500" b="0" i="0" u="none">
+              <a:rPr sz="1400" b="0" i="0" u="none">
                 <a:solidFill>
                   <a:srgbClr val="222222"/>
                 </a:solidFill>
@@ -20410,7 +20733,7 @@
               </a:spcAft>
             </a:pPr>
             <a:r>
-              <a:rPr sz="1500" b="0" i="0" u="none">
+              <a:rPr sz="1400" b="0" i="0" u="none">
                 <a:solidFill>
                   <a:srgbClr val="222222"/>
                 </a:solidFill>
@@ -20432,7 +20755,7 @@
               </a:spcAft>
             </a:pPr>
             <a:r>
-              <a:rPr sz="1500" b="0" i="0" u="none">
+              <a:rPr sz="1400" b="0" i="0" u="none">
                 <a:solidFill>
                   <a:srgbClr val="222222"/>
                 </a:solidFill>
@@ -20454,7 +20777,7 @@
               </a:spcAft>
             </a:pPr>
             <a:r>
-              <a:rPr sz="1500" b="0" i="0" u="none">
+              <a:rPr sz="1400" b="0" i="0" u="none">
                 <a:solidFill>
                   <a:srgbClr val="222222"/>
                 </a:solidFill>
@@ -20476,7 +20799,7 @@
               </a:spcAft>
             </a:pPr>
             <a:r>
-              <a:rPr sz="1500" b="0" i="0" u="none">
+              <a:rPr sz="1400" b="0" i="0" u="none">
                 <a:solidFill>
                   <a:srgbClr val="222222"/>
                 </a:solidFill>
@@ -20498,7 +20821,7 @@
               </a:spcAft>
             </a:pPr>
             <a:r>
-              <a:rPr sz="1500" b="0" i="0" u="none">
+              <a:rPr sz="1400" b="0" i="0" u="none">
                 <a:solidFill>
                   <a:srgbClr val="222222"/>
                 </a:solidFill>
@@ -20520,7 +20843,7 @@
               </a:spcAft>
             </a:pPr>
             <a:r>
-              <a:rPr sz="1500" b="0" i="0" u="none">
+              <a:rPr sz="1400" b="0" i="0" u="none">
                 <a:solidFill>
                   <a:srgbClr val="222222"/>
                 </a:solidFill>
@@ -20539,8 +20862,8 @@
         </p:nvSpPr>
         <p:spPr>
           <a:xfrm>
-            <a:off x="8808415" y="1299972"/>
-            <a:ext cx="2926080" cy="3162299"/>
+            <a:off x="8808415" y="1283970"/>
+            <a:ext cx="2926080" cy="2444495"/>
           </a:xfrm>
           <a:prstGeom prst="roundRect">
             <a:avLst>
@@ -20587,7 +20910,7 @@
               </a:spcAft>
             </a:pPr>
             <a:r>
-              <a:rPr sz="1500" b="0" i="0" u="none">
+              <a:rPr sz="1400" b="0" i="0" u="none">
                 <a:solidFill>
                   <a:srgbClr val="222222"/>
                 </a:solidFill>
@@ -20609,7 +20932,7 @@
               </a:spcAft>
             </a:pPr>
             <a:r>
-              <a:rPr sz="1500" b="0" i="0" u="none">
+              <a:rPr sz="1400" b="0" i="0" u="none">
                 <a:solidFill>
                   <a:srgbClr val="222222"/>
                 </a:solidFill>
@@ -20631,7 +20954,7 @@
               </a:spcAft>
             </a:pPr>
             <a:r>
-              <a:rPr sz="1500" b="0" i="0" u="none">
+              <a:rPr sz="1400" b="0" i="0" u="none">
                 <a:solidFill>
                   <a:srgbClr val="222222"/>
                 </a:solidFill>
@@ -20653,7 +20976,7 @@
               </a:spcAft>
             </a:pPr>
             <a:r>
-              <a:rPr sz="1500" b="0" i="0" u="none">
+              <a:rPr sz="1400" b="0" i="0" u="none">
                 <a:solidFill>
                   <a:srgbClr val="222222"/>
                 </a:solidFill>
@@ -20675,7 +20998,7 @@
               </a:spcAft>
             </a:pPr>
             <a:r>
-              <a:rPr sz="1500" b="0" i="0" u="none">
+              <a:rPr sz="1400" b="0" i="0" u="none">
                 <a:solidFill>
                   <a:srgbClr val="222222"/>
                 </a:solidFill>
@@ -20694,8 +21017,8 @@
         </p:nvSpPr>
         <p:spPr>
           <a:xfrm>
-            <a:off x="8808415" y="1299972"/>
-            <a:ext cx="2926080" cy="3162299"/>
+            <a:off x="8808415" y="1283970"/>
+            <a:ext cx="2926080" cy="2444495"/>
           </a:xfrm>
           <a:prstGeom prst="rect">
             <a:avLst/>
@@ -20725,7 +21048,7 @@
               </a:spcAft>
             </a:pPr>
             <a:r>
-              <a:rPr sz="1500" b="0" i="0" u="none">
+              <a:rPr sz="1400" b="0" i="0" u="none">
                 <a:solidFill>
                   <a:srgbClr val="222222"/>
                 </a:solidFill>
@@ -20747,7 +21070,7 @@
               </a:spcAft>
             </a:pPr>
             <a:r>
-              <a:rPr sz="1500" b="0" i="0" u="none">
+              <a:rPr sz="1400" b="0" i="0" u="none">
                 <a:solidFill>
                   <a:srgbClr val="222222"/>
                 </a:solidFill>
@@ -20769,7 +21092,7 @@
               </a:spcAft>
             </a:pPr>
             <a:r>
-              <a:rPr sz="1500" b="0" i="0" u="none">
+              <a:rPr sz="1400" b="0" i="0" u="none">
                 <a:solidFill>
                   <a:srgbClr val="222222"/>
                 </a:solidFill>
@@ -20791,7 +21114,7 @@
               </a:spcAft>
             </a:pPr>
             <a:r>
-              <a:rPr sz="1500" b="1" i="0" u="none">
+              <a:rPr sz="1400" b="1" i="0" u="none">
                 <a:solidFill>
                   <a:srgbClr val="C03A2E"/>
                 </a:solidFill>
@@ -20813,7 +21136,7 @@
               </a:spcAft>
             </a:pPr>
             <a:r>
-              <a:rPr sz="1500" b="0" i="0" u="none">
+              <a:rPr sz="1400" b="0" i="0" u="none">
                 <a:solidFill>
                   <a:srgbClr val="222222"/>
                 </a:solidFill>
@@ -20832,7 +21155,7 @@
         </p:nvCxnSpPr>
         <p:spPr>
           <a:xfrm>
-            <a:off x="457200" y="4507991"/>
+            <a:off x="457200" y="3774185"/>
             <a:ext cx="11277295" cy="0"/>
           </a:xfrm>
           <a:prstGeom prst="line">
@@ -20867,8 +21190,8 @@
         </p:nvSpPr>
         <p:spPr>
           <a:xfrm>
-            <a:off x="457200" y="4645151"/>
-            <a:ext cx="11277295" cy="685800"/>
+            <a:off x="457200" y="3911345"/>
+            <a:ext cx="11277295" cy="1419606"/>
           </a:xfrm>
           <a:prstGeom prst="roundRect">
             <a:avLst>
@@ -20919,6 +21242,25 @@
                 <a:latin typeface="맑은 고딕"/>
               </a:rPr>
               <a:t>정답:  ④ (C), (A), (B), (D)</a:t>
+            </a:r>
+          </a:p>
+          <a:p>
+            <a:pPr algn="ctr">
+              <a:lnSpc>
+                <a:spcPct val="105000"/>
+              </a:lnSpc>
+              <a:spcBef>
+                <a:spcPts val="0"/>
+              </a:spcBef>
+            </a:pPr>
+            <a:r>
+              <a:rPr sz="1300" b="0" i="0" u="none">
+                <a:solidFill>
+                  <a:srgbClr val="1E2A4A"/>
+                </a:solidFill>
+                <a:latin typeface="맑은 고딕"/>
+              </a:rPr>
+              <a:t>Jenny는 자전거를 고칠 수 있도록 돈을 모으고 있다. 그는 듣기 실력을 향상시킬 수 있도록 미국 영화를 본다. 그는 아무도 그를 볼 수 없도록 뒷문으로 나갔다. 그녀는 미술을 공부할 수 있도록 해외로 갈 것이다.</a:t>
             </a:r>
           </a:p>
         </p:txBody>
@@ -21370,7 +21712,7 @@
         <p:spPr>
           <a:xfrm>
             <a:off x="457200" y="868680"/>
-            <a:ext cx="11277295" cy="3593591"/>
+            <a:ext cx="11277295" cy="431292"/>
           </a:xfrm>
           <a:prstGeom prst="rect">
             <a:avLst/>
@@ -21395,298 +21737,328 @@
               </a:spcAft>
             </a:pPr>
             <a:r>
-              <a:rPr sz="1500" b="1" i="0" u="none">
+              <a:rPr sz="1600" b="1" i="0" u="none">
                 <a:solidFill>
                   <a:srgbClr val="1E2A4A"/>
                 </a:solidFill>
                 <a:latin typeface="맑은 고딕"/>
               </a:rPr>
               <a:t>다음 글의 밑줄 친 우리말을 바르게 영작한 것은?</a:t>
-            </a:r>
-          </a:p>
-          <a:p>
-            <a:pPr algn="l">
-              <a:lnSpc>
-                <a:spcPct val="105000"/>
-              </a:lnSpc>
-              <a:spcBef>
-                <a:spcPts val="0"/>
-              </a:spcBef>
-            </a:pPr>
-            <a:r>
-              <a:rPr sz="600" b="0" i="0" u="none">
-                <a:solidFill>
-                  <a:srgbClr val="555555"/>
-                </a:solidFill>
-                <a:latin typeface="맑은 고딕"/>
-              </a:rPr>
-              <a:t> </a:t>
-            </a:r>
-          </a:p>
-          <a:p>
-            <a:pPr algn="l" marL="228600">
-              <a:lnSpc>
-                <a:spcPct val="105000"/>
-              </a:lnSpc>
-              <a:spcBef>
-                <a:spcPts val="0"/>
-              </a:spcBef>
-              <a:spcAft>
-                <a:spcPts val="200"/>
-              </a:spcAft>
-            </a:pPr>
-            <a:r>
-              <a:rPr sz="1400" b="0" i="0" u="none">
-                <a:solidFill>
-                  <a:srgbClr val="222222"/>
-                </a:solidFill>
-                <a:latin typeface="맑은 고딕"/>
-              </a:rPr>
-              <a:t>Hi, David</a:t>
-            </a:r>
-          </a:p>
-          <a:p>
-            <a:pPr algn="l" marL="228600">
-              <a:lnSpc>
-                <a:spcPct val="105000"/>
-              </a:lnSpc>
-              <a:spcBef>
-                <a:spcPts val="0"/>
-              </a:spcBef>
-              <a:spcAft>
-                <a:spcPts val="200"/>
-              </a:spcAft>
-            </a:pPr>
-            <a:r>
-              <a:rPr sz="1400" b="0" i="0" u="none">
-                <a:solidFill>
-                  <a:srgbClr val="222222"/>
-                </a:solidFill>
-                <a:latin typeface="맑은 고딕"/>
-              </a:rPr>
-              <a:t>How's your new school? Yesterday was our Sports Day. Tom and I entered "Egg and Spoon Race", but we dropped our eggs during the race.</a:t>
-            </a:r>
-          </a:p>
-          <a:p>
-            <a:pPr algn="l" marL="228600">
-              <a:lnSpc>
-                <a:spcPct val="105000"/>
-              </a:lnSpc>
-              <a:spcBef>
-                <a:spcPts val="0"/>
-              </a:spcBef>
-              <a:spcAft>
-                <a:spcPts val="200"/>
-              </a:spcAft>
-            </a:pPr>
-            <a:r>
-              <a:rPr sz="1400" b="0" i="0" u="none">
-                <a:solidFill>
-                  <a:srgbClr val="222222"/>
-                </a:solidFill>
-                <a:latin typeface="맑은 고딕"/>
-              </a:rPr>
-              <a:t>소윤이는 계란을 떨어트리지 않기 위해 매우 조심했다.</a:t>
-            </a:r>
-          </a:p>
-          <a:p>
-            <a:pPr algn="l" marL="228600">
-              <a:lnSpc>
-                <a:spcPct val="105000"/>
-              </a:lnSpc>
-              <a:spcBef>
-                <a:spcPts val="0"/>
-              </a:spcBef>
-              <a:spcAft>
-                <a:spcPts val="200"/>
-              </a:spcAft>
-            </a:pPr>
-            <a:r>
-              <a:rPr sz="1400" b="0" i="0" u="none">
-                <a:solidFill>
-                  <a:srgbClr val="222222"/>
-                </a:solidFill>
-                <a:latin typeface="맑은 고딕"/>
-              </a:rPr>
-              <a:t>She did it. Please tell me about your school. I miss you so much.</a:t>
-            </a:r>
-          </a:p>
-          <a:p>
-            <a:pPr algn="l" marL="228600">
-              <a:lnSpc>
-                <a:spcPct val="105000"/>
-              </a:lnSpc>
-              <a:spcBef>
-                <a:spcPts val="0"/>
-              </a:spcBef>
-              <a:spcAft>
-                <a:spcPts val="200"/>
-              </a:spcAft>
-            </a:pPr>
-            <a:r>
-              <a:rPr sz="1400" b="0" i="0" u="none">
-                <a:solidFill>
-                  <a:srgbClr val="222222"/>
-                </a:solidFill>
-                <a:latin typeface="맑은 고딕"/>
-              </a:rPr>
-              <a:t>Your friend, Alice</a:t>
-            </a:r>
-          </a:p>
-          <a:p>
-            <a:pPr algn="l">
-              <a:lnSpc>
-                <a:spcPct val="105000"/>
-              </a:lnSpc>
-              <a:spcBef>
-                <a:spcPts val="0"/>
-              </a:spcBef>
-            </a:pPr>
-            <a:r>
-              <a:rPr sz="800" b="0" i="0" u="none">
-                <a:solidFill>
-                  <a:srgbClr val="555555"/>
-                </a:solidFill>
-                <a:latin typeface="맑은 고딕"/>
-              </a:rPr>
-              <a:t> </a:t>
-            </a:r>
-          </a:p>
-          <a:p>
-            <a:pPr algn="l">
-              <a:lnSpc>
-                <a:spcPct val="105000"/>
-              </a:lnSpc>
-              <a:spcBef>
-                <a:spcPts val="0"/>
-              </a:spcBef>
-              <a:spcAft>
-                <a:spcPts val="300"/>
-              </a:spcAft>
-            </a:pPr>
-            <a:r>
-              <a:rPr sz="1400" b="0" i="0" u="none">
-                <a:solidFill>
-                  <a:srgbClr val="222222"/>
-                </a:solidFill>
-                <a:latin typeface="맑은 고딕"/>
-              </a:rPr>
-              <a:t>① Soyun was so careful and she wouldn't drop the egg.</a:t>
-            </a:r>
-          </a:p>
-          <a:p>
-            <a:pPr algn="l">
-              <a:lnSpc>
-                <a:spcPct val="105000"/>
-              </a:lnSpc>
-              <a:spcBef>
-                <a:spcPts val="0"/>
-              </a:spcBef>
-              <a:spcAft>
-                <a:spcPts val="300"/>
-              </a:spcAft>
-            </a:pPr>
-            <a:r>
-              <a:rPr sz="1400" b="0" i="0" u="none">
-                <a:solidFill>
-                  <a:srgbClr val="222222"/>
-                </a:solidFill>
-                <a:latin typeface="맑은 고딕"/>
-              </a:rPr>
-              <a:t>② Soyun was so careful but she wouldn't drop the egg.</a:t>
-            </a:r>
-          </a:p>
-          <a:p>
-            <a:pPr algn="l">
-              <a:lnSpc>
-                <a:spcPct val="105000"/>
-              </a:lnSpc>
-              <a:spcBef>
-                <a:spcPts val="0"/>
-              </a:spcBef>
-              <a:spcAft>
-                <a:spcPts val="300"/>
-              </a:spcAft>
-            </a:pPr>
-            <a:r>
-              <a:rPr sz="1400" b="0" i="0" u="none">
-                <a:solidFill>
-                  <a:srgbClr val="222222"/>
-                </a:solidFill>
-                <a:latin typeface="맑은 고딕"/>
-              </a:rPr>
-              <a:t>③ Soyun was very careful so that she would drop the egg.</a:t>
-            </a:r>
-          </a:p>
-          <a:p>
-            <a:pPr algn="l">
-              <a:lnSpc>
-                <a:spcPct val="105000"/>
-              </a:lnSpc>
-              <a:spcBef>
-                <a:spcPts val="0"/>
-              </a:spcBef>
-              <a:spcAft>
-                <a:spcPts val="300"/>
-              </a:spcAft>
-            </a:pPr>
-            <a:r>
-              <a:rPr sz="1400" b="0" i="0" u="none">
-                <a:solidFill>
-                  <a:srgbClr val="222222"/>
-                </a:solidFill>
-                <a:latin typeface="맑은 고딕"/>
-              </a:rPr>
-              <a:t>④ Soyun was so careful that she wouldn't drop the egg.</a:t>
-            </a:r>
-          </a:p>
-          <a:p>
-            <a:pPr algn="l">
-              <a:lnSpc>
-                <a:spcPct val="105000"/>
-              </a:lnSpc>
-              <a:spcBef>
-                <a:spcPts val="0"/>
-              </a:spcBef>
-              <a:spcAft>
-                <a:spcPts val="300"/>
-              </a:spcAft>
-            </a:pPr>
-            <a:r>
-              <a:rPr sz="1400" b="0" i="0" u="none">
-                <a:solidFill>
-                  <a:srgbClr val="222222"/>
-                </a:solidFill>
-                <a:latin typeface="맑은 고딕"/>
-              </a:rPr>
-              <a:t>⑤ Soyun was very careful so that she wouldn't drop the egg.</a:t>
             </a:r>
           </a:p>
         </p:txBody>
       </p:sp>
       <p:sp>
         <p:nvSpPr>
-          <p:cNvPr id="7" name="reveal_1_en_ov"/>
+          <p:cNvPr id="7" name="TextBox 6"/>
           <p:cNvSpPr txBox="1"/>
           <p:nvPr/>
         </p:nvSpPr>
         <p:spPr>
           <a:xfrm>
-            <a:off x="457200" y="868680"/>
-            <a:ext cx="11277295" cy="3593591"/>
+            <a:off x="457200" y="1299972"/>
+            <a:ext cx="6705295" cy="2844545"/>
+          </a:xfrm>
+          <a:prstGeom prst="rect">
+            <a:avLst/>
+          </a:prstGeom>
+          <a:noFill/>
+        </p:spPr>
+        <p:txBody>
+          <a:bodyPr wrap="square" anchor="t" lIns="73152" rIns="73152">
+            <a:spAutoFit/>
+          </a:bodyPr>
+          <a:lstStyle/>
+          <a:p>
+            <a:pPr algn="l" marL="228600">
+              <a:lnSpc>
+                <a:spcPct val="105000"/>
+              </a:lnSpc>
+              <a:spcBef>
+                <a:spcPts val="0"/>
+              </a:spcBef>
+              <a:spcAft>
+                <a:spcPts val="200"/>
+              </a:spcAft>
+            </a:pPr>
+            <a:r>
+              <a:rPr sz="1500" b="0" i="0" u="none">
+                <a:solidFill>
+                  <a:srgbClr val="222222"/>
+                </a:solidFill>
+                <a:latin typeface="맑은 고딕"/>
+              </a:rPr>
+              <a:t>Hi, David</a:t>
+            </a:r>
+          </a:p>
+          <a:p>
+            <a:pPr algn="l" marL="228600">
+              <a:lnSpc>
+                <a:spcPct val="105000"/>
+              </a:lnSpc>
+              <a:spcBef>
+                <a:spcPts val="0"/>
+              </a:spcBef>
+              <a:spcAft>
+                <a:spcPts val="200"/>
+              </a:spcAft>
+            </a:pPr>
+            <a:r>
+              <a:rPr sz="1500" b="0" i="0" u="none">
+                <a:solidFill>
+                  <a:srgbClr val="222222"/>
+                </a:solidFill>
+                <a:latin typeface="맑은 고딕"/>
+              </a:rPr>
+              <a:t>How's your new school? Yesterday was our Sports Day. Tom and I entered "Egg and Spoon Race", but we dropped our eggs during the race.</a:t>
+            </a:r>
+          </a:p>
+          <a:p>
+            <a:pPr algn="l" marL="228600">
+              <a:lnSpc>
+                <a:spcPct val="105000"/>
+              </a:lnSpc>
+              <a:spcBef>
+                <a:spcPts val="0"/>
+              </a:spcBef>
+              <a:spcAft>
+                <a:spcPts val="200"/>
+              </a:spcAft>
+            </a:pPr>
+            <a:r>
+              <a:rPr sz="1500" b="0" i="0" u="none">
+                <a:solidFill>
+                  <a:srgbClr val="222222"/>
+                </a:solidFill>
+                <a:latin typeface="맑은 고딕"/>
+              </a:rPr>
+              <a:t>소윤이는 계란을 떨어트리지 않기 위해 매우 조심했다.</a:t>
+            </a:r>
+          </a:p>
+          <a:p>
+            <a:pPr algn="l" marL="228600">
+              <a:lnSpc>
+                <a:spcPct val="105000"/>
+              </a:lnSpc>
+              <a:spcBef>
+                <a:spcPts val="0"/>
+              </a:spcBef>
+              <a:spcAft>
+                <a:spcPts val="200"/>
+              </a:spcAft>
+            </a:pPr>
+            <a:r>
+              <a:rPr sz="1500" b="0" i="0" u="none">
+                <a:solidFill>
+                  <a:srgbClr val="222222"/>
+                </a:solidFill>
+                <a:latin typeface="맑은 고딕"/>
+              </a:rPr>
+              <a:t>She did it. Please tell me about your school. I miss you so much.</a:t>
+            </a:r>
+          </a:p>
+          <a:p>
+            <a:pPr algn="l" marL="228600">
+              <a:lnSpc>
+                <a:spcPct val="105000"/>
+              </a:lnSpc>
+              <a:spcBef>
+                <a:spcPts val="0"/>
+              </a:spcBef>
+              <a:spcAft>
+                <a:spcPts val="200"/>
+              </a:spcAft>
+            </a:pPr>
+            <a:r>
+              <a:rPr sz="1500" b="0" i="0" u="none">
+                <a:solidFill>
+                  <a:srgbClr val="222222"/>
+                </a:solidFill>
+                <a:latin typeface="맑은 고딕"/>
+              </a:rPr>
+              <a:t>Your friend, Alice</a:t>
+            </a:r>
+          </a:p>
+        </p:txBody>
+      </p:sp>
+      <p:sp>
+        <p:nvSpPr>
+          <p:cNvPr id="8" name="Rounded Rectangle 7"/>
+          <p:cNvSpPr/>
+          <p:nvPr/>
+        </p:nvSpPr>
+        <p:spPr>
+          <a:xfrm>
+            <a:off x="7299655" y="1299972"/>
+            <a:ext cx="4434840" cy="2844545"/>
+          </a:xfrm>
+          <a:prstGeom prst="roundRect">
+            <a:avLst>
+              <a:gd name="adj" fmla="val 6000"/>
+            </a:avLst>
+          </a:prstGeom>
+          <a:solidFill>
+            <a:srgbClr val="F2F3F5"/>
+          </a:solidFill>
+          <a:ln w="15875">
+            <a:solidFill>
+              <a:srgbClr val="F2F3F5"/>
+            </a:solidFill>
+          </a:ln>
+          <a:effectLst/>
+        </p:spPr>
+        <p:style>
+          <a:lnRef idx="1">
+            <a:schemeClr val="accent1"/>
+          </a:lnRef>
+          <a:fillRef idx="3">
+            <a:schemeClr val="accent1"/>
+          </a:fillRef>
+          <a:effectRef idx="2">
+            <a:schemeClr val="accent1"/>
+          </a:effectRef>
+          <a:fontRef idx="minor">
+            <a:schemeClr val="lt1"/>
+          </a:fontRef>
+        </p:style>
+        <p:txBody>
+          <a:bodyPr rtlCol="0" anchor="t" wrap="square" lIns="73152" rIns="73152" tIns="73152"/>
+          <a:lstStyle/>
+          <a:p>
+            <a:pPr algn="l">
+              <a:lnSpc>
+                <a:spcPct val="105000"/>
+              </a:lnSpc>
+              <a:spcBef>
+                <a:spcPts val="0"/>
+              </a:spcBef>
+              <a:spcAft>
+                <a:spcPts val="300"/>
+              </a:spcAft>
+            </a:pPr>
+            <a:r>
+              <a:rPr sz="1500" b="0" i="0" u="none">
+                <a:solidFill>
+                  <a:srgbClr val="222222"/>
+                </a:solidFill>
+                <a:latin typeface="맑은 고딕"/>
+              </a:rPr>
+              <a:t>① Soyun was so careful and she wouldn't drop the egg.</a:t>
+            </a:r>
+          </a:p>
+          <a:p>
+            <a:pPr algn="l">
+              <a:lnSpc>
+                <a:spcPct val="105000"/>
+              </a:lnSpc>
+              <a:spcBef>
+                <a:spcPts val="0"/>
+              </a:spcBef>
+              <a:spcAft>
+                <a:spcPts val="300"/>
+              </a:spcAft>
+            </a:pPr>
+            <a:r>
+              <a:rPr sz="1500" b="0" i="0" u="none">
+                <a:solidFill>
+                  <a:srgbClr val="222222"/>
+                </a:solidFill>
+                <a:latin typeface="맑은 고딕"/>
+              </a:rPr>
+              <a:t>② Soyun was so careful but she wouldn't drop the egg.</a:t>
+            </a:r>
+          </a:p>
+          <a:p>
+            <a:pPr algn="l">
+              <a:lnSpc>
+                <a:spcPct val="105000"/>
+              </a:lnSpc>
+              <a:spcBef>
+                <a:spcPts val="0"/>
+              </a:spcBef>
+              <a:spcAft>
+                <a:spcPts val="300"/>
+              </a:spcAft>
+            </a:pPr>
+            <a:r>
+              <a:rPr sz="1500" b="0" i="0" u="none">
+                <a:solidFill>
+                  <a:srgbClr val="222222"/>
+                </a:solidFill>
+                <a:latin typeface="맑은 고딕"/>
+              </a:rPr>
+              <a:t>③ Soyun was very careful so that she would drop the egg.</a:t>
+            </a:r>
+          </a:p>
+          <a:p>
+            <a:pPr algn="l">
+              <a:lnSpc>
+                <a:spcPct val="105000"/>
+              </a:lnSpc>
+              <a:spcBef>
+                <a:spcPts val="0"/>
+              </a:spcBef>
+              <a:spcAft>
+                <a:spcPts val="300"/>
+              </a:spcAft>
+            </a:pPr>
+            <a:r>
+              <a:rPr sz="1500" b="0" i="0" u="none">
+                <a:solidFill>
+                  <a:srgbClr val="222222"/>
+                </a:solidFill>
+                <a:latin typeface="맑은 고딕"/>
+              </a:rPr>
+              <a:t>④ Soyun was so careful that she wouldn't drop the egg.</a:t>
+            </a:r>
+          </a:p>
+          <a:p>
+            <a:pPr algn="l">
+              <a:lnSpc>
+                <a:spcPct val="105000"/>
+              </a:lnSpc>
+              <a:spcBef>
+                <a:spcPts val="0"/>
+              </a:spcBef>
+              <a:spcAft>
+                <a:spcPts val="300"/>
+              </a:spcAft>
+            </a:pPr>
+            <a:r>
+              <a:rPr sz="1500" b="0" i="0" u="none">
+                <a:solidFill>
+                  <a:srgbClr val="222222"/>
+                </a:solidFill>
+                <a:latin typeface="맑은 고딕"/>
+              </a:rPr>
+              <a:t>⑤ Soyun was very careful so that she wouldn't drop the egg.</a:t>
+            </a:r>
+          </a:p>
+        </p:txBody>
+      </p:sp>
+      <p:sp>
+        <p:nvSpPr>
+          <p:cNvPr id="9" name="reveal_1_en_ov"/>
+          <p:cNvSpPr txBox="1"/>
+          <p:nvPr/>
+        </p:nvSpPr>
+        <p:spPr>
+          <a:xfrm>
+            <a:off x="7299655" y="1299972"/>
+            <a:ext cx="4434840" cy="2844545"/>
           </a:xfrm>
           <a:prstGeom prst="rect">
             <a:avLst/>
           </a:prstGeom>
           <a:solidFill>
-            <a:srgbClr val="FFFFFF"/>
+            <a:srgbClr val="F2F3F5"/>
           </a:solidFill>
           <a:ln>
             <a:noFill/>
           </a:ln>
         </p:spPr>
         <p:txBody>
-          <a:bodyPr wrap="square" anchor="t" lIns="73152" rIns="73152">
+          <a:bodyPr wrap="square" anchor="t" lIns="73152" rIns="73152" tIns="73152">
             <a:spAutoFit/>
           </a:bodyPr>
           <a:lstStyle/>
@@ -21703,265 +22075,95 @@
               </a:spcAft>
             </a:pPr>
             <a:r>
+              <a:rPr sz="1500" b="0" i="0" u="none">
+                <a:solidFill>
+                  <a:srgbClr val="222222"/>
+                </a:solidFill>
+                <a:latin typeface="맑은 고딕"/>
+              </a:rPr>
+              <a:t>① Soyun was so careful and she wouldn't drop the egg.</a:t>
+            </a:r>
+          </a:p>
+          <a:p>
+            <a:pPr algn="l">
+              <a:lnSpc>
+                <a:spcPct val="105000"/>
+              </a:lnSpc>
+              <a:spcBef>
+                <a:spcPts val="0"/>
+              </a:spcBef>
+              <a:spcAft>
+                <a:spcPts val="300"/>
+              </a:spcAft>
+            </a:pPr>
+            <a:r>
+              <a:rPr sz="1500" b="0" i="0" u="none">
+                <a:solidFill>
+                  <a:srgbClr val="222222"/>
+                </a:solidFill>
+                <a:latin typeface="맑은 고딕"/>
+              </a:rPr>
+              <a:t>② Soyun was so careful but she wouldn't drop the egg.</a:t>
+            </a:r>
+          </a:p>
+          <a:p>
+            <a:pPr algn="l">
+              <a:lnSpc>
+                <a:spcPct val="105000"/>
+              </a:lnSpc>
+              <a:spcBef>
+                <a:spcPts val="0"/>
+              </a:spcBef>
+              <a:spcAft>
+                <a:spcPts val="300"/>
+              </a:spcAft>
+            </a:pPr>
+            <a:r>
+              <a:rPr sz="1500" b="0" i="0" u="none">
+                <a:solidFill>
+                  <a:srgbClr val="222222"/>
+                </a:solidFill>
+                <a:latin typeface="맑은 고딕"/>
+              </a:rPr>
+              <a:t>③ Soyun was very careful so that she would drop the egg.</a:t>
+            </a:r>
+          </a:p>
+          <a:p>
+            <a:pPr algn="l">
+              <a:lnSpc>
+                <a:spcPct val="105000"/>
+              </a:lnSpc>
+              <a:spcBef>
+                <a:spcPts val="0"/>
+              </a:spcBef>
+              <a:spcAft>
+                <a:spcPts val="300"/>
+              </a:spcAft>
+            </a:pPr>
+            <a:r>
+              <a:rPr sz="1500" b="0" i="0" u="none">
+                <a:solidFill>
+                  <a:srgbClr val="222222"/>
+                </a:solidFill>
+                <a:latin typeface="맑은 고딕"/>
+              </a:rPr>
+              <a:t>④ Soyun was so careful that she wouldn't drop the egg.</a:t>
+            </a:r>
+          </a:p>
+          <a:p>
+            <a:pPr algn="l">
+              <a:lnSpc>
+                <a:spcPct val="105000"/>
+              </a:lnSpc>
+              <a:spcBef>
+                <a:spcPts val="0"/>
+              </a:spcBef>
+              <a:spcAft>
+                <a:spcPts val="300"/>
+              </a:spcAft>
+            </a:pPr>
+            <a:r>
               <a:rPr sz="1500" b="1" i="0" u="none">
-                <a:solidFill>
-                  <a:srgbClr val="1E2A4A"/>
-                </a:solidFill>
-                <a:latin typeface="맑은 고딕"/>
-              </a:rPr>
-              <a:t>다음 글의 밑줄 친 우리말을 바르게 영작한 것은?</a:t>
-            </a:r>
-          </a:p>
-          <a:p>
-            <a:pPr algn="l">
-              <a:lnSpc>
-                <a:spcPct val="105000"/>
-              </a:lnSpc>
-              <a:spcBef>
-                <a:spcPts val="0"/>
-              </a:spcBef>
-            </a:pPr>
-            <a:r>
-              <a:rPr sz="600" b="0" i="0" u="none">
-                <a:solidFill>
-                  <a:srgbClr val="555555"/>
-                </a:solidFill>
-                <a:latin typeface="맑은 고딕"/>
-              </a:rPr>
-              <a:t> </a:t>
-            </a:r>
-          </a:p>
-          <a:p>
-            <a:pPr algn="l" marL="228600">
-              <a:lnSpc>
-                <a:spcPct val="105000"/>
-              </a:lnSpc>
-              <a:spcBef>
-                <a:spcPts val="0"/>
-              </a:spcBef>
-              <a:spcAft>
-                <a:spcPts val="200"/>
-              </a:spcAft>
-            </a:pPr>
-            <a:r>
-              <a:rPr sz="1400" b="0" i="0" u="none">
-                <a:solidFill>
-                  <a:srgbClr val="222222"/>
-                </a:solidFill>
-                <a:latin typeface="맑은 고딕"/>
-              </a:rPr>
-              <a:t>Hi, David</a:t>
-            </a:r>
-          </a:p>
-          <a:p>
-            <a:pPr algn="l" marL="228600">
-              <a:lnSpc>
-                <a:spcPct val="105000"/>
-              </a:lnSpc>
-              <a:spcBef>
-                <a:spcPts val="0"/>
-              </a:spcBef>
-              <a:spcAft>
-                <a:spcPts val="200"/>
-              </a:spcAft>
-            </a:pPr>
-            <a:r>
-              <a:rPr sz="1400" b="0" i="0" u="none">
-                <a:solidFill>
-                  <a:srgbClr val="222222"/>
-                </a:solidFill>
-                <a:latin typeface="맑은 고딕"/>
-              </a:rPr>
-              <a:t>How's your new school? Yesterday was our Sports Day. Tom and I entered "Egg and Spoon Race", but we dropped our eggs during the race.</a:t>
-            </a:r>
-          </a:p>
-          <a:p>
-            <a:pPr algn="l" marL="228600">
-              <a:lnSpc>
-                <a:spcPct val="105000"/>
-              </a:lnSpc>
-              <a:spcBef>
-                <a:spcPts val="0"/>
-              </a:spcBef>
-              <a:spcAft>
-                <a:spcPts val="200"/>
-              </a:spcAft>
-            </a:pPr>
-            <a:r>
-              <a:rPr sz="1400" b="0" i="0" u="none">
-                <a:solidFill>
-                  <a:srgbClr val="222222"/>
-                </a:solidFill>
-                <a:latin typeface="맑은 고딕"/>
-              </a:rPr>
-              <a:t>소윤이는 계란을 떨어트리지 않기 위해 매우 조심했다.</a:t>
-            </a:r>
-          </a:p>
-          <a:p>
-            <a:pPr algn="l" marL="228600">
-              <a:lnSpc>
-                <a:spcPct val="105000"/>
-              </a:lnSpc>
-              <a:spcBef>
-                <a:spcPts val="0"/>
-              </a:spcBef>
-              <a:spcAft>
-                <a:spcPts val="200"/>
-              </a:spcAft>
-            </a:pPr>
-            <a:r>
-              <a:rPr sz="1400" b="0" i="0" u="none">
-                <a:solidFill>
-                  <a:srgbClr val="222222"/>
-                </a:solidFill>
-                <a:latin typeface="맑은 고딕"/>
-              </a:rPr>
-              <a:t>She did it. Please tell me about your school. I miss you so much.</a:t>
-            </a:r>
-          </a:p>
-          <a:p>
-            <a:pPr algn="l" marL="228600">
-              <a:lnSpc>
-                <a:spcPct val="105000"/>
-              </a:lnSpc>
-              <a:spcBef>
-                <a:spcPts val="0"/>
-              </a:spcBef>
-              <a:spcAft>
-                <a:spcPts val="200"/>
-              </a:spcAft>
-            </a:pPr>
-            <a:r>
-              <a:rPr sz="1400" b="0" i="0" u="none">
-                <a:solidFill>
-                  <a:srgbClr val="222222"/>
-                </a:solidFill>
-                <a:latin typeface="맑은 고딕"/>
-              </a:rPr>
-              <a:t>Your friend, Alice</a:t>
-            </a:r>
-          </a:p>
-          <a:p>
-            <a:pPr algn="l">
-              <a:lnSpc>
-                <a:spcPct val="105000"/>
-              </a:lnSpc>
-              <a:spcBef>
-                <a:spcPts val="0"/>
-              </a:spcBef>
-            </a:pPr>
-            <a:r>
-              <a:rPr sz="800" b="0" i="0" u="none">
-                <a:solidFill>
-                  <a:srgbClr val="555555"/>
-                </a:solidFill>
-                <a:latin typeface="맑은 고딕"/>
-              </a:rPr>
-              <a:t> </a:t>
-            </a:r>
-          </a:p>
-          <a:p>
-            <a:pPr algn="l">
-              <a:lnSpc>
-                <a:spcPct val="105000"/>
-              </a:lnSpc>
-              <a:spcBef>
-                <a:spcPts val="0"/>
-              </a:spcBef>
-              <a:spcAft>
-                <a:spcPts val="300"/>
-              </a:spcAft>
-            </a:pPr>
-            <a:r>
-              <a:rPr sz="1400" b="0" i="0" u="none">
-                <a:solidFill>
-                  <a:srgbClr val="222222"/>
-                </a:solidFill>
-                <a:latin typeface="맑은 고딕"/>
-              </a:rPr>
-              <a:t>① Soyun was so careful and she wouldn't drop the egg.</a:t>
-            </a:r>
-          </a:p>
-          <a:p>
-            <a:pPr algn="l">
-              <a:lnSpc>
-                <a:spcPct val="105000"/>
-              </a:lnSpc>
-              <a:spcBef>
-                <a:spcPts val="0"/>
-              </a:spcBef>
-              <a:spcAft>
-                <a:spcPts val="300"/>
-              </a:spcAft>
-            </a:pPr>
-            <a:r>
-              <a:rPr sz="1400" b="0" i="0" u="none">
-                <a:solidFill>
-                  <a:srgbClr val="222222"/>
-                </a:solidFill>
-                <a:latin typeface="맑은 고딕"/>
-              </a:rPr>
-              <a:t>② Soyun was so careful but she wouldn't drop the egg.</a:t>
-            </a:r>
-          </a:p>
-          <a:p>
-            <a:pPr algn="l">
-              <a:lnSpc>
-                <a:spcPct val="105000"/>
-              </a:lnSpc>
-              <a:spcBef>
-                <a:spcPts val="0"/>
-              </a:spcBef>
-              <a:spcAft>
-                <a:spcPts val="300"/>
-              </a:spcAft>
-            </a:pPr>
-            <a:r>
-              <a:rPr sz="1400" b="0" i="0" u="none">
-                <a:solidFill>
-                  <a:srgbClr val="222222"/>
-                </a:solidFill>
-                <a:latin typeface="맑은 고딕"/>
-              </a:rPr>
-              <a:t>③ Soyun was very careful so that she would drop the egg.</a:t>
-            </a:r>
-          </a:p>
-          <a:p>
-            <a:pPr algn="l">
-              <a:lnSpc>
-                <a:spcPct val="105000"/>
-              </a:lnSpc>
-              <a:spcBef>
-                <a:spcPts val="0"/>
-              </a:spcBef>
-              <a:spcAft>
-                <a:spcPts val="300"/>
-              </a:spcAft>
-            </a:pPr>
-            <a:r>
-              <a:rPr sz="1400" b="0" i="0" u="none">
-                <a:solidFill>
-                  <a:srgbClr val="222222"/>
-                </a:solidFill>
-                <a:latin typeface="맑은 고딕"/>
-              </a:rPr>
-              <a:t>④ Soyun was so careful that she wouldn't drop the egg.</a:t>
-            </a:r>
-          </a:p>
-          <a:p>
-            <a:pPr algn="l">
-              <a:lnSpc>
-                <a:spcPct val="105000"/>
-              </a:lnSpc>
-              <a:spcBef>
-                <a:spcPts val="0"/>
-              </a:spcBef>
-              <a:spcAft>
-                <a:spcPts val="300"/>
-              </a:spcAft>
-            </a:pPr>
-            <a:r>
-              <a:rPr sz="1400" b="1" i="0" u="none">
                 <a:solidFill>
                   <a:srgbClr val="C03A2E"/>
                 </a:solidFill>
@@ -21974,13 +22176,13 @@
       </p:sp>
       <p:cxnSp>
         <p:nvCxnSpPr>
-          <p:cNvPr id="8" name="Connector 7"/>
+          <p:cNvPr id="10" name="Connector 9"/>
           <p:cNvCxnSpPr/>
           <p:nvPr/>
         </p:nvCxnSpPr>
         <p:spPr>
           <a:xfrm>
-            <a:off x="457200" y="4507991"/>
+            <a:off x="457200" y="4190237"/>
             <a:ext cx="11277295" cy="0"/>
           </a:xfrm>
           <a:prstGeom prst="line">
@@ -22009,14 +22211,14 @@
       </p:cxnSp>
       <p:sp>
         <p:nvSpPr>
-          <p:cNvPr id="9" name="reveal_1_en"/>
+          <p:cNvPr id="11" name="reveal_1_en"/>
           <p:cNvSpPr/>
           <p:nvPr/>
         </p:nvSpPr>
         <p:spPr>
           <a:xfrm>
-            <a:off x="457200" y="4645151"/>
-            <a:ext cx="11277295" cy="685800"/>
+            <a:off x="457200" y="4327397"/>
+            <a:ext cx="11277295" cy="1003553"/>
           </a:xfrm>
           <a:prstGeom prst="roundRect">
             <a:avLst>
@@ -22069,11 +22271,30 @@
               <a:t>정답:  ⑤ Soyun was very careful so that she wouldn't drop the egg.</a:t>
             </a:r>
           </a:p>
+          <a:p>
+            <a:pPr algn="ctr">
+              <a:lnSpc>
+                <a:spcPct val="105000"/>
+              </a:lnSpc>
+              <a:spcBef>
+                <a:spcPts val="0"/>
+              </a:spcBef>
+            </a:pPr>
+            <a:r>
+              <a:rPr sz="1300" b="0" i="0" u="none">
+                <a:solidFill>
+                  <a:srgbClr val="1E2A4A"/>
+                </a:solidFill>
+                <a:latin typeface="맑은 고딕"/>
+              </a:rPr>
+              <a:t>소윤이는 계란을 떨어뜨리지 않도록 매우 조심했다.</a:t>
+            </a:r>
+          </a:p>
         </p:txBody>
       </p:sp>
       <p:sp>
         <p:nvSpPr>
-          <p:cNvPr id="10" name="reveal_2_en"/>
+          <p:cNvPr id="12" name="reveal_2_en"/>
           <p:cNvSpPr/>
           <p:nvPr/>
         </p:nvSpPr>
@@ -22186,7 +22407,7 @@
                                           </p:stCondLst>
                                         </p:cTn>
                                         <p:tgtEl>
-                                          <p:spTgt spid="9"/>
+                                          <p:spTgt spid="11"/>
                                         </p:tgtEl>
                                         <p:attrNameLst>
                                           <p:attrName>style.visibility</p:attrName>
@@ -22213,7 +22434,7 @@
                                           </p:stCondLst>
                                         </p:cTn>
                                         <p:tgtEl>
-                                          <p:spTgt spid="7"/>
+                                          <p:spTgt spid="9"/>
                                         </p:tgtEl>
                                         <p:attrNameLst>
                                           <p:attrName>style.visibility</p:attrName>
@@ -22258,7 +22479,7 @@
                                           </p:stCondLst>
                                         </p:cTn>
                                         <p:tgtEl>
-                                          <p:spTgt spid="10"/>
+                                          <p:spTgt spid="12"/>
                                         </p:tgtEl>
                                         <p:attrNameLst>
                                           <p:attrName>style.visibility</p:attrName>
@@ -22299,9 +22520,9 @@
       </p:par>
     </p:tnLst>
     <p:bldLst>
+      <p:bldP spid="11" grpId="0" animBg="1"/>
       <p:bldP spid="9" grpId="0" animBg="1"/>
-      <p:bldP spid="7" grpId="0" animBg="1"/>
-      <p:bldP spid="10" grpId="0" animBg="1"/>
+      <p:bldP spid="12" grpId="0" animBg="1"/>
     </p:bldLst>
   </p:timing>
 </p:sld>
@@ -22518,7 +22739,7 @@
         <p:spPr>
           <a:xfrm>
             <a:off x="457200" y="868680"/>
-            <a:ext cx="11277295" cy="3593591"/>
+            <a:ext cx="11277295" cy="3067811"/>
           </a:xfrm>
           <a:prstGeom prst="rect">
             <a:avLst/>
@@ -22543,7 +22764,7 @@
               </a:spcAft>
             </a:pPr>
             <a:r>
-              <a:rPr sz="1900" b="1" i="0" u="none">
+              <a:rPr sz="1800" b="1" i="0" u="none">
                 <a:solidFill>
                   <a:srgbClr val="1E2A4A"/>
                 </a:solidFill>
@@ -22584,7 +22805,7 @@
               </a:spcAft>
             </a:pPr>
             <a:r>
-              <a:rPr sz="1800" b="0" i="0" u="none">
+              <a:rPr sz="1700" b="0" i="0" u="none">
                 <a:solidFill>
                   <a:srgbClr val="222222"/>
                 </a:solidFill>
@@ -22606,7 +22827,7 @@
               </a:spcAft>
             </a:pPr>
             <a:r>
-              <a:rPr sz="1800" b="0" i="0" u="none">
+              <a:rPr sz="1700" b="0" i="0" u="none">
                 <a:solidFill>
                   <a:srgbClr val="222222"/>
                 </a:solidFill>
@@ -22628,7 +22849,7 @@
               </a:spcAft>
             </a:pPr>
             <a:r>
-              <a:rPr sz="1800" b="0" i="0" u="none">
+              <a:rPr sz="1700" b="0" i="0" u="none">
                 <a:solidFill>
                   <a:srgbClr val="222222"/>
                 </a:solidFill>
@@ -22650,7 +22871,7 @@
               </a:spcAft>
             </a:pPr>
             <a:r>
-              <a:rPr sz="1800" b="0" i="0" u="none">
+              <a:rPr sz="1700" b="0" i="0" u="none">
                 <a:solidFill>
                   <a:srgbClr val="222222"/>
                 </a:solidFill>
@@ -22672,7 +22893,7 @@
               </a:spcAft>
             </a:pPr>
             <a:r>
-              <a:rPr sz="1800" b="0" i="0" u="none">
+              <a:rPr sz="1700" b="0" i="0" u="none">
                 <a:solidFill>
                   <a:srgbClr val="222222"/>
                 </a:solidFill>
@@ -22692,7 +22913,7 @@
         <p:spPr>
           <a:xfrm>
             <a:off x="457200" y="868680"/>
-            <a:ext cx="11277295" cy="3593591"/>
+            <a:ext cx="11277295" cy="3067811"/>
           </a:xfrm>
           <a:prstGeom prst="rect">
             <a:avLst/>
@@ -22722,7 +22943,7 @@
               </a:spcAft>
             </a:pPr>
             <a:r>
-              <a:rPr sz="1900" b="1" i="0" u="none">
+              <a:rPr sz="1800" b="1" i="0" u="none">
                 <a:solidFill>
                   <a:srgbClr val="1E2A4A"/>
                 </a:solidFill>
@@ -22763,7 +22984,7 @@
               </a:spcAft>
             </a:pPr>
             <a:r>
-              <a:rPr sz="1800" b="0" i="0" u="none">
+              <a:rPr sz="1700" b="0" i="0" u="none">
                 <a:solidFill>
                   <a:srgbClr val="222222"/>
                 </a:solidFill>
@@ -22785,7 +23006,7 @@
               </a:spcAft>
             </a:pPr>
             <a:r>
-              <a:rPr sz="1800" b="0" i="0" u="none">
+              <a:rPr sz="1700" b="0" i="0" u="none">
                 <a:solidFill>
                   <a:srgbClr val="222222"/>
                 </a:solidFill>
@@ -22807,7 +23028,7 @@
               </a:spcAft>
             </a:pPr>
             <a:r>
-              <a:rPr sz="1800" b="0" i="0" u="none">
+              <a:rPr sz="1700" b="0" i="0" u="none">
                 <a:solidFill>
                   <a:srgbClr val="222222"/>
                 </a:solidFill>
@@ -22829,7 +23050,7 @@
               </a:spcAft>
             </a:pPr>
             <a:r>
-              <a:rPr sz="1800" b="1" i="0" u="none">
+              <a:rPr sz="1700" b="1" i="0" u="none">
                 <a:solidFill>
                   <a:srgbClr val="C03A2E"/>
                 </a:solidFill>
@@ -22851,7 +23072,7 @@
               </a:spcAft>
             </a:pPr>
             <a:r>
-              <a:rPr sz="1800" b="0" i="0" u="none">
+              <a:rPr sz="1700" b="0" i="0" u="none">
                 <a:solidFill>
                   <a:srgbClr val="222222"/>
                 </a:solidFill>
@@ -22870,7 +23091,7 @@
         </p:nvCxnSpPr>
         <p:spPr>
           <a:xfrm>
-            <a:off x="457200" y="4507991"/>
+            <a:off x="457200" y="3982211"/>
             <a:ext cx="11277295" cy="0"/>
           </a:xfrm>
           <a:prstGeom prst="line">
@@ -22905,8 +23126,8 @@
         </p:nvSpPr>
         <p:spPr>
           <a:xfrm>
-            <a:off x="457200" y="4645151"/>
-            <a:ext cx="11277295" cy="685800"/>
+            <a:off x="457200" y="4119371"/>
+            <a:ext cx="11277295" cy="1211580"/>
           </a:xfrm>
           <a:prstGeom prst="roundRect">
             <a:avLst>
@@ -22957,6 +23178,25 @@
                 <a:latin typeface="맑은 고딕"/>
               </a:rPr>
               <a:t>정답:  ④ Tom couldn't get in the theater so that he had left his ticket at home.</a:t>
+            </a:r>
+          </a:p>
+          <a:p>
+            <a:pPr algn="ctr">
+              <a:lnSpc>
+                <a:spcPct val="105000"/>
+              </a:lnSpc>
+              <a:spcBef>
+                <a:spcPts val="0"/>
+              </a:spcBef>
+            </a:pPr>
+            <a:r>
+              <a:rPr sz="1300" b="0" i="0" u="none">
+                <a:solidFill>
+                  <a:srgbClr val="1E2A4A"/>
+                </a:solidFill>
+                <a:latin typeface="맑은 고딕"/>
+              </a:rPr>
+              <a:t>(흐름상 어색) Tom은 영화관에 들어갈 수 없었다, 그래서 입장권을 집에 두고 왔다. (결과가 아니라 원인이어야 함)</a:t>
             </a:r>
           </a:p>
         </p:txBody>
@@ -23408,7 +23648,7 @@
         <p:spPr>
           <a:xfrm>
             <a:off x="457200" y="868680"/>
-            <a:ext cx="11277295" cy="3593591"/>
+            <a:ext cx="11277295" cy="3275837"/>
           </a:xfrm>
           <a:prstGeom prst="rect">
             <a:avLst/>
@@ -23623,7 +23863,7 @@
         <p:spPr>
           <a:xfrm>
             <a:off x="457200" y="868680"/>
-            <a:ext cx="11277295" cy="3593591"/>
+            <a:ext cx="11277295" cy="3275837"/>
           </a:xfrm>
           <a:prstGeom prst="rect">
             <a:avLst/>
@@ -23842,7 +24082,7 @@
         </p:nvCxnSpPr>
         <p:spPr>
           <a:xfrm>
-            <a:off x="457200" y="4507991"/>
+            <a:off x="457200" y="4190237"/>
             <a:ext cx="11277295" cy="0"/>
           </a:xfrm>
           <a:prstGeom prst="line">
@@ -23877,8 +24117,8 @@
         </p:nvSpPr>
         <p:spPr>
           <a:xfrm>
-            <a:off x="457200" y="4645151"/>
-            <a:ext cx="11277295" cy="685800"/>
+            <a:off x="457200" y="4327397"/>
+            <a:ext cx="11277295" cy="1003553"/>
           </a:xfrm>
           <a:prstGeom prst="roundRect">
             <a:avLst>
@@ -23929,6 +24169,25 @@
                 <a:latin typeface="맑은 고딕"/>
               </a:rPr>
               <a:t>정답:  ② She turned on the TV so as to watch the news. / ⑤ She turned on the TV so that she could watch the news.</a:t>
+            </a:r>
+          </a:p>
+          <a:p>
+            <a:pPr algn="ctr">
+              <a:lnSpc>
+                <a:spcPct val="105000"/>
+              </a:lnSpc>
+              <a:spcBef>
+                <a:spcPts val="0"/>
+              </a:spcBef>
+            </a:pPr>
+            <a:r>
+              <a:rPr sz="1300" b="0" i="0" u="none">
+                <a:solidFill>
+                  <a:srgbClr val="1E2A4A"/>
+                </a:solidFill>
+                <a:latin typeface="맑은 고딕"/>
+              </a:rPr>
+              <a:t>② 그녀는 뉴스를 보기 위해 TV를 켰다.  /  ⑤ 그녀는 뉴스를 볼 수 있도록 TV를 켰다.</a:t>
             </a:r>
           </a:p>
         </p:txBody>
@@ -24380,7 +24639,7 @@
         <p:spPr>
           <a:xfrm>
             <a:off x="457200" y="868680"/>
-            <a:ext cx="11277295" cy="3593591"/>
+            <a:ext cx="11277295" cy="3275837"/>
           </a:xfrm>
           <a:prstGeom prst="rect">
             <a:avLst/>
@@ -24617,7 +24876,7 @@
         <p:spPr>
           <a:xfrm>
             <a:off x="457200" y="868680"/>
-            <a:ext cx="11277295" cy="3593591"/>
+            <a:ext cx="11277295" cy="3275837"/>
           </a:xfrm>
           <a:prstGeom prst="rect">
             <a:avLst/>
@@ -24876,7 +25135,7 @@
         </p:nvCxnSpPr>
         <p:spPr>
           <a:xfrm>
-            <a:off x="457200" y="4507991"/>
+            <a:off x="457200" y="4190237"/>
             <a:ext cx="11277295" cy="0"/>
           </a:xfrm>
           <a:prstGeom prst="line">
@@ -24911,8 +25170,8 @@
         </p:nvSpPr>
         <p:spPr>
           <a:xfrm>
-            <a:off x="457200" y="4645151"/>
-            <a:ext cx="11277295" cy="685800"/>
+            <a:off x="457200" y="4327397"/>
+            <a:ext cx="11277295" cy="1003553"/>
           </a:xfrm>
           <a:prstGeom prst="roundRect">
             <a:avLst>
@@ -24963,6 +25222,25 @@
                 <a:latin typeface="맑은 고딕"/>
               </a:rPr>
               <a:t>정답:  ② so that</a:t>
+            </a:r>
+          </a:p>
+          <a:p>
+            <a:pPr algn="ctr">
+              <a:lnSpc>
+                <a:spcPct val="105000"/>
+              </a:lnSpc>
+              <a:spcBef>
+                <a:spcPts val="0"/>
+              </a:spcBef>
+            </a:pPr>
+            <a:r>
+              <a:rPr sz="1300" b="0" i="0" u="none">
+                <a:solidFill>
+                  <a:srgbClr val="1E2A4A"/>
+                </a:solidFill>
+                <a:latin typeface="맑은 고딕"/>
+              </a:rPr>
+              <a:t>그는 개가 건강을 유지할 수 있도록 자주 개를 산책시킨다.</a:t>
             </a:r>
           </a:p>
         </p:txBody>
@@ -25414,7 +25692,7 @@
         <p:spPr>
           <a:xfrm>
             <a:off x="457200" y="868680"/>
-            <a:ext cx="11277295" cy="3593591"/>
+            <a:ext cx="11277295" cy="3275837"/>
           </a:xfrm>
           <a:prstGeom prst="rect">
             <a:avLst/>
@@ -25588,7 +25866,7 @@
         <p:spPr>
           <a:xfrm>
             <a:off x="457200" y="868680"/>
-            <a:ext cx="11277295" cy="3593591"/>
+            <a:ext cx="11277295" cy="3275837"/>
           </a:xfrm>
           <a:prstGeom prst="rect">
             <a:avLst/>
@@ -25766,7 +26044,7 @@
         </p:nvCxnSpPr>
         <p:spPr>
           <a:xfrm>
-            <a:off x="457200" y="4507991"/>
+            <a:off x="457200" y="4190237"/>
             <a:ext cx="11277295" cy="0"/>
           </a:xfrm>
           <a:prstGeom prst="line">
@@ -25801,8 +26079,8 @@
         </p:nvSpPr>
         <p:spPr>
           <a:xfrm>
-            <a:off x="457200" y="4645151"/>
-            <a:ext cx="11277295" cy="685800"/>
+            <a:off x="457200" y="4327397"/>
+            <a:ext cx="11277295" cy="1003553"/>
           </a:xfrm>
           <a:prstGeom prst="roundRect">
             <a:avLst>
@@ -25853,6 +26131,25 @@
                 <a:latin typeface="맑은 고딕"/>
               </a:rPr>
               <a:t>정답:  ② I gave him a knife so that he couldn't peel the fruit.</a:t>
+            </a:r>
+          </a:p>
+          <a:p>
+            <a:pPr algn="ctr">
+              <a:lnSpc>
+                <a:spcPct val="105000"/>
+              </a:lnSpc>
+              <a:spcBef>
+                <a:spcPts val="0"/>
+              </a:spcBef>
+            </a:pPr>
+            <a:r>
+              <a:rPr sz="1300" b="0" i="0" u="none">
+                <a:solidFill>
+                  <a:srgbClr val="1E2A4A"/>
+                </a:solidFill>
+                <a:latin typeface="맑은 고딕"/>
+              </a:rPr>
+              <a:t>(의미상 어색) 나는 그가 과일 껍질을 깎을 수 없도록 그에게 칼을 주었다.</a:t>
             </a:r>
           </a:p>
         </p:txBody>
@@ -26304,7 +26601,7 @@
         <p:spPr>
           <a:xfrm>
             <a:off x="457200" y="868680"/>
-            <a:ext cx="11277295" cy="3593591"/>
+            <a:ext cx="11277295" cy="3275837"/>
           </a:xfrm>
           <a:prstGeom prst="rect">
             <a:avLst/>
@@ -26478,7 +26775,7 @@
         <p:spPr>
           <a:xfrm>
             <a:off x="457200" y="868680"/>
-            <a:ext cx="11277295" cy="3593591"/>
+            <a:ext cx="11277295" cy="3275837"/>
           </a:xfrm>
           <a:prstGeom prst="rect">
             <a:avLst/>
@@ -26656,7 +26953,7 @@
         </p:nvCxnSpPr>
         <p:spPr>
           <a:xfrm>
-            <a:off x="457200" y="4507991"/>
+            <a:off x="457200" y="4190237"/>
             <a:ext cx="11277295" cy="0"/>
           </a:xfrm>
           <a:prstGeom prst="line">
@@ -26691,8 +26988,8 @@
         </p:nvSpPr>
         <p:spPr>
           <a:xfrm>
-            <a:off x="457200" y="4645151"/>
-            <a:ext cx="11277295" cy="685800"/>
+            <a:off x="457200" y="4327397"/>
+            <a:ext cx="11277295" cy="1003553"/>
           </a:xfrm>
           <a:prstGeom prst="roundRect">
             <a:avLst>
@@ -26743,6 +27040,25 @@
                 <a:latin typeface="맑은 고딕"/>
               </a:rPr>
               <a:t>정답:  ① He reads many books about writing.</a:t>
+            </a:r>
+          </a:p>
+          <a:p>
+            <a:pPr algn="ctr">
+              <a:lnSpc>
+                <a:spcPct val="105000"/>
+              </a:lnSpc>
+              <a:spcBef>
+                <a:spcPts val="0"/>
+              </a:spcBef>
+            </a:pPr>
+            <a:r>
+              <a:rPr sz="1300" b="0" i="0" u="none">
+                <a:solidFill>
+                  <a:srgbClr val="1E2A4A"/>
+                </a:solidFill>
+                <a:latin typeface="맑은 고딕"/>
+              </a:rPr>
+              <a:t>(의미가 다른 것) 그는 글쓰기에 관한 책을 많이 읽는다.</a:t>
             </a:r>
           </a:p>
         </p:txBody>
@@ -27194,7 +27510,7 @@
         <p:spPr>
           <a:xfrm>
             <a:off x="457200" y="868680"/>
-            <a:ext cx="11277295" cy="3593591"/>
+            <a:ext cx="11277295" cy="3275837"/>
           </a:xfrm>
           <a:prstGeom prst="rect">
             <a:avLst/>
@@ -27368,7 +27684,7 @@
         <p:spPr>
           <a:xfrm>
             <a:off x="457200" y="868680"/>
-            <a:ext cx="11277295" cy="3593591"/>
+            <a:ext cx="11277295" cy="3275837"/>
           </a:xfrm>
           <a:prstGeom prst="rect">
             <a:avLst/>
@@ -27546,7 +27862,7 @@
         </p:nvCxnSpPr>
         <p:spPr>
           <a:xfrm>
-            <a:off x="457200" y="4507991"/>
+            <a:off x="457200" y="4190237"/>
             <a:ext cx="11277295" cy="0"/>
           </a:xfrm>
           <a:prstGeom prst="line">
@@ -27581,8 +27897,8 @@
         </p:nvSpPr>
         <p:spPr>
           <a:xfrm>
-            <a:off x="457200" y="4645151"/>
-            <a:ext cx="11277295" cy="685800"/>
+            <a:off x="457200" y="4327397"/>
+            <a:ext cx="11277295" cy="1003553"/>
           </a:xfrm>
           <a:prstGeom prst="roundRect">
             <a:avLst>
@@ -27633,6 +27949,25 @@
                 <a:latin typeface="맑은 고딕"/>
               </a:rPr>
               <a:t>정답:  ③ He studied so hard that he could pass the exam.</a:t>
+            </a:r>
+          </a:p>
+          <a:p>
+            <a:pPr algn="ctr">
+              <a:lnSpc>
+                <a:spcPct val="105000"/>
+              </a:lnSpc>
+              <a:spcBef>
+                <a:spcPts val="0"/>
+              </a:spcBef>
+            </a:pPr>
+            <a:r>
+              <a:rPr sz="1300" b="0" i="0" u="none">
+                <a:solidFill>
+                  <a:srgbClr val="1E2A4A"/>
+                </a:solidFill>
+                <a:latin typeface="맑은 고딕"/>
+              </a:rPr>
+              <a:t>(의미가 다른 것) 그는 너무 열심히 공부해서 시험에 합격할 수 있었다.</a:t>
             </a:r>
           </a:p>
         </p:txBody>
@@ -28084,7 +28419,7 @@
         <p:spPr>
           <a:xfrm>
             <a:off x="457200" y="868680"/>
-            <a:ext cx="11277295" cy="3593591"/>
+            <a:ext cx="11277295" cy="3275837"/>
           </a:xfrm>
           <a:prstGeom prst="rect">
             <a:avLst/>
@@ -28258,7 +28593,7 @@
         <p:spPr>
           <a:xfrm>
             <a:off x="457200" y="868680"/>
-            <a:ext cx="11277295" cy="3593591"/>
+            <a:ext cx="11277295" cy="3275837"/>
           </a:xfrm>
           <a:prstGeom prst="rect">
             <a:avLst/>
@@ -28436,7 +28771,7 @@
         </p:nvCxnSpPr>
         <p:spPr>
           <a:xfrm>
-            <a:off x="457200" y="4507991"/>
+            <a:off x="457200" y="4190237"/>
             <a:ext cx="11277295" cy="0"/>
           </a:xfrm>
           <a:prstGeom prst="line">
@@ -28471,8 +28806,8 @@
         </p:nvSpPr>
         <p:spPr>
           <a:xfrm>
-            <a:off x="457200" y="4645151"/>
-            <a:ext cx="11277295" cy="685800"/>
+            <a:off x="457200" y="4327397"/>
+            <a:ext cx="11277295" cy="1003553"/>
           </a:xfrm>
           <a:prstGeom prst="roundRect">
             <a:avLst>
@@ -28523,6 +28858,25 @@
                 <a:latin typeface="맑은 고딕"/>
               </a:rPr>
               <a:t>정답:  ④ He tries so hard that he can achieve his goal.</a:t>
+            </a:r>
+          </a:p>
+          <a:p>
+            <a:pPr algn="ctr">
+              <a:lnSpc>
+                <a:spcPct val="105000"/>
+              </a:lnSpc>
+              <a:spcBef>
+                <a:spcPts val="0"/>
+              </a:spcBef>
+            </a:pPr>
+            <a:r>
+              <a:rPr sz="1300" b="0" i="0" u="none">
+                <a:solidFill>
+                  <a:srgbClr val="1E2A4A"/>
+                </a:solidFill>
+                <a:latin typeface="맑은 고딕"/>
+              </a:rPr>
+              <a:t>(의미가 다른 것) 그는 너무 열심히 노력해서 목표를 이룰 수 있다.</a:t>
             </a:r>
           </a:p>
         </p:txBody>
@@ -28974,7 +29328,7 @@
         <p:spPr>
           <a:xfrm>
             <a:off x="457200" y="868680"/>
-            <a:ext cx="11277295" cy="3593591"/>
+            <a:ext cx="11277295" cy="3275837"/>
           </a:xfrm>
           <a:prstGeom prst="rect">
             <a:avLst/>
@@ -29148,7 +29502,7 @@
         <p:spPr>
           <a:xfrm>
             <a:off x="457200" y="868680"/>
-            <a:ext cx="11277295" cy="3593591"/>
+            <a:ext cx="11277295" cy="3275837"/>
           </a:xfrm>
           <a:prstGeom prst="rect">
             <a:avLst/>
@@ -29326,7 +29680,7 @@
         </p:nvCxnSpPr>
         <p:spPr>
           <a:xfrm>
-            <a:off x="457200" y="4507991"/>
+            <a:off x="457200" y="4190237"/>
             <a:ext cx="11277295" cy="0"/>
           </a:xfrm>
           <a:prstGeom prst="line">
@@ -29361,8 +29715,8 @@
         </p:nvSpPr>
         <p:spPr>
           <a:xfrm>
-            <a:off x="457200" y="4645151"/>
-            <a:ext cx="11277295" cy="685800"/>
+            <a:off x="457200" y="4327397"/>
+            <a:ext cx="11277295" cy="1003553"/>
           </a:xfrm>
           <a:prstGeom prst="roundRect">
             <a:avLst>
@@ -29413,6 +29767,25 @@
                 <a:latin typeface="맑은 고딕"/>
               </a:rPr>
               <a:t>정답:  ③ I woke up so early that I didn't miss the bus.</a:t>
+            </a:r>
+          </a:p>
+          <a:p>
+            <a:pPr algn="ctr">
+              <a:lnSpc>
+                <a:spcPct val="105000"/>
+              </a:lnSpc>
+              <a:spcBef>
+                <a:spcPts val="0"/>
+              </a:spcBef>
+            </a:pPr>
+            <a:r>
+              <a:rPr sz="1300" b="0" i="0" u="none">
+                <a:solidFill>
+                  <a:srgbClr val="1E2A4A"/>
+                </a:solidFill>
+                <a:latin typeface="맑은 고딕"/>
+              </a:rPr>
+              <a:t>(의미가 다른 것) 나는 너무 일찍 일어나서 버스를 놓치지 않았다.</a:t>
             </a:r>
           </a:p>
         </p:txBody>
@@ -29952,7 +30325,7 @@
         <p:spPr>
           <a:xfrm>
             <a:off x="457200" y="868680"/>
-            <a:ext cx="11277295" cy="3593591"/>
+            <a:ext cx="11277295" cy="3275837"/>
           </a:xfrm>
           <a:prstGeom prst="rect">
             <a:avLst/>
@@ -30126,7 +30499,7 @@
         <p:spPr>
           <a:xfrm>
             <a:off x="457200" y="868680"/>
-            <a:ext cx="11277295" cy="3593591"/>
+            <a:ext cx="11277295" cy="3275837"/>
           </a:xfrm>
           <a:prstGeom prst="rect">
             <a:avLst/>
@@ -30304,7 +30677,7 @@
         </p:nvCxnSpPr>
         <p:spPr>
           <a:xfrm>
-            <a:off x="457200" y="4507991"/>
+            <a:off x="457200" y="4190237"/>
             <a:ext cx="11277295" cy="0"/>
           </a:xfrm>
           <a:prstGeom prst="line">
@@ -30339,8 +30712,8 @@
         </p:nvSpPr>
         <p:spPr>
           <a:xfrm>
-            <a:off x="457200" y="4645151"/>
-            <a:ext cx="11277295" cy="685800"/>
+            <a:off x="457200" y="4327397"/>
+            <a:ext cx="11277295" cy="1003553"/>
           </a:xfrm>
           <a:prstGeom prst="roundRect">
             <a:avLst>
@@ -30391,6 +30764,25 @@
                 <a:latin typeface="맑은 고딕"/>
               </a:rPr>
               <a:t>정답:  ⑤ I finished my job quickly because I went home early.</a:t>
+            </a:r>
+          </a:p>
+          <a:p>
+            <a:pPr algn="ctr">
+              <a:lnSpc>
+                <a:spcPct val="105000"/>
+              </a:lnSpc>
+              <a:spcBef>
+                <a:spcPts val="0"/>
+              </a:spcBef>
+            </a:pPr>
+            <a:r>
+              <a:rPr sz="1300" b="0" i="0" u="none">
+                <a:solidFill>
+                  <a:srgbClr val="1E2A4A"/>
+                </a:solidFill>
+                <a:latin typeface="맑은 고딕"/>
+              </a:rPr>
+              <a:t>(의미가 다른 것) 나는 일찍 집에 갔기 때문에 일을 빨리 끝냈다.</a:t>
             </a:r>
           </a:p>
         </p:txBody>
@@ -30842,7 +31234,7 @@
         <p:spPr>
           <a:xfrm>
             <a:off x="457200" y="868680"/>
-            <a:ext cx="11277295" cy="3593591"/>
+            <a:ext cx="11277295" cy="3275837"/>
           </a:xfrm>
           <a:prstGeom prst="rect">
             <a:avLst/>
@@ -30867,7 +31259,7 @@
               </a:spcAft>
             </a:pPr>
             <a:r>
-              <a:rPr sz="2000" b="1" i="0" u="none">
+              <a:rPr sz="1900" b="1" i="0" u="none">
                 <a:solidFill>
                   <a:srgbClr val="1E2A4A"/>
                 </a:solidFill>
@@ -30908,7 +31300,7 @@
               </a:spcAft>
             </a:pPr>
             <a:r>
-              <a:rPr sz="1900" b="0" i="0" u="none">
+              <a:rPr sz="1800" b="0" i="0" u="none">
                 <a:solidFill>
                   <a:srgbClr val="222222"/>
                 </a:solidFill>
@@ -30930,7 +31322,7 @@
               </a:spcAft>
             </a:pPr>
             <a:r>
-              <a:rPr sz="1900" b="0" i="0" u="none">
+              <a:rPr sz="1800" b="0" i="0" u="none">
                 <a:solidFill>
                   <a:srgbClr val="222222"/>
                 </a:solidFill>
@@ -30952,7 +31344,7 @@
               </a:spcAft>
             </a:pPr>
             <a:r>
-              <a:rPr sz="1900" b="0" i="0" u="none">
+              <a:rPr sz="1800" b="0" i="0" u="none">
                 <a:solidFill>
                   <a:srgbClr val="222222"/>
                 </a:solidFill>
@@ -30974,7 +31366,7 @@
               </a:spcAft>
             </a:pPr>
             <a:r>
-              <a:rPr sz="1900" b="0" i="0" u="none">
+              <a:rPr sz="1800" b="0" i="0" u="none">
                 <a:solidFill>
                   <a:srgbClr val="222222"/>
                 </a:solidFill>
@@ -30996,7 +31388,7 @@
               </a:spcAft>
             </a:pPr>
             <a:r>
-              <a:rPr sz="1900" b="0" i="0" u="none">
+              <a:rPr sz="1800" b="0" i="0" u="none">
                 <a:solidFill>
                   <a:srgbClr val="222222"/>
                 </a:solidFill>
@@ -31016,7 +31408,7 @@
         <p:spPr>
           <a:xfrm>
             <a:off x="457200" y="868680"/>
-            <a:ext cx="11277295" cy="3593591"/>
+            <a:ext cx="11277295" cy="3275837"/>
           </a:xfrm>
           <a:prstGeom prst="rect">
             <a:avLst/>
@@ -31046,7 +31438,7 @@
               </a:spcAft>
             </a:pPr>
             <a:r>
-              <a:rPr sz="2000" b="1" i="0" u="none">
+              <a:rPr sz="1900" b="1" i="0" u="none">
                 <a:solidFill>
                   <a:srgbClr val="1E2A4A"/>
                 </a:solidFill>
@@ -31087,7 +31479,7 @@
               </a:spcAft>
             </a:pPr>
             <a:r>
-              <a:rPr sz="1900" b="0" i="0" u="none">
+              <a:rPr sz="1800" b="0" i="0" u="none">
                 <a:solidFill>
                   <a:srgbClr val="222222"/>
                 </a:solidFill>
@@ -31109,7 +31501,7 @@
               </a:spcAft>
             </a:pPr>
             <a:r>
-              <a:rPr sz="1900" b="0" i="0" u="none">
+              <a:rPr sz="1800" b="0" i="0" u="none">
                 <a:solidFill>
                   <a:srgbClr val="222222"/>
                 </a:solidFill>
@@ -31131,7 +31523,7 @@
               </a:spcAft>
             </a:pPr>
             <a:r>
-              <a:rPr sz="1900" b="1" i="0" u="none">
+              <a:rPr sz="1800" b="1" i="0" u="none">
                 <a:solidFill>
                   <a:srgbClr val="C03A2E"/>
                 </a:solidFill>
@@ -31153,7 +31545,7 @@
               </a:spcAft>
             </a:pPr>
             <a:r>
-              <a:rPr sz="1900" b="0" i="0" u="none">
+              <a:rPr sz="1800" b="0" i="0" u="none">
                 <a:solidFill>
                   <a:srgbClr val="222222"/>
                 </a:solidFill>
@@ -31175,7 +31567,7 @@
               </a:spcAft>
             </a:pPr>
             <a:r>
-              <a:rPr sz="1900" b="0" i="0" u="none">
+              <a:rPr sz="1800" b="0" i="0" u="none">
                 <a:solidFill>
                   <a:srgbClr val="222222"/>
                 </a:solidFill>
@@ -31194,7 +31586,7 @@
         </p:nvCxnSpPr>
         <p:spPr>
           <a:xfrm>
-            <a:off x="457200" y="4507991"/>
+            <a:off x="457200" y="4190237"/>
             <a:ext cx="11277295" cy="0"/>
           </a:xfrm>
           <a:prstGeom prst="line">
@@ -31229,8 +31621,8 @@
         </p:nvSpPr>
         <p:spPr>
           <a:xfrm>
-            <a:off x="457200" y="4645151"/>
-            <a:ext cx="11277295" cy="685800"/>
+            <a:off x="457200" y="4327397"/>
+            <a:ext cx="11277295" cy="1003553"/>
           </a:xfrm>
           <a:prstGeom prst="roundRect">
             <a:avLst>
@@ -31281,6 +31673,25 @@
                 <a:latin typeface="맑은 고딕"/>
               </a:rPr>
               <a:t>정답:  ③ Please leave your phone number so that she can't call you back.</a:t>
+            </a:r>
+          </a:p>
+          <a:p>
+            <a:pPr algn="ctr">
+              <a:lnSpc>
+                <a:spcPct val="105000"/>
+              </a:lnSpc>
+              <a:spcBef>
+                <a:spcPts val="0"/>
+              </a:spcBef>
+            </a:pPr>
+            <a:r>
+              <a:rPr sz="1300" b="0" i="0" u="none">
+                <a:solidFill>
+                  <a:srgbClr val="1E2A4A"/>
+                </a:solidFill>
+                <a:latin typeface="맑은 고딕"/>
+              </a:rPr>
+              <a:t>(의미가 어색) 그녀가 당신에게 전화할 수 없도록 전화번호를 남겨 주세요.</a:t>
             </a:r>
           </a:p>
         </p:txBody>
@@ -31732,7 +32143,7 @@
         <p:spPr>
           <a:xfrm>
             <a:off x="457200" y="868680"/>
-            <a:ext cx="11277295" cy="3593591"/>
+            <a:ext cx="11277295" cy="3275837"/>
           </a:xfrm>
           <a:prstGeom prst="rect">
             <a:avLst/>
@@ -31906,7 +32317,7 @@
         <p:spPr>
           <a:xfrm>
             <a:off x="457200" y="868680"/>
-            <a:ext cx="11277295" cy="3593591"/>
+            <a:ext cx="11277295" cy="3275837"/>
           </a:xfrm>
           <a:prstGeom prst="rect">
             <a:avLst/>
@@ -32084,7 +32495,7 @@
         </p:nvCxnSpPr>
         <p:spPr>
           <a:xfrm>
-            <a:off x="457200" y="4507991"/>
+            <a:off x="457200" y="4190237"/>
             <a:ext cx="11277295" cy="0"/>
           </a:xfrm>
           <a:prstGeom prst="line">
@@ -32119,8 +32530,8 @@
         </p:nvSpPr>
         <p:spPr>
           <a:xfrm>
-            <a:off x="457200" y="4645151"/>
-            <a:ext cx="11277295" cy="685800"/>
+            <a:off x="457200" y="4327397"/>
+            <a:ext cx="11277295" cy="1003553"/>
           </a:xfrm>
           <a:prstGeom prst="roundRect">
             <a:avLst>
@@ -32171,6 +32582,25 @@
                 <a:latin typeface="맑은 고딕"/>
               </a:rPr>
               <a:t>정답:  ③ He practiced too hard to learn difficult tricks.</a:t>
+            </a:r>
+          </a:p>
+          <a:p>
+            <a:pPr algn="ctr">
+              <a:lnSpc>
+                <a:spcPct val="105000"/>
+              </a:lnSpc>
+              <a:spcBef>
+                <a:spcPts val="0"/>
+              </a:spcBef>
+            </a:pPr>
+            <a:r>
+              <a:rPr sz="1300" b="0" i="0" u="none">
+                <a:solidFill>
+                  <a:srgbClr val="1E2A4A"/>
+                </a:solidFill>
+                <a:latin typeface="맑은 고딕"/>
+              </a:rPr>
+              <a:t>(의미가 다른 것) 그는 어려운 기술을 배우기에는 너무 열심히 연습했다.</a:t>
             </a:r>
           </a:p>
         </p:txBody>
@@ -32622,7 +33052,7 @@
         <p:spPr>
           <a:xfrm>
             <a:off x="457200" y="868680"/>
-            <a:ext cx="11277295" cy="3593591"/>
+            <a:ext cx="11277295" cy="3275837"/>
           </a:xfrm>
           <a:prstGeom prst="rect">
             <a:avLst/>
@@ -32837,7 +33267,7 @@
         <p:spPr>
           <a:xfrm>
             <a:off x="457200" y="868680"/>
-            <a:ext cx="11277295" cy="3593591"/>
+            <a:ext cx="11277295" cy="3275837"/>
           </a:xfrm>
           <a:prstGeom prst="rect">
             <a:avLst/>
@@ -33056,7 +33486,7 @@
         </p:nvCxnSpPr>
         <p:spPr>
           <a:xfrm>
-            <a:off x="457200" y="4507991"/>
+            <a:off x="457200" y="4190237"/>
             <a:ext cx="11277295" cy="0"/>
           </a:xfrm>
           <a:prstGeom prst="line">
@@ -33091,8 +33521,8 @@
         </p:nvSpPr>
         <p:spPr>
           <a:xfrm>
-            <a:off x="457200" y="4645151"/>
-            <a:ext cx="11277295" cy="685800"/>
+            <a:off x="457200" y="4327397"/>
+            <a:ext cx="11277295" cy="1003553"/>
           </a:xfrm>
           <a:prstGeom prst="roundRect">
             <a:avLst>
@@ -33143,6 +33573,25 @@
                 <a:latin typeface="맑은 고딕"/>
               </a:rPr>
               <a:t>정답:  ② She took a taxi so that she wouldn't be late for work.</a:t>
+            </a:r>
+          </a:p>
+          <a:p>
+            <a:pPr algn="ctr">
+              <a:lnSpc>
+                <a:spcPct val="105000"/>
+              </a:lnSpc>
+              <a:spcBef>
+                <a:spcPts val="0"/>
+              </a:spcBef>
+            </a:pPr>
+            <a:r>
+              <a:rPr sz="1300" b="0" i="0" u="none">
+                <a:solidFill>
+                  <a:srgbClr val="1E2A4A"/>
+                </a:solidFill>
+                <a:latin typeface="맑은 고딕"/>
+              </a:rPr>
+              <a:t>그녀는 직장에 지각하지 않기 위해 택시를 탔다. = 그녀는 직장에 늦지 않도록 택시를 탔다.</a:t>
             </a:r>
           </a:p>
         </p:txBody>
@@ -33594,7 +34043,7 @@
         <p:spPr>
           <a:xfrm>
             <a:off x="457200" y="868680"/>
-            <a:ext cx="11277295" cy="3593591"/>
+            <a:ext cx="11277295" cy="3275837"/>
           </a:xfrm>
           <a:prstGeom prst="rect">
             <a:avLst/>
@@ -33809,7 +34258,7 @@
         <p:spPr>
           <a:xfrm>
             <a:off x="457200" y="868680"/>
-            <a:ext cx="11277295" cy="3593591"/>
+            <a:ext cx="11277295" cy="3275837"/>
           </a:xfrm>
           <a:prstGeom prst="rect">
             <a:avLst/>
@@ -34028,7 +34477,7 @@
         </p:nvCxnSpPr>
         <p:spPr>
           <a:xfrm>
-            <a:off x="457200" y="4507991"/>
+            <a:off x="457200" y="4190237"/>
             <a:ext cx="11277295" cy="0"/>
           </a:xfrm>
           <a:prstGeom prst="line">
@@ -34063,8 +34512,8 @@
         </p:nvSpPr>
         <p:spPr>
           <a:xfrm>
-            <a:off x="457200" y="4645151"/>
-            <a:ext cx="11277295" cy="685800"/>
+            <a:off x="457200" y="4327397"/>
+            <a:ext cx="11277295" cy="1003553"/>
           </a:xfrm>
           <a:prstGeom prst="roundRect">
             <a:avLst>
@@ -34115,6 +34564,25 @@
                 <a:latin typeface="맑은 고딕"/>
               </a:rPr>
               <a:t>정답:  ③ He got up early so that he could catch the first bus.</a:t>
+            </a:r>
+          </a:p>
+          <a:p>
+            <a:pPr algn="ctr">
+              <a:lnSpc>
+                <a:spcPct val="105000"/>
+              </a:lnSpc>
+              <a:spcBef>
+                <a:spcPts val="0"/>
+              </a:spcBef>
+            </a:pPr>
+            <a:r>
+              <a:rPr sz="1300" b="0" i="0" u="none">
+                <a:solidFill>
+                  <a:srgbClr val="1E2A4A"/>
+                </a:solidFill>
+                <a:latin typeface="맑은 고딕"/>
+              </a:rPr>
+              <a:t>그는 첫 버스를 타기 위해 일찍 일어났다. = 그는 첫 버스를 탈 수 있도록 일찍 일어났다.</a:t>
             </a:r>
           </a:p>
         </p:txBody>
@@ -34611,7 +35079,7 @@
         <p:spPr>
           <a:xfrm>
             <a:off x="457200" y="1716023"/>
-            <a:ext cx="8214055" cy="2746247"/>
+            <a:ext cx="8214055" cy="2428493"/>
           </a:xfrm>
           <a:prstGeom prst="rect">
             <a:avLst/>
@@ -34678,7 +35146,7 @@
         <p:spPr>
           <a:xfrm>
             <a:off x="8808415" y="1716023"/>
-            <a:ext cx="2926080" cy="2746247"/>
+            <a:ext cx="2926080" cy="2428493"/>
           </a:xfrm>
           <a:prstGeom prst="roundRect">
             <a:avLst>
@@ -34833,7 +35301,7 @@
         <p:spPr>
           <a:xfrm>
             <a:off x="8808415" y="1716023"/>
-            <a:ext cx="2926080" cy="2746247"/>
+            <a:ext cx="2926080" cy="2428493"/>
           </a:xfrm>
           <a:prstGeom prst="rect">
             <a:avLst/>
@@ -34970,7 +35438,7 @@
         </p:nvCxnSpPr>
         <p:spPr>
           <a:xfrm>
-            <a:off x="457200" y="4507991"/>
+            <a:off x="457200" y="4190237"/>
             <a:ext cx="11277295" cy="0"/>
           </a:xfrm>
           <a:prstGeom prst="line">
@@ -35005,8 +35473,8 @@
         </p:nvSpPr>
         <p:spPr>
           <a:xfrm>
-            <a:off x="457200" y="4645151"/>
-            <a:ext cx="11277295" cy="685800"/>
+            <a:off x="457200" y="4327397"/>
+            <a:ext cx="11277295" cy="1003553"/>
           </a:xfrm>
           <a:prstGeom prst="roundRect">
             <a:avLst>
@@ -35057,6 +35525,25 @@
                 <a:latin typeface="맑은 고딕"/>
               </a:rPr>
               <a:t>정답:  ④ so - could</a:t>
+            </a:r>
+          </a:p>
+          <a:p>
+            <a:pPr algn="ctr">
+              <a:lnSpc>
+                <a:spcPct val="105000"/>
+              </a:lnSpc>
+              <a:spcBef>
+                <a:spcPts val="0"/>
+              </a:spcBef>
+            </a:pPr>
+            <a:r>
+              <a:rPr sz="1300" b="0" i="0" u="none">
+                <a:solidFill>
+                  <a:srgbClr val="1E2A4A"/>
+                </a:solidFill>
+                <a:latin typeface="맑은 고딕"/>
+              </a:rPr>
+              <a:t>그녀는 사진을 찍기 위해 제주도에 갔다. = 그녀는 사진을 찍을 수 있도록 제주도로 여행했다.</a:t>
             </a:r>
           </a:p>
         </p:txBody>
@@ -35508,7 +35995,7 @@
         <p:spPr>
           <a:xfrm>
             <a:off x="457200" y="868680"/>
-            <a:ext cx="11277295" cy="3593591"/>
+            <a:ext cx="11277295" cy="3275837"/>
           </a:xfrm>
           <a:prstGeom prst="rect">
             <a:avLst/>
@@ -35723,7 +36210,7 @@
         <p:spPr>
           <a:xfrm>
             <a:off x="457200" y="868680"/>
-            <a:ext cx="11277295" cy="3593591"/>
+            <a:ext cx="11277295" cy="3275837"/>
           </a:xfrm>
           <a:prstGeom prst="rect">
             <a:avLst/>
@@ -35942,7 +36429,7 @@
         </p:nvCxnSpPr>
         <p:spPr>
           <a:xfrm>
-            <a:off x="457200" y="4507991"/>
+            <a:off x="457200" y="4190237"/>
             <a:ext cx="11277295" cy="0"/>
           </a:xfrm>
           <a:prstGeom prst="line">
@@ -35977,8 +36464,8 @@
         </p:nvSpPr>
         <p:spPr>
           <a:xfrm>
-            <a:off x="457200" y="4645151"/>
-            <a:ext cx="11277295" cy="685800"/>
+            <a:off x="457200" y="4327397"/>
+            <a:ext cx="11277295" cy="1003553"/>
           </a:xfrm>
           <a:prstGeom prst="roundRect">
             <a:avLst>
@@ -36029,6 +36516,25 @@
                 <a:latin typeface="맑은 고딕"/>
               </a:rPr>
               <a:t>정답:  ⑤ He worked hard so that he might make more money.</a:t>
+            </a:r>
+          </a:p>
+          <a:p>
+            <a:pPr algn="ctr">
+              <a:lnSpc>
+                <a:spcPct val="105000"/>
+              </a:lnSpc>
+              <a:spcBef>
+                <a:spcPts val="0"/>
+              </a:spcBef>
+            </a:pPr>
+            <a:r>
+              <a:rPr sz="1300" b="0" i="0" u="none">
+                <a:solidFill>
+                  <a:srgbClr val="1E2A4A"/>
+                </a:solidFill>
+                <a:latin typeface="맑은 고딕"/>
+              </a:rPr>
+              <a:t>그는 더 많은 돈을 벌기 위해 열심히 일했다. = 그는 더 많은 돈을 벌 수 있도록 열심히 일했다.</a:t>
             </a:r>
           </a:p>
         </p:txBody>
@@ -36568,7 +37074,7 @@
         <p:spPr>
           <a:xfrm>
             <a:off x="457200" y="868680"/>
-            <a:ext cx="11277295" cy="3593591"/>
+            <a:ext cx="11277295" cy="3275837"/>
           </a:xfrm>
           <a:prstGeom prst="rect">
             <a:avLst/>
@@ -36783,7 +37289,7 @@
         <p:spPr>
           <a:xfrm>
             <a:off x="457200" y="868680"/>
-            <a:ext cx="11277295" cy="3593591"/>
+            <a:ext cx="11277295" cy="3275837"/>
           </a:xfrm>
           <a:prstGeom prst="rect">
             <a:avLst/>
@@ -37002,7 +37508,7 @@
         </p:nvCxnSpPr>
         <p:spPr>
           <a:xfrm>
-            <a:off x="457200" y="4507991"/>
+            <a:off x="457200" y="4190237"/>
             <a:ext cx="11277295" cy="0"/>
           </a:xfrm>
           <a:prstGeom prst="line">
@@ -37037,8 +37543,8 @@
         </p:nvSpPr>
         <p:spPr>
           <a:xfrm>
-            <a:off x="457200" y="4645151"/>
-            <a:ext cx="11277295" cy="685800"/>
+            <a:off x="457200" y="4327397"/>
+            <a:ext cx="11277295" cy="1003553"/>
           </a:xfrm>
           <a:prstGeom prst="roundRect">
             <a:avLst>
@@ -37089,6 +37595,25 @@
                 <a:latin typeface="맑은 고딕"/>
               </a:rPr>
               <a:t>정답:  ① in order to take a long vacation. / ⑤ in order that we could take a long vacation.</a:t>
+            </a:r>
+          </a:p>
+          <a:p>
+            <a:pPr algn="ctr">
+              <a:lnSpc>
+                <a:spcPct val="105000"/>
+              </a:lnSpc>
+              <a:spcBef>
+                <a:spcPts val="0"/>
+              </a:spcBef>
+            </a:pPr>
+            <a:r>
+              <a:rPr sz="1300" b="0" i="0" u="none">
+                <a:solidFill>
+                  <a:srgbClr val="1E2A4A"/>
+                </a:solidFill>
+                <a:latin typeface="맑은 고딕"/>
+              </a:rPr>
+              <a:t>① 긴 휴가를 가기 위해  /  ⑤ 우리가 긴 휴가를 갈 수 있도록</a:t>
             </a:r>
           </a:p>
         </p:txBody>
@@ -37540,7 +38065,7 @@
         <p:spPr>
           <a:xfrm>
             <a:off x="457200" y="868680"/>
-            <a:ext cx="11277295" cy="3593591"/>
+            <a:ext cx="11277295" cy="3275837"/>
           </a:xfrm>
           <a:prstGeom prst="rect">
             <a:avLst/>
@@ -37755,7 +38280,7 @@
         <p:spPr>
           <a:xfrm>
             <a:off x="457200" y="868680"/>
-            <a:ext cx="11277295" cy="3593591"/>
+            <a:ext cx="11277295" cy="3275837"/>
           </a:xfrm>
           <a:prstGeom prst="rect">
             <a:avLst/>
@@ -37974,7 +38499,7 @@
         </p:nvCxnSpPr>
         <p:spPr>
           <a:xfrm>
-            <a:off x="457200" y="4507991"/>
+            <a:off x="457200" y="4190237"/>
             <a:ext cx="11277295" cy="0"/>
           </a:xfrm>
           <a:prstGeom prst="line">
@@ -38009,8 +38534,8 @@
         </p:nvSpPr>
         <p:spPr>
           <a:xfrm>
-            <a:off x="457200" y="4645151"/>
-            <a:ext cx="11277295" cy="685800"/>
+            <a:off x="457200" y="4327397"/>
+            <a:ext cx="11277295" cy="1003553"/>
           </a:xfrm>
           <a:prstGeom prst="roundRect">
             <a:avLst>
@@ -38061,6 +38586,25 @@
                 <a:latin typeface="맑은 고딕"/>
               </a:rPr>
               <a:t>정답:  ⑤ He saved so much money that he couldn‘t buy a bike.</a:t>
+            </a:r>
+          </a:p>
+          <a:p>
+            <a:pPr algn="ctr">
+              <a:lnSpc>
+                <a:spcPct val="105000"/>
+              </a:lnSpc>
+              <a:spcBef>
+                <a:spcPts val="0"/>
+              </a:spcBef>
+            </a:pPr>
+            <a:r>
+              <a:rPr sz="1300" b="0" i="0" u="none">
+                <a:solidFill>
+                  <a:srgbClr val="1E2A4A"/>
+                </a:solidFill>
+                <a:latin typeface="맑은 고딕"/>
+              </a:rPr>
+              <a:t>(의미가 다른 것) 그는 돈을 너무 많이 모아서 자전거를 살 수 없었다.</a:t>
             </a:r>
           </a:p>
         </p:txBody>
@@ -38512,7 +39056,7 @@
         <p:spPr>
           <a:xfrm>
             <a:off x="457200" y="868680"/>
-            <a:ext cx="11277295" cy="3593591"/>
+            <a:ext cx="11277295" cy="3275837"/>
           </a:xfrm>
           <a:prstGeom prst="rect">
             <a:avLst/>
@@ -38686,7 +39230,7 @@
         <p:spPr>
           <a:xfrm>
             <a:off x="457200" y="868680"/>
-            <a:ext cx="11277295" cy="3593591"/>
+            <a:ext cx="11277295" cy="3275837"/>
           </a:xfrm>
           <a:prstGeom prst="rect">
             <a:avLst/>
@@ -38864,7 +39408,7 @@
         </p:nvCxnSpPr>
         <p:spPr>
           <a:xfrm>
-            <a:off x="457200" y="4507991"/>
+            <a:off x="457200" y="4190237"/>
             <a:ext cx="11277295" cy="0"/>
           </a:xfrm>
           <a:prstGeom prst="line">
@@ -38899,8 +39443,8 @@
         </p:nvSpPr>
         <p:spPr>
           <a:xfrm>
-            <a:off x="457200" y="4645151"/>
-            <a:ext cx="11277295" cy="685800"/>
+            <a:off x="457200" y="4327397"/>
+            <a:ext cx="11277295" cy="1003553"/>
           </a:xfrm>
           <a:prstGeom prst="roundRect">
             <a:avLst>
@@ -38951,6 +39495,25 @@
                 <a:latin typeface="맑은 고딕"/>
               </a:rPr>
               <a:t>정답:  ⑤ She went to the mall, and she bought a new pair of shoes.</a:t>
+            </a:r>
+          </a:p>
+          <a:p>
+            <a:pPr algn="ctr">
+              <a:lnSpc>
+                <a:spcPct val="105000"/>
+              </a:lnSpc>
+              <a:spcBef>
+                <a:spcPts val="0"/>
+              </a:spcBef>
+            </a:pPr>
+            <a:r>
+              <a:rPr sz="1300" b="0" i="0" u="none">
+                <a:solidFill>
+                  <a:srgbClr val="1E2A4A"/>
+                </a:solidFill>
+                <a:latin typeface="맑은 고딕"/>
+              </a:rPr>
+              <a:t>(의미가 다른 것) 그녀는 쇼핑몰에 갔고, 새 신발을 샀다.</a:t>
             </a:r>
           </a:p>
         </p:txBody>
@@ -39402,7 +39965,7 @@
         <p:spPr>
           <a:xfrm>
             <a:off x="457200" y="868680"/>
-            <a:ext cx="11277295" cy="3593591"/>
+            <a:ext cx="11277295" cy="3067811"/>
           </a:xfrm>
           <a:prstGeom prst="rect">
             <a:avLst/>
@@ -39427,7 +39990,7 @@
               </a:spcAft>
             </a:pPr>
             <a:r>
-              <a:rPr sz="1700" b="1" i="0" u="none">
+              <a:rPr sz="1400" b="1" i="0" u="none">
                 <a:solidFill>
                   <a:srgbClr val="1E2A4A"/>
                 </a:solidFill>
@@ -39468,7 +40031,7 @@
               </a:spcAft>
             </a:pPr>
             <a:r>
-              <a:rPr sz="1600" b="0" i="0" u="none">
+              <a:rPr sz="1300" b="0" i="0" u="none">
                 <a:solidFill>
                   <a:srgbClr val="222222"/>
                 </a:solidFill>
@@ -39490,7 +40053,7 @@
               </a:spcAft>
             </a:pPr>
             <a:r>
-              <a:rPr sz="1600" b="0" i="0" u="none">
+              <a:rPr sz="1300" b="0" i="0" u="none">
                 <a:solidFill>
                   <a:srgbClr val="222222"/>
                 </a:solidFill>
@@ -39512,7 +40075,7 @@
               </a:spcAft>
             </a:pPr>
             <a:r>
-              <a:rPr sz="1600" b="0" i="0" u="none">
+              <a:rPr sz="1300" b="0" i="0" u="none">
                 <a:solidFill>
                   <a:srgbClr val="222222"/>
                 </a:solidFill>
@@ -39534,7 +40097,7 @@
               </a:spcAft>
             </a:pPr>
             <a:r>
-              <a:rPr sz="1600" b="0" i="0" u="none">
+              <a:rPr sz="1300" b="0" i="0" u="none">
                 <a:solidFill>
                   <a:srgbClr val="222222"/>
                 </a:solidFill>
@@ -39556,7 +40119,7 @@
               </a:spcAft>
             </a:pPr>
             <a:r>
-              <a:rPr sz="1600" b="0" i="0" u="none">
+              <a:rPr sz="1300" b="0" i="0" u="none">
                 <a:solidFill>
                   <a:srgbClr val="222222"/>
                 </a:solidFill>
@@ -39578,7 +40141,7 @@
               </a:spcAft>
             </a:pPr>
             <a:r>
-              <a:rPr sz="1600" b="0" i="0" u="none">
+              <a:rPr sz="1300" b="0" i="0" u="none">
                 <a:solidFill>
                   <a:srgbClr val="222222"/>
                 </a:solidFill>
@@ -39600,7 +40163,7 @@
               </a:spcAft>
             </a:pPr>
             <a:r>
-              <a:rPr sz="1600" b="0" i="0" u="none">
+              <a:rPr sz="1300" b="0" i="0" u="none">
                 <a:solidFill>
                   <a:srgbClr val="222222"/>
                 </a:solidFill>
@@ -39622,7 +40185,7 @@
               </a:spcAft>
             </a:pPr>
             <a:r>
-              <a:rPr sz="1600" b="0" i="0" u="none">
+              <a:rPr sz="1300" b="0" i="0" u="none">
                 <a:solidFill>
                   <a:srgbClr val="222222"/>
                 </a:solidFill>
@@ -39644,7 +40207,7 @@
               </a:spcAft>
             </a:pPr>
             <a:r>
-              <a:rPr sz="1600" b="0" i="0" u="none">
+              <a:rPr sz="1300" b="0" i="0" u="none">
                 <a:solidFill>
                   <a:srgbClr val="222222"/>
                 </a:solidFill>
@@ -39666,7 +40229,7 @@
               </a:spcAft>
             </a:pPr>
             <a:r>
-              <a:rPr sz="1600" b="0" i="0" u="none">
+              <a:rPr sz="1300" b="0" i="0" u="none">
                 <a:solidFill>
                   <a:srgbClr val="222222"/>
                 </a:solidFill>
@@ -39686,7 +40249,7 @@
         <p:spPr>
           <a:xfrm>
             <a:off x="457200" y="868680"/>
-            <a:ext cx="11277295" cy="3593591"/>
+            <a:ext cx="11277295" cy="3067811"/>
           </a:xfrm>
           <a:prstGeom prst="rect">
             <a:avLst/>
@@ -39716,7 +40279,7 @@
               </a:spcAft>
             </a:pPr>
             <a:r>
-              <a:rPr sz="1700" b="1" i="0" u="none">
+              <a:rPr sz="1400" b="1" i="0" u="none">
                 <a:solidFill>
                   <a:srgbClr val="1E2A4A"/>
                 </a:solidFill>
@@ -39757,7 +40320,7 @@
               </a:spcAft>
             </a:pPr>
             <a:r>
-              <a:rPr sz="1600" b="0" i="0" u="none">
+              <a:rPr sz="1300" b="0" i="0" u="none">
                 <a:solidFill>
                   <a:srgbClr val="222222"/>
                 </a:solidFill>
@@ -39779,7 +40342,7 @@
               </a:spcAft>
             </a:pPr>
             <a:r>
-              <a:rPr sz="1600" b="0" i="0" u="none">
+              <a:rPr sz="1300" b="0" i="0" u="none">
                 <a:solidFill>
                   <a:srgbClr val="222222"/>
                 </a:solidFill>
@@ -39801,7 +40364,7 @@
               </a:spcAft>
             </a:pPr>
             <a:r>
-              <a:rPr sz="1600" b="0" i="0" u="none">
+              <a:rPr sz="1300" b="0" i="0" u="none">
                 <a:solidFill>
                   <a:srgbClr val="222222"/>
                 </a:solidFill>
@@ -39823,7 +40386,7 @@
               </a:spcAft>
             </a:pPr>
             <a:r>
-              <a:rPr sz="1600" b="0" i="0" u="none">
+              <a:rPr sz="1300" b="0" i="0" u="none">
                 <a:solidFill>
                   <a:srgbClr val="222222"/>
                 </a:solidFill>
@@ -39845,7 +40408,7 @@
               </a:spcAft>
             </a:pPr>
             <a:r>
-              <a:rPr sz="1600" b="0" i="0" u="none">
+              <a:rPr sz="1300" b="0" i="0" u="none">
                 <a:solidFill>
                   <a:srgbClr val="222222"/>
                 </a:solidFill>
@@ -39867,7 +40430,7 @@
               </a:spcAft>
             </a:pPr>
             <a:r>
-              <a:rPr sz="1600" b="0" i="0" u="none">
+              <a:rPr sz="1300" b="0" i="0" u="none">
                 <a:solidFill>
                   <a:srgbClr val="222222"/>
                 </a:solidFill>
@@ -39889,7 +40452,7 @@
               </a:spcAft>
             </a:pPr>
             <a:r>
-              <a:rPr sz="1600" b="0" i="0" u="none">
+              <a:rPr sz="1300" b="0" i="0" u="none">
                 <a:solidFill>
                   <a:srgbClr val="222222"/>
                 </a:solidFill>
@@ -39911,7 +40474,7 @@
               </a:spcAft>
             </a:pPr>
             <a:r>
-              <a:rPr sz="1600" b="0" i="0" u="none">
+              <a:rPr sz="1300" b="0" i="0" u="none">
                 <a:solidFill>
                   <a:srgbClr val="222222"/>
                 </a:solidFill>
@@ -39933,7 +40496,7 @@
               </a:spcAft>
             </a:pPr>
             <a:r>
-              <a:rPr sz="1600" b="1" i="0" u="none">
+              <a:rPr sz="1300" b="1" i="0" u="none">
                 <a:solidFill>
                   <a:srgbClr val="C03A2E"/>
                 </a:solidFill>
@@ -39955,7 +40518,7 @@
               </a:spcAft>
             </a:pPr>
             <a:r>
-              <a:rPr sz="1600" b="1" i="0" u="none">
+              <a:rPr sz="1300" b="1" i="0" u="none">
                 <a:solidFill>
                   <a:srgbClr val="C03A2E"/>
                 </a:solidFill>
@@ -39974,7 +40537,7 @@
         </p:nvCxnSpPr>
         <p:spPr>
           <a:xfrm>
-            <a:off x="457200" y="4507991"/>
+            <a:off x="457200" y="3982211"/>
             <a:ext cx="11277295" cy="0"/>
           </a:xfrm>
           <a:prstGeom prst="line">
@@ -40009,8 +40572,8 @@
         </p:nvSpPr>
         <p:spPr>
           <a:xfrm>
-            <a:off x="457200" y="4645151"/>
-            <a:ext cx="11277295" cy="685800"/>
+            <a:off x="457200" y="4119371"/>
+            <a:ext cx="11277295" cy="1211580"/>
           </a:xfrm>
           <a:prstGeom prst="roundRect">
             <a:avLst>
@@ -40062,6 +40625,25 @@
               </a:rPr>
               <a:t>정답:  ⑤ I left early to avoid the rush hour.
 = I left early, so I could avoid the rush hour.</a:t>
+            </a:r>
+          </a:p>
+          <a:p>
+            <a:pPr algn="ctr">
+              <a:lnSpc>
+                <a:spcPct val="105000"/>
+              </a:lnSpc>
+              <a:spcBef>
+                <a:spcPts val="0"/>
+              </a:spcBef>
+            </a:pPr>
+            <a:r>
+              <a:rPr sz="1300" b="0" i="0" u="none">
+                <a:solidFill>
+                  <a:srgbClr val="1E2A4A"/>
+                </a:solidFill>
+                <a:latin typeface="맑은 고딕"/>
+              </a:rPr>
+              <a:t>(적절하지 않은 것) 나는 혼잡 시간대를 피하기 위해 일찍 떠났다. = 나는 일찍 떠났고, 그래서 혼잡 시간대를 피할 수 있었다.</a:t>
             </a:r>
           </a:p>
         </p:txBody>
@@ -40513,7 +41095,7 @@
         <p:spPr>
           <a:xfrm>
             <a:off x="457200" y="868680"/>
-            <a:ext cx="11277295" cy="3593591"/>
+            <a:ext cx="11277295" cy="3275837"/>
           </a:xfrm>
           <a:prstGeom prst="rect">
             <a:avLst/>
@@ -40538,7 +41120,7 @@
               </a:spcAft>
             </a:pPr>
             <a:r>
-              <a:rPr sz="1700" b="1" i="0" u="none">
+              <a:rPr sz="1500" b="1" i="0" u="none">
                 <a:solidFill>
                   <a:srgbClr val="1E2A4A"/>
                 </a:solidFill>
@@ -40579,7 +41161,7 @@
               </a:spcAft>
             </a:pPr>
             <a:r>
-              <a:rPr sz="1600" b="0" i="0" u="none">
+              <a:rPr sz="1400" b="0" i="0" u="none">
                 <a:solidFill>
                   <a:srgbClr val="222222"/>
                 </a:solidFill>
@@ -40601,7 +41183,7 @@
               </a:spcAft>
             </a:pPr>
             <a:r>
-              <a:rPr sz="1600" b="0" i="0" u="none">
+              <a:rPr sz="1400" b="0" i="0" u="none">
                 <a:solidFill>
                   <a:srgbClr val="222222"/>
                 </a:solidFill>
@@ -40623,7 +41205,7 @@
               </a:spcAft>
             </a:pPr>
             <a:r>
-              <a:rPr sz="1600" b="0" i="0" u="none">
+              <a:rPr sz="1400" b="0" i="0" u="none">
                 <a:solidFill>
                   <a:srgbClr val="222222"/>
                 </a:solidFill>
@@ -40645,7 +41227,7 @@
               </a:spcAft>
             </a:pPr>
             <a:r>
-              <a:rPr sz="1600" b="0" i="0" u="none">
+              <a:rPr sz="1400" b="0" i="0" u="none">
                 <a:solidFill>
                   <a:srgbClr val="222222"/>
                 </a:solidFill>
@@ -40667,7 +41249,7 @@
               </a:spcAft>
             </a:pPr>
             <a:r>
-              <a:rPr sz="1600" b="0" i="0" u="none">
+              <a:rPr sz="1400" b="0" i="0" u="none">
                 <a:solidFill>
                   <a:srgbClr val="222222"/>
                 </a:solidFill>
@@ -40689,7 +41271,7 @@
               </a:spcAft>
             </a:pPr>
             <a:r>
-              <a:rPr sz="1600" b="0" i="0" u="none">
+              <a:rPr sz="1400" b="0" i="0" u="none">
                 <a:solidFill>
                   <a:srgbClr val="222222"/>
                 </a:solidFill>
@@ -40711,7 +41293,7 @@
               </a:spcAft>
             </a:pPr>
             <a:r>
-              <a:rPr sz="1600" b="0" i="0" u="none">
+              <a:rPr sz="1400" b="0" i="0" u="none">
                 <a:solidFill>
                   <a:srgbClr val="222222"/>
                 </a:solidFill>
@@ -40733,7 +41315,7 @@
               </a:spcAft>
             </a:pPr>
             <a:r>
-              <a:rPr sz="1600" b="0" i="0" u="none">
+              <a:rPr sz="1400" b="0" i="0" u="none">
                 <a:solidFill>
                   <a:srgbClr val="222222"/>
                 </a:solidFill>
@@ -40755,7 +41337,7 @@
               </a:spcAft>
             </a:pPr>
             <a:r>
-              <a:rPr sz="1600" b="0" i="0" u="none">
+              <a:rPr sz="1400" b="0" i="0" u="none">
                 <a:solidFill>
                   <a:srgbClr val="222222"/>
                 </a:solidFill>
@@ -40777,7 +41359,7 @@
               </a:spcAft>
             </a:pPr>
             <a:r>
-              <a:rPr sz="1600" b="0" i="0" u="none">
+              <a:rPr sz="1400" b="0" i="0" u="none">
                 <a:solidFill>
                   <a:srgbClr val="222222"/>
                 </a:solidFill>
@@ -40797,7 +41379,7 @@
         <p:spPr>
           <a:xfrm>
             <a:off x="457200" y="868680"/>
-            <a:ext cx="11277295" cy="3593591"/>
+            <a:ext cx="11277295" cy="3275837"/>
           </a:xfrm>
           <a:prstGeom prst="rect">
             <a:avLst/>
@@ -40827,7 +41409,7 @@
               </a:spcAft>
             </a:pPr>
             <a:r>
-              <a:rPr sz="1700" b="1" i="0" u="none">
+              <a:rPr sz="1500" b="1" i="0" u="none">
                 <a:solidFill>
                   <a:srgbClr val="1E2A4A"/>
                 </a:solidFill>
@@ -40868,7 +41450,7 @@
               </a:spcAft>
             </a:pPr>
             <a:r>
-              <a:rPr sz="1600" b="0" i="0" u="none">
+              <a:rPr sz="1400" b="0" i="0" u="none">
                 <a:solidFill>
                   <a:srgbClr val="222222"/>
                 </a:solidFill>
@@ -40890,7 +41472,7 @@
               </a:spcAft>
             </a:pPr>
             <a:r>
-              <a:rPr sz="1600" b="0" i="0" u="none">
+              <a:rPr sz="1400" b="0" i="0" u="none">
                 <a:solidFill>
                   <a:srgbClr val="222222"/>
                 </a:solidFill>
@@ -40912,7 +41494,7 @@
               </a:spcAft>
             </a:pPr>
             <a:r>
-              <a:rPr sz="1600" b="0" i="0" u="none">
+              <a:rPr sz="1400" b="0" i="0" u="none">
                 <a:solidFill>
                   <a:srgbClr val="222222"/>
                 </a:solidFill>
@@ -40934,7 +41516,7 @@
               </a:spcAft>
             </a:pPr>
             <a:r>
-              <a:rPr sz="1600" b="0" i="0" u="none">
+              <a:rPr sz="1400" b="0" i="0" u="none">
                 <a:solidFill>
                   <a:srgbClr val="222222"/>
                 </a:solidFill>
@@ -40956,7 +41538,7 @@
               </a:spcAft>
             </a:pPr>
             <a:r>
-              <a:rPr sz="1600" b="1" i="0" u="none">
+              <a:rPr sz="1400" b="1" i="0" u="none">
                 <a:solidFill>
                   <a:srgbClr val="C03A2E"/>
                 </a:solidFill>
@@ -40978,7 +41560,7 @@
               </a:spcAft>
             </a:pPr>
             <a:r>
-              <a:rPr sz="1600" b="1" i="0" u="none">
+              <a:rPr sz="1400" b="1" i="0" u="none">
                 <a:solidFill>
                   <a:srgbClr val="C03A2E"/>
                 </a:solidFill>
@@ -41000,7 +41582,7 @@
               </a:spcAft>
             </a:pPr>
             <a:r>
-              <a:rPr sz="1600" b="0" i="0" u="none">
+              <a:rPr sz="1400" b="0" i="0" u="none">
                 <a:solidFill>
                   <a:srgbClr val="222222"/>
                 </a:solidFill>
@@ -41022,7 +41604,7 @@
               </a:spcAft>
             </a:pPr>
             <a:r>
-              <a:rPr sz="1600" b="0" i="0" u="none">
+              <a:rPr sz="1400" b="0" i="0" u="none">
                 <a:solidFill>
                   <a:srgbClr val="222222"/>
                 </a:solidFill>
@@ -41044,7 +41626,7 @@
               </a:spcAft>
             </a:pPr>
             <a:r>
-              <a:rPr sz="1600" b="0" i="0" u="none">
+              <a:rPr sz="1400" b="0" i="0" u="none">
                 <a:solidFill>
                   <a:srgbClr val="222222"/>
                 </a:solidFill>
@@ -41066,7 +41648,7 @@
               </a:spcAft>
             </a:pPr>
             <a:r>
-              <a:rPr sz="1600" b="0" i="0" u="none">
+              <a:rPr sz="1400" b="0" i="0" u="none">
                 <a:solidFill>
                   <a:srgbClr val="222222"/>
                 </a:solidFill>
@@ -41085,7 +41667,7 @@
         </p:nvCxnSpPr>
         <p:spPr>
           <a:xfrm>
-            <a:off x="457200" y="4507991"/>
+            <a:off x="457200" y="4190237"/>
             <a:ext cx="11277295" cy="0"/>
           </a:xfrm>
           <a:prstGeom prst="line">
@@ -41120,8 +41702,8 @@
         </p:nvSpPr>
         <p:spPr>
           <a:xfrm>
-            <a:off x="457200" y="4645151"/>
-            <a:ext cx="11277295" cy="685800"/>
+            <a:off x="457200" y="4327397"/>
+            <a:ext cx="11277295" cy="1003553"/>
           </a:xfrm>
           <a:prstGeom prst="roundRect">
             <a:avLst>
@@ -41173,6 +41755,25 @@
               </a:rPr>
               <a:t>정답:  ③ Fasten your seat belt so that you may not get hurt.
 = Fasten your seat belt to get hurt.</a:t>
+            </a:r>
+          </a:p>
+          <a:p>
+            <a:pPr algn="ctr">
+              <a:lnSpc>
+                <a:spcPct val="105000"/>
+              </a:lnSpc>
+              <a:spcBef>
+                <a:spcPts val="0"/>
+              </a:spcBef>
+            </a:pPr>
+            <a:r>
+              <a:rPr sz="1300" b="0" i="0" u="none">
+                <a:solidFill>
+                  <a:srgbClr val="1E2A4A"/>
+                </a:solidFill>
+                <a:latin typeface="맑은 고딕"/>
+              </a:rPr>
+              <a:t>(같은 의미가 아닌 것) 다치지 않도록 안전벨트를 매세요. = 다치기 위해 안전벨트를 매세요.</a:t>
             </a:r>
           </a:p>
         </p:txBody>
@@ -41624,7 +42225,7 @@
         <p:spPr>
           <a:xfrm>
             <a:off x="457200" y="868680"/>
-            <a:ext cx="11277295" cy="3593591"/>
+            <a:ext cx="11277295" cy="3067811"/>
           </a:xfrm>
           <a:prstGeom prst="rect">
             <a:avLst/>
@@ -41649,7 +42250,7 @@
               </a:spcAft>
             </a:pPr>
             <a:r>
-              <a:rPr sz="1700" b="1" i="0" u="none">
+              <a:rPr sz="1400" b="1" i="0" u="none">
                 <a:solidFill>
                   <a:srgbClr val="1E2A4A"/>
                 </a:solidFill>
@@ -41690,7 +42291,7 @@
               </a:spcAft>
             </a:pPr>
             <a:r>
-              <a:rPr sz="1600" b="0" i="0" u="none">
+              <a:rPr sz="1300" b="0" i="0" u="none">
                 <a:solidFill>
                   <a:srgbClr val="222222"/>
                 </a:solidFill>
@@ -41712,7 +42313,7 @@
               </a:spcAft>
             </a:pPr>
             <a:r>
-              <a:rPr sz="1600" b="0" i="0" u="none">
+              <a:rPr sz="1300" b="0" i="0" u="none">
                 <a:solidFill>
                   <a:srgbClr val="222222"/>
                 </a:solidFill>
@@ -41734,7 +42335,7 @@
               </a:spcAft>
             </a:pPr>
             <a:r>
-              <a:rPr sz="1600" b="0" i="0" u="none">
+              <a:rPr sz="1300" b="0" i="0" u="none">
                 <a:solidFill>
                   <a:srgbClr val="222222"/>
                 </a:solidFill>
@@ -41756,7 +42357,7 @@
               </a:spcAft>
             </a:pPr>
             <a:r>
-              <a:rPr sz="1600" b="0" i="0" u="none">
+              <a:rPr sz="1300" b="0" i="0" u="none">
                 <a:solidFill>
                   <a:srgbClr val="222222"/>
                 </a:solidFill>
@@ -41778,7 +42379,7 @@
               </a:spcAft>
             </a:pPr>
             <a:r>
-              <a:rPr sz="1600" b="0" i="0" u="none">
+              <a:rPr sz="1300" b="0" i="0" u="none">
                 <a:solidFill>
                   <a:srgbClr val="222222"/>
                 </a:solidFill>
@@ -41800,7 +42401,7 @@
               </a:spcAft>
             </a:pPr>
             <a:r>
-              <a:rPr sz="1600" b="0" i="0" u="none">
+              <a:rPr sz="1300" b="0" i="0" u="none">
                 <a:solidFill>
                   <a:srgbClr val="222222"/>
                 </a:solidFill>
@@ -41822,7 +42423,7 @@
               </a:spcAft>
             </a:pPr>
             <a:r>
-              <a:rPr sz="1600" b="0" i="0" u="none">
+              <a:rPr sz="1300" b="0" i="0" u="none">
                 <a:solidFill>
                   <a:srgbClr val="222222"/>
                 </a:solidFill>
@@ -41844,7 +42445,7 @@
               </a:spcAft>
             </a:pPr>
             <a:r>
-              <a:rPr sz="1600" b="0" i="0" u="none">
+              <a:rPr sz="1300" b="0" i="0" u="none">
                 <a:solidFill>
                   <a:srgbClr val="222222"/>
                 </a:solidFill>
@@ -41866,7 +42467,7 @@
               </a:spcAft>
             </a:pPr>
             <a:r>
-              <a:rPr sz="1600" b="0" i="0" u="none">
+              <a:rPr sz="1300" b="0" i="0" u="none">
                 <a:solidFill>
                   <a:srgbClr val="222222"/>
                 </a:solidFill>
@@ -41888,7 +42489,7 @@
               </a:spcAft>
             </a:pPr>
             <a:r>
-              <a:rPr sz="1600" b="0" i="0" u="none">
+              <a:rPr sz="1300" b="0" i="0" u="none">
                 <a:solidFill>
                   <a:srgbClr val="222222"/>
                 </a:solidFill>
@@ -41908,7 +42509,7 @@
         <p:spPr>
           <a:xfrm>
             <a:off x="457200" y="868680"/>
-            <a:ext cx="11277295" cy="3593591"/>
+            <a:ext cx="11277295" cy="3067811"/>
           </a:xfrm>
           <a:prstGeom prst="rect">
             <a:avLst/>
@@ -41938,7 +42539,7 @@
               </a:spcAft>
             </a:pPr>
             <a:r>
-              <a:rPr sz="1700" b="1" i="0" u="none">
+              <a:rPr sz="1400" b="1" i="0" u="none">
                 <a:solidFill>
                   <a:srgbClr val="1E2A4A"/>
                 </a:solidFill>
@@ -41979,7 +42580,7 @@
               </a:spcAft>
             </a:pPr>
             <a:r>
-              <a:rPr sz="1600" b="1" i="0" u="none">
+              <a:rPr sz="1300" b="1" i="0" u="none">
                 <a:solidFill>
                   <a:srgbClr val="C03A2E"/>
                 </a:solidFill>
@@ -42001,7 +42602,7 @@
               </a:spcAft>
             </a:pPr>
             <a:r>
-              <a:rPr sz="1600" b="1" i="0" u="none">
+              <a:rPr sz="1300" b="1" i="0" u="none">
                 <a:solidFill>
                   <a:srgbClr val="C03A2E"/>
                 </a:solidFill>
@@ -42023,7 +42624,7 @@
               </a:spcAft>
             </a:pPr>
             <a:r>
-              <a:rPr sz="1600" b="0" i="0" u="none">
+              <a:rPr sz="1300" b="0" i="0" u="none">
                 <a:solidFill>
                   <a:srgbClr val="222222"/>
                 </a:solidFill>
@@ -42045,7 +42646,7 @@
               </a:spcAft>
             </a:pPr>
             <a:r>
-              <a:rPr sz="1600" b="0" i="0" u="none">
+              <a:rPr sz="1300" b="0" i="0" u="none">
                 <a:solidFill>
                   <a:srgbClr val="222222"/>
                 </a:solidFill>
@@ -42067,7 +42668,7 @@
               </a:spcAft>
             </a:pPr>
             <a:r>
-              <a:rPr sz="1600" b="0" i="0" u="none">
+              <a:rPr sz="1300" b="0" i="0" u="none">
                 <a:solidFill>
                   <a:srgbClr val="222222"/>
                 </a:solidFill>
@@ -42089,7 +42690,7 @@
               </a:spcAft>
             </a:pPr>
             <a:r>
-              <a:rPr sz="1600" b="0" i="0" u="none">
+              <a:rPr sz="1300" b="0" i="0" u="none">
                 <a:solidFill>
                   <a:srgbClr val="222222"/>
                 </a:solidFill>
@@ -42111,7 +42712,7 @@
               </a:spcAft>
             </a:pPr>
             <a:r>
-              <a:rPr sz="1600" b="0" i="0" u="none">
+              <a:rPr sz="1300" b="0" i="0" u="none">
                 <a:solidFill>
                   <a:srgbClr val="222222"/>
                 </a:solidFill>
@@ -42133,7 +42734,7 @@
               </a:spcAft>
             </a:pPr>
             <a:r>
-              <a:rPr sz="1600" b="0" i="0" u="none">
+              <a:rPr sz="1300" b="0" i="0" u="none">
                 <a:solidFill>
                   <a:srgbClr val="222222"/>
                 </a:solidFill>
@@ -42155,7 +42756,7 @@
               </a:spcAft>
             </a:pPr>
             <a:r>
-              <a:rPr sz="1600" b="0" i="0" u="none">
+              <a:rPr sz="1300" b="0" i="0" u="none">
                 <a:solidFill>
                   <a:srgbClr val="222222"/>
                 </a:solidFill>
@@ -42177,7 +42778,7 @@
               </a:spcAft>
             </a:pPr>
             <a:r>
-              <a:rPr sz="1600" b="0" i="0" u="none">
+              <a:rPr sz="1300" b="0" i="0" u="none">
                 <a:solidFill>
                   <a:srgbClr val="222222"/>
                 </a:solidFill>
@@ -42196,7 +42797,7 @@
         </p:nvCxnSpPr>
         <p:spPr>
           <a:xfrm>
-            <a:off x="457200" y="4507991"/>
+            <a:off x="457200" y="3982211"/>
             <a:ext cx="11277295" cy="0"/>
           </a:xfrm>
           <a:prstGeom prst="line">
@@ -42231,8 +42832,8 @@
         </p:nvSpPr>
         <p:spPr>
           <a:xfrm>
-            <a:off x="457200" y="4645151"/>
-            <a:ext cx="11277295" cy="685800"/>
+            <a:off x="457200" y="4119371"/>
+            <a:ext cx="11277295" cy="1211580"/>
           </a:xfrm>
           <a:prstGeom prst="roundRect">
             <a:avLst>
@@ -42284,6 +42885,25 @@
               </a:rPr>
               <a:t>정답:  ① He turned down the radio so that I could get to sleep.
 = He turned down the radio in order to get to sleep.</a:t>
+            </a:r>
+          </a:p>
+          <a:p>
+            <a:pPr algn="ctr">
+              <a:lnSpc>
+                <a:spcPct val="105000"/>
+              </a:lnSpc>
+              <a:spcBef>
+                <a:spcPts val="0"/>
+              </a:spcBef>
+            </a:pPr>
+            <a:r>
+              <a:rPr sz="1300" b="0" i="0" u="none">
+                <a:solidFill>
+                  <a:srgbClr val="1E2A4A"/>
+                </a:solidFill>
+                <a:latin typeface="맑은 고딕"/>
+              </a:rPr>
+              <a:t>(서로 다른 것) 그는 내가 잠들 수 있도록 라디오 소리를 줄였다. = 그는 (자신이) 잠들기 위해 라디오 소리를 줄였다.</a:t>
             </a:r>
           </a:p>
         </p:txBody>
@@ -42757,7 +43377,7 @@
         <p:spPr>
           <a:xfrm>
             <a:off x="457200" y="868680"/>
-            <a:ext cx="11277295" cy="3593591"/>
+            <a:ext cx="11277295" cy="3275837"/>
           </a:xfrm>
           <a:prstGeom prst="rect">
             <a:avLst/>
@@ -42931,7 +43551,7 @@
         <p:spPr>
           <a:xfrm>
             <a:off x="457200" y="868680"/>
-            <a:ext cx="11277295" cy="3593591"/>
+            <a:ext cx="11277295" cy="3275837"/>
           </a:xfrm>
           <a:prstGeom prst="rect">
             <a:avLst/>
@@ -43109,7 +43729,7 @@
         </p:nvCxnSpPr>
         <p:spPr>
           <a:xfrm>
-            <a:off x="457200" y="4507991"/>
+            <a:off x="457200" y="4190237"/>
             <a:ext cx="11277295" cy="0"/>
           </a:xfrm>
           <a:prstGeom prst="line">
@@ -43144,8 +43764,8 @@
         </p:nvSpPr>
         <p:spPr>
           <a:xfrm>
-            <a:off x="457200" y="4645151"/>
-            <a:ext cx="11277295" cy="685800"/>
+            <a:off x="457200" y="4327397"/>
+            <a:ext cx="11277295" cy="1003553"/>
           </a:xfrm>
           <a:prstGeom prst="roundRect">
             <a:avLst>
@@ -43196,6 +43816,25 @@
                 <a:latin typeface="맑은 고딕"/>
               </a:rPr>
               <a:t>정답:  ② Many parents ask their children not to hang out with bad friends.</a:t>
+            </a:r>
+          </a:p>
+          <a:p>
+            <a:pPr algn="ctr">
+              <a:lnSpc>
+                <a:spcPct val="105000"/>
+              </a:lnSpc>
+              <a:spcBef>
+                <a:spcPts val="0"/>
+              </a:spcBef>
+            </a:pPr>
+            <a:r>
+              <a:rPr sz="1300" b="0" i="0" u="none">
+                <a:solidFill>
+                  <a:srgbClr val="1E2A4A"/>
+                </a:solidFill>
+                <a:latin typeface="맑은 고딕"/>
+              </a:rPr>
+              <a:t>많은 부모들은 자녀들에게 나쁜 친구들과 어울려 다니지 말라고 말한다.</a:t>
             </a:r>
           </a:p>
         </p:txBody>
@@ -43713,7 +44352,7 @@
         <p:spPr>
           <a:xfrm>
             <a:off x="457200" y="868680"/>
-            <a:ext cx="11277295" cy="3593591"/>
+            <a:ext cx="11277295" cy="3275837"/>
           </a:xfrm>
           <a:prstGeom prst="rect">
             <a:avLst/>
@@ -43887,7 +44526,7 @@
         <p:spPr>
           <a:xfrm>
             <a:off x="457200" y="868680"/>
-            <a:ext cx="11277295" cy="3593591"/>
+            <a:ext cx="11277295" cy="3275837"/>
           </a:xfrm>
           <a:prstGeom prst="rect">
             <a:avLst/>
@@ -44065,7 +44704,7 @@
         </p:nvCxnSpPr>
         <p:spPr>
           <a:xfrm>
-            <a:off x="457200" y="4507991"/>
+            <a:off x="457200" y="4190237"/>
             <a:ext cx="11277295" cy="0"/>
           </a:xfrm>
           <a:prstGeom prst="line">
@@ -44100,8 +44739,8 @@
         </p:nvSpPr>
         <p:spPr>
           <a:xfrm>
-            <a:off x="457200" y="4645151"/>
-            <a:ext cx="11277295" cy="685800"/>
+            <a:off x="457200" y="4327397"/>
+            <a:ext cx="11277295" cy="1003553"/>
           </a:xfrm>
           <a:prstGeom prst="roundRect">
             <a:avLst>
@@ -44152,6 +44791,25 @@
                 <a:latin typeface="맑은 고딕"/>
               </a:rPr>
               <a:t>정답:  ② Turn the fish carefully so as to it won't burn.</a:t>
+            </a:r>
+          </a:p>
+          <a:p>
+            <a:pPr algn="ctr">
+              <a:lnSpc>
+                <a:spcPct val="105000"/>
+              </a:lnSpc>
+              <a:spcBef>
+                <a:spcPts val="0"/>
+              </a:spcBef>
+            </a:pPr>
+            <a:r>
+              <a:rPr sz="1300" b="0" i="0" u="none">
+                <a:solidFill>
+                  <a:srgbClr val="1E2A4A"/>
+                </a:solidFill>
+                <a:latin typeface="맑은 고딕"/>
+              </a:rPr>
+              <a:t>(어색) 생선이 타지 않도록 조심해서 뒤집어라. (so as to it → so that it)</a:t>
             </a:r>
           </a:p>
         </p:txBody>
@@ -44603,7 +45261,7 @@
         <p:spPr>
           <a:xfrm>
             <a:off x="457200" y="868680"/>
-            <a:ext cx="11277295" cy="3593591"/>
+            <a:ext cx="11277295" cy="3275837"/>
           </a:xfrm>
           <a:prstGeom prst="rect">
             <a:avLst/>
@@ -44777,7 +45435,7 @@
         <p:spPr>
           <a:xfrm>
             <a:off x="457200" y="868680"/>
-            <a:ext cx="11277295" cy="3593591"/>
+            <a:ext cx="11277295" cy="3275837"/>
           </a:xfrm>
           <a:prstGeom prst="rect">
             <a:avLst/>
@@ -44955,7 +45613,7 @@
         </p:nvCxnSpPr>
         <p:spPr>
           <a:xfrm>
-            <a:off x="457200" y="4507991"/>
+            <a:off x="457200" y="4190237"/>
             <a:ext cx="11277295" cy="0"/>
           </a:xfrm>
           <a:prstGeom prst="line">
@@ -44990,8 +45648,8 @@
         </p:nvSpPr>
         <p:spPr>
           <a:xfrm>
-            <a:off x="457200" y="4645151"/>
-            <a:ext cx="11277295" cy="685800"/>
+            <a:off x="457200" y="4327397"/>
+            <a:ext cx="11277295" cy="1003553"/>
           </a:xfrm>
           <a:prstGeom prst="roundRect">
             <a:avLst>
@@ -45042,6 +45700,25 @@
                 <a:latin typeface="맑은 고딕"/>
               </a:rPr>
               <a:t>정답:  ① Watch out so as not to falling.</a:t>
+            </a:r>
+          </a:p>
+          <a:p>
+            <a:pPr algn="ctr">
+              <a:lnSpc>
+                <a:spcPct val="105000"/>
+              </a:lnSpc>
+              <a:spcBef>
+                <a:spcPts val="0"/>
+              </a:spcBef>
+            </a:pPr>
+            <a:r>
+              <a:rPr sz="1300" b="0" i="0" u="none">
+                <a:solidFill>
+                  <a:srgbClr val="1E2A4A"/>
+                </a:solidFill>
+                <a:latin typeface="맑은 고딕"/>
+              </a:rPr>
+              <a:t>(어색) 넘어지지 않도록 조심해라. (falling → fall)</a:t>
             </a:r>
           </a:p>
         </p:txBody>
@@ -45493,7 +46170,7 @@
         <p:spPr>
           <a:xfrm>
             <a:off x="457200" y="868680"/>
-            <a:ext cx="11277295" cy="3593591"/>
+            <a:ext cx="11277295" cy="3275837"/>
           </a:xfrm>
           <a:prstGeom prst="rect">
             <a:avLst/>
@@ -45730,7 +46407,7 @@
         <p:spPr>
           <a:xfrm>
             <a:off x="457200" y="868680"/>
-            <a:ext cx="11277295" cy="3593591"/>
+            <a:ext cx="11277295" cy="3275837"/>
           </a:xfrm>
           <a:prstGeom prst="rect">
             <a:avLst/>
@@ -45989,7 +46666,7 @@
         </p:nvCxnSpPr>
         <p:spPr>
           <a:xfrm>
-            <a:off x="457200" y="4507991"/>
+            <a:off x="457200" y="4190237"/>
             <a:ext cx="11277295" cy="0"/>
           </a:xfrm>
           <a:prstGeom prst="line">
@@ -46024,8 +46701,8 @@
         </p:nvSpPr>
         <p:spPr>
           <a:xfrm>
-            <a:off x="457200" y="4645151"/>
-            <a:ext cx="11277295" cy="685800"/>
+            <a:off x="457200" y="4327397"/>
+            <a:ext cx="11277295" cy="1003553"/>
           </a:xfrm>
           <a:prstGeom prst="roundRect">
             <a:avLst>
@@ -46076,6 +46753,25 @@
                 <a:latin typeface="맑은 고딕"/>
               </a:rPr>
               <a:t>정답:  ② could</a:t>
+            </a:r>
+          </a:p>
+          <a:p>
+            <a:pPr algn="ctr">
+              <a:lnSpc>
+                <a:spcPct val="105000"/>
+              </a:lnSpc>
+              <a:spcBef>
+                <a:spcPts val="0"/>
+              </a:spcBef>
+            </a:pPr>
+            <a:r>
+              <a:rPr sz="1300" b="0" i="0" u="none">
+                <a:solidFill>
+                  <a:srgbClr val="1E2A4A"/>
+                </a:solidFill>
+                <a:latin typeface="맑은 고딕"/>
+              </a:rPr>
+              <a:t>A: 와! 멋진 자전거네! B: 이 새 자전거를 살 수 있도록 돈을 모았어.</a:t>
             </a:r>
           </a:p>
         </p:txBody>
@@ -46527,7 +47223,7 @@
         <p:spPr>
           <a:xfrm>
             <a:off x="457200" y="868680"/>
-            <a:ext cx="11277295" cy="3593591"/>
+            <a:ext cx="11277295" cy="3275837"/>
           </a:xfrm>
           <a:prstGeom prst="rect">
             <a:avLst/>
@@ -46701,7 +47397,7 @@
         <p:spPr>
           <a:xfrm>
             <a:off x="457200" y="868680"/>
-            <a:ext cx="11277295" cy="3593591"/>
+            <a:ext cx="11277295" cy="3275837"/>
           </a:xfrm>
           <a:prstGeom prst="rect">
             <a:avLst/>
@@ -46879,7 +47575,7 @@
         </p:nvCxnSpPr>
         <p:spPr>
           <a:xfrm>
-            <a:off x="457200" y="4507991"/>
+            <a:off x="457200" y="4190237"/>
             <a:ext cx="11277295" cy="0"/>
           </a:xfrm>
           <a:prstGeom prst="line">
@@ -46914,8 +47610,8 @@
         </p:nvSpPr>
         <p:spPr>
           <a:xfrm>
-            <a:off x="457200" y="4645151"/>
-            <a:ext cx="11277295" cy="685800"/>
+            <a:off x="457200" y="4327397"/>
+            <a:ext cx="11277295" cy="1003553"/>
           </a:xfrm>
           <a:prstGeom prst="roundRect">
             <a:avLst>
@@ -46966,6 +47662,25 @@
                 <a:latin typeface="맑은 고딕"/>
               </a:rPr>
               <a:t>정답:  ⑤ He ran to the bus stop in order to he could catch.</a:t>
+            </a:r>
+          </a:p>
+          <a:p>
+            <a:pPr algn="ctr">
+              <a:lnSpc>
+                <a:spcPct val="105000"/>
+              </a:lnSpc>
+              <a:spcBef>
+                <a:spcPts val="0"/>
+              </a:spcBef>
+            </a:pPr>
+            <a:r>
+              <a:rPr sz="1300" b="0" i="0" u="none">
+                <a:solidFill>
+                  <a:srgbClr val="1E2A4A"/>
+                </a:solidFill>
+                <a:latin typeface="맑은 고딕"/>
+              </a:rPr>
+              <a:t>(어색) 그는 버스를 탈 수 있도록 버스 정류장으로 달려갔다. (in order to he → in order that he)</a:t>
             </a:r>
           </a:p>
         </p:txBody>
@@ -47417,7 +48132,7 @@
         <p:spPr>
           <a:xfrm>
             <a:off x="457200" y="868680"/>
-            <a:ext cx="11277295" cy="3593591"/>
+            <a:ext cx="11277295" cy="3067811"/>
           </a:xfrm>
           <a:prstGeom prst="rect">
             <a:avLst/>
@@ -47591,7 +48306,7 @@
         <p:spPr>
           <a:xfrm>
             <a:off x="457200" y="868680"/>
-            <a:ext cx="11277295" cy="3593591"/>
+            <a:ext cx="11277295" cy="3067811"/>
           </a:xfrm>
           <a:prstGeom prst="rect">
             <a:avLst/>
@@ -47769,7 +48484,7 @@
         </p:nvCxnSpPr>
         <p:spPr>
           <a:xfrm>
-            <a:off x="457200" y="4507991"/>
+            <a:off x="457200" y="3982211"/>
             <a:ext cx="11277295" cy="0"/>
           </a:xfrm>
           <a:prstGeom prst="line">
@@ -47804,8 +48519,8 @@
         </p:nvSpPr>
         <p:spPr>
           <a:xfrm>
-            <a:off x="457200" y="4645151"/>
-            <a:ext cx="11277295" cy="685800"/>
+            <a:off x="457200" y="4119371"/>
+            <a:ext cx="11277295" cy="1211580"/>
           </a:xfrm>
           <a:prstGeom prst="roundRect">
             <a:avLst>
@@ -47856,6 +48571,25 @@
                 <a:latin typeface="맑은 고딕"/>
               </a:rPr>
               <a:t>정답:  ① I woke up early so that I will not be late. / ② He was so wisdom that he was able to solve it.</a:t>
+            </a:r>
+          </a:p>
+          <a:p>
+            <a:pPr algn="ctr">
+              <a:lnSpc>
+                <a:spcPct val="105000"/>
+              </a:lnSpc>
+              <a:spcBef>
+                <a:spcPts val="0"/>
+              </a:spcBef>
+            </a:pPr>
+            <a:r>
+              <a:rPr sz="1300" b="0" i="0" u="none">
+                <a:solidFill>
+                  <a:srgbClr val="1E2A4A"/>
+                </a:solidFill>
+                <a:latin typeface="맑은 고딕"/>
+              </a:rPr>
+              <a:t>① (어색) 나는 지각하지 않도록 일찍 일어났다. (will → would)  /  ② (어색) 그는 너무 지혜로워서 그것을 풀 수 있었다. (wisdom → wise)</a:t>
             </a:r>
           </a:p>
         </p:txBody>
@@ -48329,7 +49063,7 @@
         <p:spPr>
           <a:xfrm>
             <a:off x="457200" y="868680"/>
-            <a:ext cx="11277295" cy="495299"/>
+            <a:ext cx="11277295" cy="463296"/>
           </a:xfrm>
           <a:prstGeom prst="rect">
             <a:avLst/>
@@ -48354,7 +49088,7 @@
               </a:spcAft>
             </a:pPr>
             <a:r>
-              <a:rPr sz="2000" b="1" i="0" u="none">
+              <a:rPr sz="1800" b="1" i="0" u="none">
                 <a:solidFill>
                   <a:srgbClr val="1E2A4A"/>
                 </a:solidFill>
@@ -48373,8 +49107,8 @@
         </p:nvSpPr>
         <p:spPr>
           <a:xfrm>
-            <a:off x="457200" y="1363980"/>
-            <a:ext cx="8214055" cy="3098291"/>
+            <a:off x="457200" y="1331976"/>
+            <a:ext cx="8214055" cy="2604515"/>
           </a:xfrm>
           <a:prstGeom prst="rect">
             <a:avLst/>
@@ -48399,7 +49133,7 @@
               </a:spcAft>
             </a:pPr>
             <a:r>
-              <a:rPr sz="1900" b="0" i="0" u="none">
+              <a:rPr sz="1700" b="0" i="0" u="none">
                 <a:solidFill>
                   <a:srgbClr val="222222"/>
                 </a:solidFill>
@@ -48421,7 +49155,7 @@
               </a:spcAft>
             </a:pPr>
             <a:r>
-              <a:rPr sz="1900" b="0" i="0" u="none">
+              <a:rPr sz="1700" b="0" i="0" u="none">
                 <a:solidFill>
                   <a:srgbClr val="222222"/>
                 </a:solidFill>
@@ -48443,7 +49177,7 @@
               </a:spcAft>
             </a:pPr>
             <a:r>
-              <a:rPr sz="1900" b="0" i="0" u="none">
+              <a:rPr sz="1700" b="0" i="0" u="none">
                 <a:solidFill>
                   <a:srgbClr val="222222"/>
                 </a:solidFill>
@@ -48465,7 +49199,7 @@
               </a:spcAft>
             </a:pPr>
             <a:r>
-              <a:rPr sz="1900" b="0" i="0" u="none">
+              <a:rPr sz="1700" b="0" i="0" u="none">
                 <a:solidFill>
                   <a:srgbClr val="222222"/>
                 </a:solidFill>
@@ -48487,7 +49221,7 @@
               </a:spcAft>
             </a:pPr>
             <a:r>
-              <a:rPr sz="1900" b="0" i="0" u="none">
+              <a:rPr sz="1700" b="0" i="0" u="none">
                 <a:solidFill>
                   <a:srgbClr val="222222"/>
                 </a:solidFill>
@@ -48506,8 +49240,8 @@
         </p:nvSpPr>
         <p:spPr>
           <a:xfrm>
-            <a:off x="8808415" y="1363980"/>
-            <a:ext cx="2926080" cy="3098291"/>
+            <a:off x="8808415" y="1331976"/>
+            <a:ext cx="2926080" cy="2604515"/>
           </a:xfrm>
           <a:prstGeom prst="roundRect">
             <a:avLst>
@@ -48554,7 +49288,7 @@
               </a:spcAft>
             </a:pPr>
             <a:r>
-              <a:rPr sz="1900" b="0" i="0" u="none">
+              <a:rPr sz="1700" b="0" i="0" u="none">
                 <a:solidFill>
                   <a:srgbClr val="222222"/>
                 </a:solidFill>
@@ -48576,7 +49310,7 @@
               </a:spcAft>
             </a:pPr>
             <a:r>
-              <a:rPr sz="1900" b="0" i="0" u="none">
+              <a:rPr sz="1700" b="0" i="0" u="none">
                 <a:solidFill>
                   <a:srgbClr val="222222"/>
                 </a:solidFill>
@@ -48598,7 +49332,7 @@
               </a:spcAft>
             </a:pPr>
             <a:r>
-              <a:rPr sz="1900" b="0" i="0" u="none">
+              <a:rPr sz="1700" b="0" i="0" u="none">
                 <a:solidFill>
                   <a:srgbClr val="222222"/>
                 </a:solidFill>
@@ -48620,7 +49354,7 @@
               </a:spcAft>
             </a:pPr>
             <a:r>
-              <a:rPr sz="1900" b="0" i="0" u="none">
+              <a:rPr sz="1700" b="0" i="0" u="none">
                 <a:solidFill>
                   <a:srgbClr val="222222"/>
                 </a:solidFill>
@@ -48642,7 +49376,7 @@
               </a:spcAft>
             </a:pPr>
             <a:r>
-              <a:rPr sz="1900" b="0" i="0" u="none">
+              <a:rPr sz="1700" b="0" i="0" u="none">
                 <a:solidFill>
                   <a:srgbClr val="222222"/>
                 </a:solidFill>
@@ -48661,8 +49395,8 @@
         </p:nvSpPr>
         <p:spPr>
           <a:xfrm>
-            <a:off x="8808415" y="1363980"/>
-            <a:ext cx="2926080" cy="3098291"/>
+            <a:off x="8808415" y="1331976"/>
+            <a:ext cx="2926080" cy="2604515"/>
           </a:xfrm>
           <a:prstGeom prst="rect">
             <a:avLst/>
@@ -48692,7 +49426,7 @@
               </a:spcAft>
             </a:pPr>
             <a:r>
-              <a:rPr sz="1900" b="0" i="0" u="none">
+              <a:rPr sz="1700" b="0" i="0" u="none">
                 <a:solidFill>
                   <a:srgbClr val="222222"/>
                 </a:solidFill>
@@ -48714,7 +49448,7 @@
               </a:spcAft>
             </a:pPr>
             <a:r>
-              <a:rPr sz="1900" b="1" i="0" u="none">
+              <a:rPr sz="1700" b="1" i="0" u="none">
                 <a:solidFill>
                   <a:srgbClr val="C03A2E"/>
                 </a:solidFill>
@@ -48736,7 +49470,7 @@
               </a:spcAft>
             </a:pPr>
             <a:r>
-              <a:rPr sz="1900" b="0" i="0" u="none">
+              <a:rPr sz="1700" b="0" i="0" u="none">
                 <a:solidFill>
                   <a:srgbClr val="222222"/>
                 </a:solidFill>
@@ -48758,7 +49492,7 @@
               </a:spcAft>
             </a:pPr>
             <a:r>
-              <a:rPr sz="1900" b="0" i="0" u="none">
+              <a:rPr sz="1700" b="0" i="0" u="none">
                 <a:solidFill>
                   <a:srgbClr val="222222"/>
                 </a:solidFill>
@@ -48780,7 +49514,7 @@
               </a:spcAft>
             </a:pPr>
             <a:r>
-              <a:rPr sz="1900" b="0" i="0" u="none">
+              <a:rPr sz="1700" b="0" i="0" u="none">
                 <a:solidFill>
                   <a:srgbClr val="222222"/>
                 </a:solidFill>
@@ -48799,7 +49533,7 @@
         </p:nvCxnSpPr>
         <p:spPr>
           <a:xfrm>
-            <a:off x="457200" y="4507991"/>
+            <a:off x="457200" y="3982211"/>
             <a:ext cx="11277295" cy="0"/>
           </a:xfrm>
           <a:prstGeom prst="line">
@@ -48834,8 +49568,8 @@
         </p:nvSpPr>
         <p:spPr>
           <a:xfrm>
-            <a:off x="457200" y="4645151"/>
-            <a:ext cx="11277295" cy="685800"/>
+            <a:off x="457200" y="4119371"/>
+            <a:ext cx="11277295" cy="1211580"/>
           </a:xfrm>
           <a:prstGeom prst="roundRect">
             <a:avLst>
@@ -48886,6 +49620,25 @@
                 <a:latin typeface="맑은 고딕"/>
               </a:rPr>
               <a:t>정답:  ② (A), (D)</a:t>
+            </a:r>
+          </a:p>
+          <a:p>
+            <a:pPr algn="ctr">
+              <a:lnSpc>
+                <a:spcPct val="105000"/>
+              </a:lnSpc>
+              <a:spcBef>
+                <a:spcPts val="0"/>
+              </a:spcBef>
+            </a:pPr>
+            <a:r>
+              <a:rPr sz="1300" b="0" i="0" u="none">
+                <a:solidFill>
+                  <a:srgbClr val="1E2A4A"/>
+                </a:solidFill>
+                <a:latin typeface="맑은 고딕"/>
+              </a:rPr>
+              <a:t>(A) 그녀는 매우 현명해서 모두가 그녀를 존경한다.  /  (D) 그녀는 달걀을 떨어뜨리지 않도록 매우 조심했다.</a:t>
             </a:r>
           </a:p>
         </p:txBody>
@@ -51419,7 +52172,7 @@
         <p:spPr>
           <a:xfrm>
             <a:off x="457200" y="868680"/>
-            <a:ext cx="11277295" cy="3593591"/>
+            <a:ext cx="11277295" cy="3275837"/>
           </a:xfrm>
           <a:prstGeom prst="rect">
             <a:avLst/>
@@ -51656,7 +52409,7 @@
         <p:spPr>
           <a:xfrm>
             <a:off x="457200" y="868680"/>
-            <a:ext cx="11277295" cy="3593591"/>
+            <a:ext cx="11277295" cy="3275837"/>
           </a:xfrm>
           <a:prstGeom prst="rect">
             <a:avLst/>
@@ -51897,7 +52650,7 @@
         </p:nvCxnSpPr>
         <p:spPr>
           <a:xfrm>
-            <a:off x="457200" y="4507991"/>
+            <a:off x="457200" y="4190237"/>
             <a:ext cx="11277295" cy="0"/>
           </a:xfrm>
           <a:prstGeom prst="line">
@@ -51932,8 +52685,8 @@
         </p:nvSpPr>
         <p:spPr>
           <a:xfrm>
-            <a:off x="457200" y="4645151"/>
-            <a:ext cx="11277295" cy="685800"/>
+            <a:off x="457200" y="4327397"/>
+            <a:ext cx="11277295" cy="1003553"/>
           </a:xfrm>
           <a:prstGeom prst="roundRect">
             <a:avLst>
@@ -51984,6 +52737,25 @@
                 <a:latin typeface="맑은 고딕"/>
               </a:rPr>
               <a:t>정답:  ① so that / ④ in order that</a:t>
+            </a:r>
+          </a:p>
+          <a:p>
+            <a:pPr algn="ctr">
+              <a:lnSpc>
+                <a:spcPct val="105000"/>
+              </a:lnSpc>
+              <a:spcBef>
+                <a:spcPts val="0"/>
+              </a:spcBef>
+            </a:pPr>
+            <a:r>
+              <a:rPr sz="1300" b="0" i="0" u="none">
+                <a:solidFill>
+                  <a:srgbClr val="1E2A4A"/>
+                </a:solidFill>
+                <a:latin typeface="맑은 고딕"/>
+              </a:rPr>
+              <a:t>나는 책을 살 수 있도록 서점에 갔다.</a:t>
             </a:r>
           </a:p>
         </p:txBody>
@@ -52435,7 +53207,7 @@
         <p:spPr>
           <a:xfrm>
             <a:off x="457200" y="868680"/>
-            <a:ext cx="11277295" cy="3593591"/>
+            <a:ext cx="11277295" cy="847344"/>
           </a:xfrm>
           <a:prstGeom prst="rect">
             <a:avLst/>
@@ -52460,232 +53232,262 @@
               </a:spcAft>
             </a:pPr>
             <a:r>
-              <a:rPr sz="1900" b="1" i="0" u="none">
+              <a:rPr sz="2100" b="1" i="0" u="none">
                 <a:solidFill>
                   <a:srgbClr val="1E2A4A"/>
                 </a:solidFill>
                 <a:latin typeface="맑은 고딕"/>
               </a:rPr>
               <a:t>다음 주어진 문장과 같은 의미가 되도록 빈칸에 들 어갈 말로 바르게 연결된 것은?</a:t>
-            </a:r>
-          </a:p>
-          <a:p>
-            <a:pPr algn="l">
-              <a:lnSpc>
-                <a:spcPct val="105000"/>
-              </a:lnSpc>
-              <a:spcBef>
-                <a:spcPts val="0"/>
-              </a:spcBef>
-            </a:pPr>
-            <a:r>
-              <a:rPr sz="600" b="0" i="0" u="none">
-                <a:solidFill>
-                  <a:srgbClr val="555555"/>
-                </a:solidFill>
-                <a:latin typeface="맑은 고딕"/>
-              </a:rPr>
-              <a:t> </a:t>
-            </a:r>
-          </a:p>
-          <a:p>
-            <a:pPr algn="l" marL="228600">
-              <a:lnSpc>
-                <a:spcPct val="105000"/>
-              </a:lnSpc>
-              <a:spcBef>
-                <a:spcPts val="0"/>
-              </a:spcBef>
-              <a:spcAft>
-                <a:spcPts val="200"/>
-              </a:spcAft>
-            </a:pPr>
-            <a:r>
-              <a:rPr sz="1800" b="0" i="0" u="none">
-                <a:solidFill>
-                  <a:srgbClr val="222222"/>
-                </a:solidFill>
-                <a:latin typeface="맑은 고딕"/>
-              </a:rPr>
-              <a:t>He quit his job to take care of his baby.</a:t>
-            </a:r>
-          </a:p>
-          <a:p>
-            <a:pPr algn="l" marL="228600">
-              <a:lnSpc>
-                <a:spcPct val="105000"/>
-              </a:lnSpc>
-              <a:spcBef>
-                <a:spcPts val="0"/>
-              </a:spcBef>
-              <a:spcAft>
-                <a:spcPts val="200"/>
-              </a:spcAft>
-            </a:pPr>
-            <a:r>
-              <a:rPr sz="1800" b="0" i="0" u="none">
-                <a:solidFill>
-                  <a:srgbClr val="222222"/>
-                </a:solidFill>
-                <a:latin typeface="맑은 고딕"/>
-              </a:rPr>
-              <a:t>= He quit his job ________ that he ________ take care of his baby.</a:t>
-            </a:r>
-          </a:p>
-          <a:p>
-            <a:pPr algn="l">
-              <a:lnSpc>
-                <a:spcPct val="105000"/>
-              </a:lnSpc>
-              <a:spcBef>
-                <a:spcPts val="0"/>
-              </a:spcBef>
-            </a:pPr>
-            <a:r>
-              <a:rPr sz="800" b="0" i="0" u="none">
-                <a:solidFill>
-                  <a:srgbClr val="555555"/>
-                </a:solidFill>
-                <a:latin typeface="맑은 고딕"/>
-              </a:rPr>
-              <a:t> </a:t>
-            </a:r>
-          </a:p>
-          <a:p>
-            <a:pPr algn="l">
-              <a:lnSpc>
-                <a:spcPct val="105000"/>
-              </a:lnSpc>
-              <a:spcBef>
-                <a:spcPts val="0"/>
-              </a:spcBef>
-              <a:spcAft>
-                <a:spcPts val="300"/>
-              </a:spcAft>
-            </a:pPr>
-            <a:r>
-              <a:rPr sz="1800" b="0" i="0" u="none">
-                <a:solidFill>
-                  <a:srgbClr val="222222"/>
-                </a:solidFill>
-                <a:latin typeface="맑은 고딕"/>
-              </a:rPr>
-              <a:t>① so - can</a:t>
-            </a:r>
-          </a:p>
-          <a:p>
-            <a:pPr algn="l">
-              <a:lnSpc>
-                <a:spcPct val="105000"/>
-              </a:lnSpc>
-              <a:spcBef>
-                <a:spcPts val="0"/>
-              </a:spcBef>
-              <a:spcAft>
-                <a:spcPts val="300"/>
-              </a:spcAft>
-            </a:pPr>
-            <a:r>
-              <a:rPr sz="1800" b="0" i="0" u="none">
-                <a:solidFill>
-                  <a:srgbClr val="222222"/>
-                </a:solidFill>
-                <a:latin typeface="맑은 고딕"/>
-              </a:rPr>
-              <a:t>② in - will</a:t>
-            </a:r>
-          </a:p>
-          <a:p>
-            <a:pPr algn="l">
-              <a:lnSpc>
-                <a:spcPct val="105000"/>
-              </a:lnSpc>
-              <a:spcBef>
-                <a:spcPts val="0"/>
-              </a:spcBef>
-              <a:spcAft>
-                <a:spcPts val="300"/>
-              </a:spcAft>
-            </a:pPr>
-            <a:r>
-              <a:rPr sz="1800" b="0" i="0" u="none">
-                <a:solidFill>
-                  <a:srgbClr val="222222"/>
-                </a:solidFill>
-                <a:latin typeface="맑은 고딕"/>
-              </a:rPr>
-              <a:t>③ in - could</a:t>
-            </a:r>
-          </a:p>
-          <a:p>
-            <a:pPr algn="l">
-              <a:lnSpc>
-                <a:spcPct val="105000"/>
-              </a:lnSpc>
-              <a:spcBef>
-                <a:spcPts val="0"/>
-              </a:spcBef>
-              <a:spcAft>
-                <a:spcPts val="300"/>
-              </a:spcAft>
-            </a:pPr>
-            <a:r>
-              <a:rPr sz="1800" b="0" i="0" u="none">
-                <a:solidFill>
-                  <a:srgbClr val="222222"/>
-                </a:solidFill>
-                <a:latin typeface="맑은 고딕"/>
-              </a:rPr>
-              <a:t>④ so - could</a:t>
-            </a:r>
-          </a:p>
-          <a:p>
-            <a:pPr algn="l">
-              <a:lnSpc>
-                <a:spcPct val="105000"/>
-              </a:lnSpc>
-              <a:spcBef>
-                <a:spcPts val="0"/>
-              </a:spcBef>
-              <a:spcAft>
-                <a:spcPts val="300"/>
-              </a:spcAft>
-            </a:pPr>
-            <a:r>
-              <a:rPr sz="1800" b="0" i="0" u="none">
-                <a:solidFill>
-                  <a:srgbClr val="222222"/>
-                </a:solidFill>
-                <a:latin typeface="맑은 고딕"/>
-              </a:rPr>
-              <a:t>⑤ so - will</a:t>
             </a:r>
           </a:p>
         </p:txBody>
       </p:sp>
       <p:sp>
         <p:nvSpPr>
-          <p:cNvPr id="7" name="reveal_1_en_ov"/>
+          <p:cNvPr id="7" name="TextBox 6"/>
           <p:cNvSpPr txBox="1"/>
           <p:nvPr/>
         </p:nvSpPr>
         <p:spPr>
           <a:xfrm>
-            <a:off x="457200" y="868680"/>
-            <a:ext cx="11277295" cy="3593591"/>
+            <a:off x="457200" y="1716023"/>
+            <a:ext cx="8214055" cy="2428493"/>
+          </a:xfrm>
+          <a:prstGeom prst="rect">
+            <a:avLst/>
+          </a:prstGeom>
+          <a:noFill/>
+        </p:spPr>
+        <p:txBody>
+          <a:bodyPr wrap="square" anchor="t" lIns="73152" rIns="73152">
+            <a:spAutoFit/>
+          </a:bodyPr>
+          <a:lstStyle/>
+          <a:p>
+            <a:pPr algn="l" marL="228600">
+              <a:lnSpc>
+                <a:spcPct val="105000"/>
+              </a:lnSpc>
+              <a:spcBef>
+                <a:spcPts val="0"/>
+              </a:spcBef>
+              <a:spcAft>
+                <a:spcPts val="200"/>
+              </a:spcAft>
+            </a:pPr>
+            <a:r>
+              <a:rPr sz="2000" b="0" i="0" u="none">
+                <a:solidFill>
+                  <a:srgbClr val="222222"/>
+                </a:solidFill>
+                <a:latin typeface="맑은 고딕"/>
+              </a:rPr>
+              <a:t>He quit his job to take care of his baby.</a:t>
+            </a:r>
+          </a:p>
+          <a:p>
+            <a:pPr algn="l" marL="228600">
+              <a:lnSpc>
+                <a:spcPct val="105000"/>
+              </a:lnSpc>
+              <a:spcBef>
+                <a:spcPts val="0"/>
+              </a:spcBef>
+              <a:spcAft>
+                <a:spcPts val="200"/>
+              </a:spcAft>
+            </a:pPr>
+            <a:r>
+              <a:rPr sz="2000" b="0" i="0" u="none">
+                <a:solidFill>
+                  <a:srgbClr val="222222"/>
+                </a:solidFill>
+                <a:latin typeface="맑은 고딕"/>
+              </a:rPr>
+              <a:t>= He quit his job ________ that he ________ take care of his baby.</a:t>
+            </a:r>
+          </a:p>
+        </p:txBody>
+      </p:sp>
+      <p:sp>
+        <p:nvSpPr>
+          <p:cNvPr id="8" name="Rounded Rectangle 7"/>
+          <p:cNvSpPr/>
+          <p:nvPr/>
+        </p:nvSpPr>
+        <p:spPr>
+          <a:xfrm>
+            <a:off x="8808415" y="1716023"/>
+            <a:ext cx="2926080" cy="2428493"/>
+          </a:xfrm>
+          <a:prstGeom prst="roundRect">
+            <a:avLst>
+              <a:gd name="adj" fmla="val 6000"/>
+            </a:avLst>
+          </a:prstGeom>
+          <a:solidFill>
+            <a:srgbClr val="F2F3F5"/>
+          </a:solidFill>
+          <a:ln w="15875">
+            <a:solidFill>
+              <a:srgbClr val="F2F3F5"/>
+            </a:solidFill>
+          </a:ln>
+          <a:effectLst/>
+        </p:spPr>
+        <p:style>
+          <a:lnRef idx="1">
+            <a:schemeClr val="accent1"/>
+          </a:lnRef>
+          <a:fillRef idx="3">
+            <a:schemeClr val="accent1"/>
+          </a:fillRef>
+          <a:effectRef idx="2">
+            <a:schemeClr val="accent1"/>
+          </a:effectRef>
+          <a:fontRef idx="minor">
+            <a:schemeClr val="lt1"/>
+          </a:fontRef>
+        </p:style>
+        <p:txBody>
+          <a:bodyPr rtlCol="0" anchor="t" wrap="square" lIns="73152" rIns="73152" tIns="73152"/>
+          <a:lstStyle/>
+          <a:p>
+            <a:pPr algn="l">
+              <a:lnSpc>
+                <a:spcPct val="105000"/>
+              </a:lnSpc>
+              <a:spcBef>
+                <a:spcPts val="0"/>
+              </a:spcBef>
+              <a:spcAft>
+                <a:spcPts val="300"/>
+              </a:spcAft>
+            </a:pPr>
+            <a:r>
+              <a:rPr sz="2000" b="0" i="0" u="none">
+                <a:solidFill>
+                  <a:srgbClr val="222222"/>
+                </a:solidFill>
+                <a:latin typeface="맑은 고딕"/>
+              </a:rPr>
+              <a:t>① so - can</a:t>
+            </a:r>
+          </a:p>
+          <a:p>
+            <a:pPr algn="l">
+              <a:lnSpc>
+                <a:spcPct val="105000"/>
+              </a:lnSpc>
+              <a:spcBef>
+                <a:spcPts val="0"/>
+              </a:spcBef>
+              <a:spcAft>
+                <a:spcPts val="300"/>
+              </a:spcAft>
+            </a:pPr>
+            <a:r>
+              <a:rPr sz="2000" b="0" i="0" u="none">
+                <a:solidFill>
+                  <a:srgbClr val="222222"/>
+                </a:solidFill>
+                <a:latin typeface="맑은 고딕"/>
+              </a:rPr>
+              <a:t>② in - will</a:t>
+            </a:r>
+          </a:p>
+          <a:p>
+            <a:pPr algn="l">
+              <a:lnSpc>
+                <a:spcPct val="105000"/>
+              </a:lnSpc>
+              <a:spcBef>
+                <a:spcPts val="0"/>
+              </a:spcBef>
+              <a:spcAft>
+                <a:spcPts val="300"/>
+              </a:spcAft>
+            </a:pPr>
+            <a:r>
+              <a:rPr sz="2000" b="0" i="0" u="none">
+                <a:solidFill>
+                  <a:srgbClr val="222222"/>
+                </a:solidFill>
+                <a:latin typeface="맑은 고딕"/>
+              </a:rPr>
+              <a:t>③ in - could</a:t>
+            </a:r>
+          </a:p>
+          <a:p>
+            <a:pPr algn="l">
+              <a:lnSpc>
+                <a:spcPct val="105000"/>
+              </a:lnSpc>
+              <a:spcBef>
+                <a:spcPts val="0"/>
+              </a:spcBef>
+              <a:spcAft>
+                <a:spcPts val="300"/>
+              </a:spcAft>
+            </a:pPr>
+            <a:r>
+              <a:rPr sz="2000" b="0" i="0" u="none">
+                <a:solidFill>
+                  <a:srgbClr val="222222"/>
+                </a:solidFill>
+                <a:latin typeface="맑은 고딕"/>
+              </a:rPr>
+              <a:t>④ so - could</a:t>
+            </a:r>
+          </a:p>
+          <a:p>
+            <a:pPr algn="l">
+              <a:lnSpc>
+                <a:spcPct val="105000"/>
+              </a:lnSpc>
+              <a:spcBef>
+                <a:spcPts val="0"/>
+              </a:spcBef>
+              <a:spcAft>
+                <a:spcPts val="300"/>
+              </a:spcAft>
+            </a:pPr>
+            <a:r>
+              <a:rPr sz="2000" b="0" i="0" u="none">
+                <a:solidFill>
+                  <a:srgbClr val="222222"/>
+                </a:solidFill>
+                <a:latin typeface="맑은 고딕"/>
+              </a:rPr>
+              <a:t>⑤ so - will</a:t>
+            </a:r>
+          </a:p>
+        </p:txBody>
+      </p:sp>
+      <p:sp>
+        <p:nvSpPr>
+          <p:cNvPr id="9" name="reveal_1_en_ov"/>
+          <p:cNvSpPr txBox="1"/>
+          <p:nvPr/>
+        </p:nvSpPr>
+        <p:spPr>
+          <a:xfrm>
+            <a:off x="8808415" y="1716023"/>
+            <a:ext cx="2926080" cy="2428493"/>
           </a:xfrm>
           <a:prstGeom prst="rect">
             <a:avLst/>
           </a:prstGeom>
           <a:solidFill>
-            <a:srgbClr val="FFFFFF"/>
+            <a:srgbClr val="F2F3F5"/>
           </a:solidFill>
           <a:ln>
             <a:noFill/>
           </a:ln>
         </p:spPr>
         <p:txBody>
-          <a:bodyPr wrap="square" anchor="t" lIns="73152" rIns="73152">
+          <a:bodyPr wrap="square" anchor="t" lIns="73152" rIns="73152" tIns="73152">
             <a:spAutoFit/>
           </a:bodyPr>
           <a:lstStyle/>
@@ -52702,111 +53504,7 @@
               </a:spcAft>
             </a:pPr>
             <a:r>
-              <a:rPr sz="1900" b="1" i="0" u="none">
-                <a:solidFill>
-                  <a:srgbClr val="1E2A4A"/>
-                </a:solidFill>
-                <a:latin typeface="맑은 고딕"/>
-              </a:rPr>
-              <a:t>다음 주어진 문장과 같은 의미가 되도록 빈칸에 들 어갈 말로 바르게 연결된 것은?</a:t>
-            </a:r>
-          </a:p>
-          <a:p>
-            <a:pPr algn="l">
-              <a:lnSpc>
-                <a:spcPct val="105000"/>
-              </a:lnSpc>
-              <a:spcBef>
-                <a:spcPts val="0"/>
-              </a:spcBef>
-            </a:pPr>
-            <a:r>
-              <a:rPr sz="600" b="0" i="0" u="none">
-                <a:solidFill>
-                  <a:srgbClr val="555555"/>
-                </a:solidFill>
-                <a:latin typeface="맑은 고딕"/>
-              </a:rPr>
-              <a:t> </a:t>
-            </a:r>
-          </a:p>
-          <a:p>
-            <a:pPr algn="l" marL="228600">
-              <a:lnSpc>
-                <a:spcPct val="105000"/>
-              </a:lnSpc>
-              <a:spcBef>
-                <a:spcPts val="0"/>
-              </a:spcBef>
-              <a:spcAft>
-                <a:spcPts val="200"/>
-              </a:spcAft>
-            </a:pPr>
-            <a:r>
-              <a:rPr sz="1800" b="0" i="0" u="none">
-                <a:solidFill>
-                  <a:srgbClr val="222222"/>
-                </a:solidFill>
-                <a:latin typeface="맑은 고딕"/>
-              </a:rPr>
-              <a:t>He quit his job to take care of his baby.</a:t>
-            </a:r>
-          </a:p>
-          <a:p>
-            <a:pPr algn="l" marL="228600">
-              <a:lnSpc>
-                <a:spcPct val="105000"/>
-              </a:lnSpc>
-              <a:spcBef>
-                <a:spcPts val="0"/>
-              </a:spcBef>
-              <a:spcAft>
-                <a:spcPts val="200"/>
-              </a:spcAft>
-            </a:pPr>
-            <a:r>
-              <a:rPr sz="1800" b="0" i="0" u="none">
-                <a:solidFill>
-                  <a:srgbClr val="222222"/>
-                </a:solidFill>
-                <a:latin typeface="맑은 고딕"/>
-              </a:rPr>
-              <a:t>= He quit his job ________ that he ________ take care of his baby.</a:t>
-            </a:r>
-          </a:p>
-          <a:p>
-            <a:pPr algn="l">
-              <a:lnSpc>
-                <a:spcPct val="105000"/>
-              </a:lnSpc>
-              <a:spcBef>
-                <a:spcPts val="0"/>
-              </a:spcBef>
-            </a:pPr>
-            <a:r>
-              <a:rPr sz="800" b="0" i="0" u="none">
-                <a:solidFill>
-                  <a:srgbClr val="555555"/>
-                </a:solidFill>
-                <a:latin typeface="맑은 고딕"/>
-              </a:rPr>
-              <a:t> </a:t>
-            </a:r>
-          </a:p>
-          <a:p>
-            <a:pPr algn="l">
-              <a:lnSpc>
-                <a:spcPct val="105000"/>
-              </a:lnSpc>
-              <a:spcBef>
-                <a:spcPts val="0"/>
-              </a:spcBef>
-              <a:spcAft>
-                <a:spcPts val="300"/>
-              </a:spcAft>
-            </a:pPr>
-            <a:r>
-              <a:rPr sz="1800" b="0" i="0" u="none">
+              <a:rPr sz="2000" b="0" i="0" u="none">
                 <a:solidFill>
                   <a:srgbClr val="222222"/>
                 </a:solidFill>
@@ -52828,7 +53526,7 @@
               </a:spcAft>
             </a:pPr>
             <a:r>
-              <a:rPr sz="1800" b="0" i="0" u="none">
+              <a:rPr sz="2000" b="0" i="0" u="none">
                 <a:solidFill>
                   <a:srgbClr val="222222"/>
                 </a:solidFill>
@@ -52850,7 +53548,7 @@
               </a:spcAft>
             </a:pPr>
             <a:r>
-              <a:rPr sz="1800" b="0" i="0" u="none">
+              <a:rPr sz="2000" b="0" i="0" u="none">
                 <a:solidFill>
                   <a:srgbClr val="222222"/>
                 </a:solidFill>
@@ -52872,7 +53570,7 @@
               </a:spcAft>
             </a:pPr>
             <a:r>
-              <a:rPr sz="1800" b="1" i="0" u="none">
+              <a:rPr sz="2000" b="1" i="0" u="none">
                 <a:solidFill>
                   <a:srgbClr val="C03A2E"/>
                 </a:solidFill>
@@ -52894,7 +53592,7 @@
               </a:spcAft>
             </a:pPr>
             <a:r>
-              <a:rPr sz="1800" b="0" i="0" u="none">
+              <a:rPr sz="2000" b="0" i="0" u="none">
                 <a:solidFill>
                   <a:srgbClr val="222222"/>
                 </a:solidFill>
@@ -52907,13 +53605,13 @@
       </p:sp>
       <p:cxnSp>
         <p:nvCxnSpPr>
-          <p:cNvPr id="8" name="Connector 7"/>
+          <p:cNvPr id="10" name="Connector 9"/>
           <p:cNvCxnSpPr/>
           <p:nvPr/>
         </p:nvCxnSpPr>
         <p:spPr>
           <a:xfrm>
-            <a:off x="457200" y="4507991"/>
+            <a:off x="457200" y="4190237"/>
             <a:ext cx="11277295" cy="0"/>
           </a:xfrm>
           <a:prstGeom prst="line">
@@ -52942,14 +53640,14 @@
       </p:cxnSp>
       <p:sp>
         <p:nvSpPr>
-          <p:cNvPr id="9" name="reveal_1_en"/>
+          <p:cNvPr id="11" name="reveal_1_en"/>
           <p:cNvSpPr/>
           <p:nvPr/>
         </p:nvSpPr>
         <p:spPr>
           <a:xfrm>
-            <a:off x="457200" y="4645151"/>
-            <a:ext cx="11277295" cy="685800"/>
+            <a:off x="457200" y="4327397"/>
+            <a:ext cx="11277295" cy="1003553"/>
           </a:xfrm>
           <a:prstGeom prst="roundRect">
             <a:avLst>
@@ -53002,11 +53700,30 @@
               <a:t>정답:  ④ so - could</a:t>
             </a:r>
           </a:p>
+          <a:p>
+            <a:pPr algn="ctr">
+              <a:lnSpc>
+                <a:spcPct val="105000"/>
+              </a:lnSpc>
+              <a:spcBef>
+                <a:spcPts val="0"/>
+              </a:spcBef>
+            </a:pPr>
+            <a:r>
+              <a:rPr sz="1300" b="0" i="0" u="none">
+                <a:solidFill>
+                  <a:srgbClr val="1E2A4A"/>
+                </a:solidFill>
+                <a:latin typeface="맑은 고딕"/>
+              </a:rPr>
+              <a:t>그는 아기를 돌보기 위해 직장을 그만두었다. = 그는 아기를 돌볼 수 있도록 직장을 그만두었다.</a:t>
+            </a:r>
+          </a:p>
         </p:txBody>
       </p:sp>
       <p:sp>
         <p:nvSpPr>
-          <p:cNvPr id="10" name="reveal_2_en"/>
+          <p:cNvPr id="12" name="reveal_2_en"/>
           <p:cNvSpPr/>
           <p:nvPr/>
         </p:nvSpPr>
@@ -53119,7 +53836,7 @@
                                           </p:stCondLst>
                                         </p:cTn>
                                         <p:tgtEl>
-                                          <p:spTgt spid="9"/>
+                                          <p:spTgt spid="11"/>
                                         </p:tgtEl>
                                         <p:attrNameLst>
                                           <p:attrName>style.visibility</p:attrName>
@@ -53146,7 +53863,7 @@
                                           </p:stCondLst>
                                         </p:cTn>
                                         <p:tgtEl>
-                                          <p:spTgt spid="7"/>
+                                          <p:spTgt spid="9"/>
                                         </p:tgtEl>
                                         <p:attrNameLst>
                                           <p:attrName>style.visibility</p:attrName>
@@ -53191,7 +53908,7 @@
                                           </p:stCondLst>
                                         </p:cTn>
                                         <p:tgtEl>
-                                          <p:spTgt spid="10"/>
+                                          <p:spTgt spid="12"/>
                                         </p:tgtEl>
                                         <p:attrNameLst>
                                           <p:attrName>style.visibility</p:attrName>
@@ -53232,9 +53949,9 @@
       </p:par>
     </p:tnLst>
     <p:bldLst>
+      <p:bldP spid="11" grpId="0" animBg="1"/>
       <p:bldP spid="9" grpId="0" animBg="1"/>
-      <p:bldP spid="7" grpId="0" animBg="1"/>
-      <p:bldP spid="10" grpId="0" animBg="1"/>
+      <p:bldP spid="12" grpId="0" animBg="1"/>
     </p:bldLst>
   </p:timing>
 </p:sld>
@@ -53451,7 +54168,7 @@
         <p:spPr>
           <a:xfrm>
             <a:off x="457200" y="868680"/>
-            <a:ext cx="11277295" cy="3593591"/>
+            <a:ext cx="11277295" cy="3275837"/>
           </a:xfrm>
           <a:prstGeom prst="rect">
             <a:avLst/>
@@ -53688,7 +54405,7 @@
         <p:spPr>
           <a:xfrm>
             <a:off x="457200" y="868680"/>
-            <a:ext cx="11277295" cy="3593591"/>
+            <a:ext cx="11277295" cy="3275837"/>
           </a:xfrm>
           <a:prstGeom prst="rect">
             <a:avLst/>
@@ -53947,7 +54664,7 @@
         </p:nvCxnSpPr>
         <p:spPr>
           <a:xfrm>
-            <a:off x="457200" y="4507991"/>
+            <a:off x="457200" y="4190237"/>
             <a:ext cx="11277295" cy="0"/>
           </a:xfrm>
           <a:prstGeom prst="line">
@@ -53982,8 +54699,8 @@
         </p:nvSpPr>
         <p:spPr>
           <a:xfrm>
-            <a:off x="457200" y="4645151"/>
-            <a:ext cx="11277295" cy="685800"/>
+            <a:off x="457200" y="4327397"/>
+            <a:ext cx="11277295" cy="1003553"/>
           </a:xfrm>
           <a:prstGeom prst="roundRect">
             <a:avLst>
@@ -54034,6 +54751,25 @@
                 <a:latin typeface="맑은 고딕"/>
               </a:rPr>
               <a:t>정답:  ⑤ in order to</a:t>
+            </a:r>
+          </a:p>
+          <a:p>
+            <a:pPr algn="ctr">
+              <a:lnSpc>
+                <a:spcPct val="105000"/>
+              </a:lnSpc>
+              <a:spcBef>
+                <a:spcPts val="0"/>
+              </a:spcBef>
+            </a:pPr>
+            <a:r>
+              <a:rPr sz="1300" b="0" i="0" u="none">
+                <a:solidFill>
+                  <a:srgbClr val="1E2A4A"/>
+                </a:solidFill>
+                <a:latin typeface="맑은 고딕"/>
+              </a:rPr>
+              <a:t>그녀는 가난한 사람들을 돕기 위해 약간의 돈을 기부했다.</a:t>
             </a:r>
           </a:p>
         </p:txBody>
@@ -54530,7 +55266,7 @@
         <p:spPr>
           <a:xfrm>
             <a:off x="457200" y="1716023"/>
-            <a:ext cx="8214055" cy="2746247"/>
+            <a:ext cx="8214055" cy="2428493"/>
           </a:xfrm>
           <a:prstGeom prst="rect">
             <a:avLst/>
@@ -54619,7 +55355,7 @@
         <p:spPr>
           <a:xfrm>
             <a:off x="8808415" y="1716023"/>
-            <a:ext cx="2926080" cy="2746247"/>
+            <a:ext cx="2926080" cy="2428493"/>
           </a:xfrm>
           <a:prstGeom prst="roundRect">
             <a:avLst>
@@ -54774,7 +55510,7 @@
         <p:spPr>
           <a:xfrm>
             <a:off x="8808415" y="1716023"/>
-            <a:ext cx="2926080" cy="2746247"/>
+            <a:ext cx="2926080" cy="2428493"/>
           </a:xfrm>
           <a:prstGeom prst="rect">
             <a:avLst/>
@@ -54911,7 +55647,7 @@
         </p:nvCxnSpPr>
         <p:spPr>
           <a:xfrm>
-            <a:off x="457200" y="4507991"/>
+            <a:off x="457200" y="4190237"/>
             <a:ext cx="11277295" cy="0"/>
           </a:xfrm>
           <a:prstGeom prst="line">
@@ -54946,8 +55682,8 @@
         </p:nvSpPr>
         <p:spPr>
           <a:xfrm>
-            <a:off x="457200" y="4645151"/>
-            <a:ext cx="11277295" cy="685800"/>
+            <a:off x="457200" y="4327397"/>
+            <a:ext cx="11277295" cy="1003553"/>
           </a:xfrm>
           <a:prstGeom prst="roundRect">
             <a:avLst>
@@ -54998,6 +55734,25 @@
                 <a:latin typeface="맑은 고딕"/>
               </a:rPr>
               <a:t>정답:  ② so that</a:t>
+            </a:r>
+          </a:p>
+          <a:p>
+            <a:pPr algn="ctr">
+              <a:lnSpc>
+                <a:spcPct val="105000"/>
+              </a:lnSpc>
+              <a:spcBef>
+                <a:spcPts val="0"/>
+              </a:spcBef>
+            </a:pPr>
+            <a:r>
+              <a:rPr sz="1300" b="0" i="0" u="none">
+                <a:solidFill>
+                  <a:srgbClr val="1E2A4A"/>
+                </a:solidFill>
+                <a:latin typeface="맑은 고딕"/>
+              </a:rPr>
+              <a:t>모든 한국인이 읽고 쓰는 것을 배울 수 있도록 세종대왕은 한글을 만들었다.</a:t>
             </a:r>
           </a:p>
         </p:txBody>
